--- a/ppt/DeekondaRakshan_X25180754_wildfire-forest-monitoring.pptx
+++ b/ppt/DeekondaRakshan_X25180754_wildfire-forest-monitoring.pptx
@@ -1144,14 +1144,34 @@
       </p:grpSpPr>
       <p:sp>
         <p:nvSpPr>
-          <p:cNvPr id="2" name="Text 0"/>
-          <p:cNvSpPr/>
-          <p:nvPr/>
-        </p:nvSpPr>
-        <p:spPr>
-          <a:xfrm>
-            <a:off x="640080" y="914400"/>
-            <a:ext cx="10972800" cy="1280160"/>
+          <p:cNvPr id="2" name="Shape 0"/>
+          <p:cNvSpPr/>
+          <p:nvPr/>
+        </p:nvSpPr>
+        <p:spPr>
+          <a:xfrm>
+            <a:off x="0" y="0"/>
+            <a:ext cx="4663440" cy="6858000"/>
+          </a:xfrm>
+          <a:prstGeom prst="rect">
+            <a:avLst/>
+          </a:prstGeom>
+          <a:solidFill>
+            <a:srgbClr val="2C5F2D"/>
+          </a:solidFill>
+          <a:ln/>
+        </p:spPr>
+      </p:sp>
+      <p:sp>
+        <p:nvSpPr>
+          <p:cNvPr id="3" name="Text 1"/>
+          <p:cNvSpPr/>
+          <p:nvPr/>
+        </p:nvSpPr>
+        <p:spPr>
+          <a:xfrm>
+            <a:off x="502920" y="1280160"/>
+            <a:ext cx="3749040" cy="2377440"/>
           </a:xfrm>
           <a:prstGeom prst="rect">
             <a:avLst/>
@@ -1163,11 +1183,11 @@
           <a:bodyPr wrap="square" rtlCol="0" anchor="t"/>
           <a:lstStyle/>
           <a:p>
-            <a:pPr algn="l" indent="0" marL="0">
-              <a:buNone/>
-            </a:pPr>
-            <a:r>
-              <a:rPr lang="en-US" sz="4000" b="1" dirty="0">
+            <a:pPr indent="0" marL="0">
+              <a:buNone/>
+            </a:pPr>
+            <a:r>
+              <a:rPr lang="en-US" sz="3400" b="1" dirty="0">
                 <a:solidFill>
                   <a:srgbClr val="FFFFFF"/>
                 </a:solidFill>
@@ -1177,20 +1197,20 @@
               </a:rPr>
               <a:t>Wildfire Forest Monitoring</a:t>
             </a:r>
-            <a:endParaRPr lang="en-US" sz="4000" dirty="0"/>
-          </a:p>
-        </p:txBody>
-      </p:sp>
-      <p:sp>
-        <p:nvSpPr>
-          <p:cNvPr id="3" name="Text 1"/>
-          <p:cNvSpPr/>
-          <p:nvPr/>
-        </p:nvSpPr>
-        <p:spPr>
-          <a:xfrm>
-            <a:off x="658368" y="2148840"/>
-            <a:ext cx="10972800" cy="365760"/>
+            <a:endParaRPr lang="en-US" sz="3400" dirty="0"/>
+          </a:p>
+        </p:txBody>
+      </p:sp>
+      <p:sp>
+        <p:nvSpPr>
+          <p:cNvPr id="4" name="Text 2"/>
+          <p:cNvSpPr/>
+          <p:nvPr/>
+        </p:nvSpPr>
+        <p:spPr>
+          <a:xfrm>
+            <a:off x="521208" y="5394960"/>
+            <a:ext cx="3840480" cy="731520"/>
           </a:xfrm>
           <a:prstGeom prst="rect">
             <a:avLst/>
@@ -1206,9 +1226,9 @@
               <a:buNone/>
             </a:pPr>
             <a:r>
-              <a:rPr lang="en-US" sz="1600" dirty="0">
-                <a:solidFill>
-                  <a:srgbClr val="6A9A52"/>
+              <a:rPr lang="en-US" sz="1500" dirty="0">
+                <a:solidFill>
+                  <a:srgbClr val="D3E1CB"/>
                 </a:solidFill>
                 <a:latin typeface="Calibri" pitchFamily="34" charset="0"/>
                 <a:ea typeface="Calibri" pitchFamily="34" charset="-122"/>
@@ -1216,20 +1236,20 @@
               </a:rPr>
               <a:t>Deekonda Rakshan   ·   X25180754</a:t>
             </a:r>
-            <a:endParaRPr lang="en-US" sz="1600" dirty="0"/>
-          </a:p>
-        </p:txBody>
-      </p:sp>
-      <p:sp>
-        <p:nvSpPr>
-          <p:cNvPr id="4" name="Text 2"/>
-          <p:cNvSpPr/>
-          <p:nvPr/>
-        </p:nvSpPr>
-        <p:spPr>
-          <a:xfrm>
-            <a:off x="658368" y="2697480"/>
-            <a:ext cx="10424160" cy="1371600"/>
+            <a:endParaRPr lang="en-US" sz="1500" dirty="0"/>
+          </a:p>
+        </p:txBody>
+      </p:sp>
+      <p:sp>
+        <p:nvSpPr>
+          <p:cNvPr id="5" name="Text 3"/>
+          <p:cNvSpPr/>
+          <p:nvPr/>
+        </p:nvSpPr>
+        <p:spPr>
+          <a:xfrm>
+            <a:off x="5120640" y="1371600"/>
+            <a:ext cx="6492240" cy="2011680"/>
           </a:xfrm>
           <a:prstGeom prst="rect">
             <a:avLst/>
@@ -1243,7 +1263,7 @@
           <a:p>
             <a:pPr indent="0" marL="0">
               <a:lnSpc>
-                <a:spcPct val="110000"/>
+                <a:spcPct val="112000"/>
               </a:lnSpc>
               <a:buNone/>
             </a:pPr>
@@ -1264,14 +1284,14 @@
       </p:sp>
       <p:sp>
         <p:nvSpPr>
-          <p:cNvPr id="5" name="Shape 3"/>
-          <p:cNvSpPr/>
-          <p:nvPr/>
-        </p:nvSpPr>
-        <p:spPr>
-          <a:xfrm>
-            <a:off x="658368" y="4206240"/>
-            <a:ext cx="2651760" cy="566928"/>
+          <p:cNvPr id="6" name="Shape 4"/>
+          <p:cNvSpPr/>
+          <p:nvPr/>
+        </p:nvSpPr>
+        <p:spPr>
+          <a:xfrm>
+            <a:off x="5120640" y="4023360"/>
+            <a:ext cx="2926080" cy="566928"/>
           </a:xfrm>
           <a:prstGeom prst="roundRect">
             <a:avLst>
@@ -1291,14 +1311,14 @@
       </p:sp>
       <p:sp>
         <p:nvSpPr>
-          <p:cNvPr id="6" name="Text 4"/>
-          <p:cNvSpPr/>
-          <p:nvPr/>
-        </p:nvSpPr>
-        <p:spPr>
-          <a:xfrm>
-            <a:off x="658368" y="4206240"/>
-            <a:ext cx="2651760" cy="566928"/>
+          <p:cNvPr id="7" name="Text 5"/>
+          <p:cNvSpPr/>
+          <p:nvPr/>
+        </p:nvSpPr>
+        <p:spPr>
+          <a:xfrm>
+            <a:off x="5120640" y="4023360"/>
+            <a:ext cx="2926080" cy="566928"/>
           </a:xfrm>
           <a:prstGeom prst="rect">
             <a:avLst/>
@@ -1314,7 +1334,7 @@
               <a:buNone/>
             </a:pPr>
             <a:r>
-              <a:rPr lang="en-US" sz="1400" b="1" dirty="0">
+              <a:rPr lang="en-US" sz="1350" b="1" dirty="0">
                 <a:solidFill>
                   <a:srgbClr val="E4772E"/>
                 </a:solidFill>
@@ -1324,20 +1344,20 @@
               </a:rPr>
               <a:t>Heat alarm 42 °C</a:t>
             </a:r>
-            <a:endParaRPr lang="en-US" sz="1400" dirty="0"/>
-          </a:p>
-        </p:txBody>
-      </p:sp>
-      <p:sp>
-        <p:nvSpPr>
-          <p:cNvPr id="7" name="Shape 5"/>
-          <p:cNvSpPr/>
-          <p:nvPr/>
-        </p:nvSpPr>
-        <p:spPr>
-          <a:xfrm>
-            <a:off x="3538728" y="4206240"/>
-            <a:ext cx="2651760" cy="566928"/>
+            <a:endParaRPr lang="en-US" sz="1350" dirty="0"/>
+          </a:p>
+        </p:txBody>
+      </p:sp>
+      <p:sp>
+        <p:nvSpPr>
+          <p:cNvPr id="8" name="Shape 6"/>
+          <p:cNvSpPr/>
+          <p:nvPr/>
+        </p:nvSpPr>
+        <p:spPr>
+          <a:xfrm>
+            <a:off x="5120640" y="4709160"/>
+            <a:ext cx="2926080" cy="566928"/>
           </a:xfrm>
           <a:prstGeom prst="roundRect">
             <a:avLst>
@@ -1357,14 +1377,14 @@
       </p:sp>
       <p:sp>
         <p:nvSpPr>
-          <p:cNvPr id="8" name="Text 6"/>
-          <p:cNvSpPr/>
-          <p:nvPr/>
-        </p:nvSpPr>
-        <p:spPr>
-          <a:xfrm>
-            <a:off x="3538728" y="4206240"/>
-            <a:ext cx="2651760" cy="566928"/>
+          <p:cNvPr id="9" name="Text 7"/>
+          <p:cNvSpPr/>
+          <p:nvPr/>
+        </p:nvSpPr>
+        <p:spPr>
+          <a:xfrm>
+            <a:off x="5120640" y="4709160"/>
+            <a:ext cx="2926080" cy="566928"/>
           </a:xfrm>
           <a:prstGeom prst="rect">
             <a:avLst/>
@@ -1380,7 +1400,7 @@
               <a:buNone/>
             </a:pPr>
             <a:r>
-              <a:rPr lang="en-US" sz="1400" b="1" dirty="0">
+              <a:rPr lang="en-US" sz="1350" b="1" dirty="0">
                 <a:solidFill>
                   <a:srgbClr val="E4772E"/>
                 </a:solidFill>
@@ -1390,20 +1410,20 @@
               </a:rPr>
               <a:t>Risk climbs from 30 °C</a:t>
             </a:r>
-            <a:endParaRPr lang="en-US" sz="1400" dirty="0"/>
-          </a:p>
-        </p:txBody>
-      </p:sp>
-      <p:sp>
-        <p:nvSpPr>
-          <p:cNvPr id="9" name="Shape 7"/>
-          <p:cNvSpPr/>
-          <p:nvPr/>
-        </p:nvSpPr>
-        <p:spPr>
-          <a:xfrm>
-            <a:off x="6419088" y="4206240"/>
-            <a:ext cx="2651760" cy="566928"/>
+            <a:endParaRPr lang="en-US" sz="1350" dirty="0"/>
+          </a:p>
+        </p:txBody>
+      </p:sp>
+      <p:sp>
+        <p:nvSpPr>
+          <p:cNvPr id="10" name="Shape 8"/>
+          <p:cNvSpPr/>
+          <p:nvPr/>
+        </p:nvSpPr>
+        <p:spPr>
+          <a:xfrm>
+            <a:off x="5120640" y="5394960"/>
+            <a:ext cx="2926080" cy="566928"/>
           </a:xfrm>
           <a:prstGeom prst="roundRect">
             <a:avLst>
@@ -1423,14 +1443,14 @@
       </p:sp>
       <p:sp>
         <p:nvSpPr>
-          <p:cNvPr id="10" name="Text 8"/>
-          <p:cNvSpPr/>
-          <p:nvPr/>
-        </p:nvSpPr>
-        <p:spPr>
-          <a:xfrm>
-            <a:off x="6419088" y="4206240"/>
-            <a:ext cx="2651760" cy="566928"/>
+          <p:cNvPr id="11" name="Text 9"/>
+          <p:cNvSpPr/>
+          <p:nvPr/>
+        </p:nvSpPr>
+        <p:spPr>
+          <a:xfrm>
+            <a:off x="5120640" y="5394960"/>
+            <a:ext cx="2926080" cy="566928"/>
           </a:xfrm>
           <a:prstGeom prst="rect">
             <a:avLst/>
@@ -1446,7 +1466,7 @@
               <a:buNone/>
             </a:pPr>
             <a:r>
-              <a:rPr lang="en-US" sz="1400" b="1" dirty="0">
+              <a:rPr lang="en-US" sz="1350" b="1" dirty="0">
                 <a:solidFill>
                   <a:srgbClr val="E4772E"/>
                 </a:solidFill>
@@ -1456,20 +1476,20 @@
               </a:rPr>
               <a:t>1 s smoke samples</a:t>
             </a:r>
-            <a:endParaRPr lang="en-US" sz="1400" dirty="0"/>
-          </a:p>
-        </p:txBody>
-      </p:sp>
-      <p:sp>
-        <p:nvSpPr>
-          <p:cNvPr id="11" name="Text 9"/>
-          <p:cNvSpPr/>
-          <p:nvPr/>
-        </p:nvSpPr>
-        <p:spPr>
-          <a:xfrm>
-            <a:off x="658368" y="6126480"/>
-            <a:ext cx="10972800" cy="365760"/>
+            <a:endParaRPr lang="en-US" sz="1350" dirty="0"/>
+          </a:p>
+        </p:txBody>
+      </p:sp>
+      <p:sp>
+        <p:nvSpPr>
+          <p:cNvPr id="12" name="Text 10"/>
+          <p:cNvSpPr/>
+          <p:nvPr/>
+        </p:nvSpPr>
+        <p:spPr>
+          <a:xfrm>
+            <a:off x="5120640" y="6172200"/>
+            <a:ext cx="6400800" cy="365760"/>
           </a:xfrm>
           <a:prstGeom prst="rect">
             <a:avLst/>
@@ -1485,7 +1505,7 @@
               <a:buNone/>
             </a:pPr>
             <a:r>
-              <a:rPr lang="en-US" sz="1300" dirty="0">
+              <a:rPr lang="en-US" sz="1250" dirty="0">
                 <a:solidFill>
                   <a:srgbClr val="5F6E55"/>
                 </a:solidFill>
@@ -1495,7 +1515,7 @@
               </a:rPr>
               <a:t>Fog &amp; Edge Computing (H9FECC)   ·   deployed live on AWS</a:t>
             </a:r>
-            <a:endParaRPr lang="en-US" sz="1300" dirty="0"/>
+            <a:endParaRPr lang="en-US" sz="1250" dirty="0"/>
           </a:p>
         </p:txBody>
       </p:sp>
@@ -1578,12 +1598,12 @@
         </p:nvSpPr>
         <p:spPr>
           <a:xfrm>
-            <a:off x="640080" y="2468880"/>
-            <a:ext cx="1572768" cy="1371600"/>
+            <a:off x="640080" y="1554480"/>
+            <a:ext cx="3200400" cy="3383280"/>
           </a:xfrm>
           <a:prstGeom prst="roundRect">
             <a:avLst>
-              <a:gd name="adj" fmla="val 6667"/>
+              <a:gd name="adj" fmla="val 2857"/>
             </a:avLst>
           </a:prstGeom>
           <a:solidFill>
@@ -1599,146 +1619,63 @@
       </p:sp>
       <p:sp>
         <p:nvSpPr>
-          <p:cNvPr id="4" name="Shape 2"/>
-          <p:cNvSpPr/>
-          <p:nvPr/>
-        </p:nvSpPr>
-        <p:spPr>
-          <a:xfrm>
-            <a:off x="1325880" y="2670048"/>
-            <a:ext cx="201168" cy="201168"/>
-          </a:xfrm>
-          <a:prstGeom prst="ellipse">
-            <a:avLst/>
-          </a:prstGeom>
-          <a:solidFill>
-            <a:srgbClr val="6A9A52"/>
-          </a:solidFill>
-          <a:ln/>
-        </p:spPr>
-      </p:sp>
-      <p:sp>
-        <p:nvSpPr>
-          <p:cNvPr id="5" name="Text 3"/>
-          <p:cNvSpPr/>
-          <p:nvPr/>
-        </p:nvSpPr>
-        <p:spPr>
-          <a:xfrm>
-            <a:off x="594360" y="2926080"/>
-            <a:ext cx="1664208" cy="411480"/>
-          </a:xfrm>
-          <a:prstGeom prst="rect">
-            <a:avLst/>
-          </a:prstGeom>
-          <a:noFill/>
-          <a:ln/>
-        </p:spPr>
-        <p:txBody>
-          <a:bodyPr wrap="square" lIns="0" tIns="0" rIns="0" bIns="0" rtlCol="0" anchor="ctr"/>
+          <p:cNvPr id="4" name="Text 2"/>
+          <p:cNvSpPr/>
+          <p:nvPr/>
+        </p:nvSpPr>
+        <p:spPr>
+          <a:xfrm>
+            <a:off x="640080" y="1691640"/>
+            <a:ext cx="3200400" cy="365760"/>
+          </a:xfrm>
+          <a:prstGeom prst="rect">
+            <a:avLst/>
+          </a:prstGeom>
+          <a:noFill/>
+          <a:ln/>
+        </p:spPr>
+        <p:txBody>
+          <a:bodyPr wrap="square" rtlCol="0" anchor="ctr"/>
           <a:lstStyle/>
           <a:p>
             <a:pPr algn="ctr" indent="0" marL="0">
               <a:buNone/>
             </a:pPr>
             <a:r>
-              <a:rPr lang="en-US" sz="1450" b="1" dirty="0">
-                <a:solidFill>
-                  <a:srgbClr val="1B2418"/>
+              <a:rPr lang="en-US" sz="1200" b="1" spc="300" kern="0" dirty="0">
+                <a:solidFill>
+                  <a:srgbClr val="6A9A52"/>
                 </a:solidFill>
                 <a:latin typeface="Calibri" pitchFamily="34" charset="0"/>
                 <a:ea typeface="Calibri" pitchFamily="34" charset="-122"/>
                 <a:cs typeface="Calibri" pitchFamily="34" charset="-120"/>
               </a:rPr>
-              <a:t>Field sensors</a:t>
-            </a:r>
-            <a:endParaRPr lang="en-US" sz="1450" dirty="0"/>
-          </a:p>
-        </p:txBody>
-      </p:sp>
-      <p:sp>
-        <p:nvSpPr>
-          <p:cNvPr id="6" name="Text 4"/>
-          <p:cNvSpPr/>
-          <p:nvPr/>
-        </p:nvSpPr>
-        <p:spPr>
-          <a:xfrm>
-            <a:off x="621792" y="3310128"/>
-            <a:ext cx="1609344" cy="457200"/>
-          </a:xfrm>
-          <a:prstGeom prst="rect">
-            <a:avLst/>
-          </a:prstGeom>
-          <a:noFill/>
-          <a:ln/>
-        </p:spPr>
-        <p:txBody>
-          <a:bodyPr wrap="square" lIns="0" tIns="0" rIns="0" bIns="0" rtlCol="0" anchor="t"/>
-          <a:lstStyle/>
-          <a:p>
-            <a:pPr algn="ctr" indent="0" marL="0">
-              <a:buNone/>
-            </a:pPr>
-            <a:r>
-              <a:rPr lang="en-US" sz="1050" dirty="0">
-                <a:solidFill>
-                  <a:srgbClr val="5F6E55"/>
-                </a:solidFill>
-                <a:latin typeface="Calibri" pitchFamily="34" charset="0"/>
-                <a:ea typeface="Calibri" pitchFamily="34" charset="-122"/>
-                <a:cs typeface="Calibri" pitchFamily="34" charset="-120"/>
-              </a:rPr>
-              <a:t>10 · 2 stations · 5 metrics</a:t>
-            </a:r>
-            <a:endParaRPr lang="en-US" sz="1050" dirty="0"/>
-          </a:p>
-        </p:txBody>
-      </p:sp>
-      <p:sp>
-        <p:nvSpPr>
-          <p:cNvPr id="7" name="Shape 5"/>
-          <p:cNvSpPr/>
-          <p:nvPr/>
-        </p:nvSpPr>
-        <p:spPr>
-          <a:xfrm>
-            <a:off x="2231136" y="3154680"/>
-            <a:ext cx="258409" cy="0"/>
-          </a:xfrm>
-          <a:prstGeom prst="line">
-            <a:avLst/>
-          </a:prstGeom>
-          <a:noFill/>
-          <a:ln w="25400">
-            <a:solidFill>
-              <a:srgbClr val="6A9A52"/>
-            </a:solidFill>
-            <a:prstDash val="solid"/>
-            <a:tailEnd type="triangle"/>
-          </a:ln>
-        </p:spPr>
-      </p:sp>
-      <p:sp>
-        <p:nvSpPr>
-          <p:cNvPr id="8" name="Shape 6"/>
-          <p:cNvSpPr/>
-          <p:nvPr/>
-        </p:nvSpPr>
-        <p:spPr>
-          <a:xfrm>
-            <a:off x="2507833" y="2468880"/>
-            <a:ext cx="1572768" cy="1371600"/>
+              <a:t>EDGE</a:t>
+            </a:r>
+            <a:endParaRPr lang="en-US" sz="1200" dirty="0"/>
+          </a:p>
+        </p:txBody>
+      </p:sp>
+      <p:sp>
+        <p:nvSpPr>
+          <p:cNvPr id="5" name="Shape 3"/>
+          <p:cNvSpPr/>
+          <p:nvPr/>
+        </p:nvSpPr>
+        <p:spPr>
+          <a:xfrm>
+            <a:off x="914400" y="2286000"/>
+            <a:ext cx="2651760" cy="1005840"/>
           </a:xfrm>
           <a:prstGeom prst="roundRect">
             <a:avLst>
-              <a:gd name="adj" fmla="val 6667"/>
+              <a:gd name="adj" fmla="val 7273"/>
             </a:avLst>
           </a:prstGeom>
           <a:solidFill>
-            <a:srgbClr val="EEF3EA"/>
+            <a:srgbClr val="FFFFFF"/>
           </a:solidFill>
-          <a:ln w="19050">
+          <a:ln w="15240">
             <a:solidFill>
               <a:srgbClr val="6A9A52"/>
             </a:solidFill>
@@ -1748,34 +1685,14 @@
       </p:sp>
       <p:sp>
         <p:nvSpPr>
-          <p:cNvPr id="9" name="Shape 7"/>
-          <p:cNvSpPr/>
-          <p:nvPr/>
-        </p:nvSpPr>
-        <p:spPr>
-          <a:xfrm>
-            <a:off x="3193633" y="2670048"/>
-            <a:ext cx="201168" cy="201168"/>
-          </a:xfrm>
-          <a:prstGeom prst="ellipse">
-            <a:avLst/>
-          </a:prstGeom>
-          <a:solidFill>
-            <a:srgbClr val="6A9A52"/>
-          </a:solidFill>
-          <a:ln/>
-        </p:spPr>
-      </p:sp>
-      <p:sp>
-        <p:nvSpPr>
-          <p:cNvPr id="10" name="Text 8"/>
-          <p:cNvSpPr/>
-          <p:nvPr/>
-        </p:nvSpPr>
-        <p:spPr>
-          <a:xfrm>
-            <a:off x="2462113" y="2926080"/>
-            <a:ext cx="1664208" cy="411480"/>
+          <p:cNvPr id="6" name="Text 4"/>
+          <p:cNvSpPr/>
+          <p:nvPr/>
+        </p:nvSpPr>
+        <p:spPr>
+          <a:xfrm>
+            <a:off x="914400" y="2432304"/>
+            <a:ext cx="2651760" cy="365760"/>
           </a:xfrm>
           <a:prstGeom prst="rect">
             <a:avLst/>
@@ -1791,7 +1708,7 @@
               <a:buNone/>
             </a:pPr>
             <a:r>
-              <a:rPr lang="en-US" sz="1450" b="1" dirty="0">
+              <a:rPr lang="en-US" sz="1400" b="1" dirty="0">
                 <a:solidFill>
                   <a:srgbClr val="1B2418"/>
                 </a:solidFill>
@@ -1799,38 +1716,38 @@
                 <a:ea typeface="Calibri" pitchFamily="34" charset="-122"/>
                 <a:cs typeface="Calibri" pitchFamily="34" charset="-120"/>
               </a:rPr>
-              <a:t>Fog node</a:t>
-            </a:r>
-            <a:endParaRPr lang="en-US" sz="1450" dirty="0"/>
-          </a:p>
-        </p:txBody>
-      </p:sp>
-      <p:sp>
-        <p:nvSpPr>
-          <p:cNvPr id="11" name="Text 9"/>
-          <p:cNvSpPr/>
-          <p:nvPr/>
-        </p:nvSpPr>
-        <p:spPr>
-          <a:xfrm>
-            <a:off x="2489545" y="3310128"/>
-            <a:ext cx="1609344" cy="457200"/>
-          </a:xfrm>
-          <a:prstGeom prst="rect">
-            <a:avLst/>
-          </a:prstGeom>
-          <a:noFill/>
-          <a:ln/>
-        </p:spPr>
-        <p:txBody>
-          <a:bodyPr wrap="square" lIns="0" tIns="0" rIns="0" bIns="0" rtlCol="0" anchor="t"/>
+              <a:t>Field sensors</a:t>
+            </a:r>
+            <a:endParaRPr lang="en-US" sz="1400" dirty="0"/>
+          </a:p>
+        </p:txBody>
+      </p:sp>
+      <p:sp>
+        <p:nvSpPr>
+          <p:cNvPr id="7" name="Text 5"/>
+          <p:cNvSpPr/>
+          <p:nvPr/>
+        </p:nvSpPr>
+        <p:spPr>
+          <a:xfrm>
+            <a:off x="914400" y="2816352"/>
+            <a:ext cx="2651760" cy="365760"/>
+          </a:xfrm>
+          <a:prstGeom prst="rect">
+            <a:avLst/>
+          </a:prstGeom>
+          <a:noFill/>
+          <a:ln/>
+        </p:spPr>
+        <p:txBody>
+          <a:bodyPr wrap="square" lIns="0" tIns="0" rIns="0" bIns="0" rtlCol="0" anchor="ctr"/>
           <a:lstStyle/>
           <a:p>
             <a:pPr algn="ctr" indent="0" marL="0">
               <a:buNone/>
             </a:pPr>
             <a:r>
-              <a:rPr lang="en-US" sz="1050" dirty="0">
+              <a:rPr lang="en-US" sz="1000" dirty="0">
                 <a:solidFill>
                   <a:srgbClr val="5F6E55"/>
                 </a:solidFill>
@@ -1838,50 +1755,155 @@
                 <a:ea typeface="Calibri" pitchFamily="34" charset="-122"/>
                 <a:cs typeface="Calibri" pitchFamily="34" charset="-120"/>
               </a:rPr>
-              <a:t>windows · fire alerts</a:t>
-            </a:r>
-            <a:endParaRPr lang="en-US" sz="1050" dirty="0"/>
-          </a:p>
-        </p:txBody>
-      </p:sp>
-      <p:sp>
-        <p:nvSpPr>
-          <p:cNvPr id="12" name="Shape 10"/>
-          <p:cNvSpPr/>
-          <p:nvPr/>
-        </p:nvSpPr>
-        <p:spPr>
-          <a:xfrm>
-            <a:off x="4098889" y="3154680"/>
-            <a:ext cx="258409" cy="0"/>
-          </a:xfrm>
-          <a:prstGeom prst="line">
-            <a:avLst/>
-          </a:prstGeom>
-          <a:noFill/>
-          <a:ln w="25400">
+              <a:t>10 · 2 stations · 5 metrics</a:t>
+            </a:r>
+            <a:endParaRPr lang="en-US" sz="1000" dirty="0"/>
+          </a:p>
+        </p:txBody>
+      </p:sp>
+      <p:sp>
+        <p:nvSpPr>
+          <p:cNvPr id="8" name="Shape 6"/>
+          <p:cNvSpPr/>
+          <p:nvPr/>
+        </p:nvSpPr>
+        <p:spPr>
+          <a:xfrm>
+            <a:off x="914400" y="3520440"/>
+            <a:ext cx="2651760" cy="1005840"/>
+          </a:xfrm>
+          <a:prstGeom prst="roundRect">
+            <a:avLst>
+              <a:gd name="adj" fmla="val 7273"/>
+            </a:avLst>
+          </a:prstGeom>
+          <a:solidFill>
+            <a:srgbClr val="FFFFFF"/>
+          </a:solidFill>
+          <a:ln w="15240">
             <a:solidFill>
               <a:srgbClr val="6A9A52"/>
             </a:solidFill>
             <a:prstDash val="solid"/>
+          </a:ln>
+        </p:spPr>
+      </p:sp>
+      <p:sp>
+        <p:nvSpPr>
+          <p:cNvPr id="9" name="Text 7"/>
+          <p:cNvSpPr/>
+          <p:nvPr/>
+        </p:nvSpPr>
+        <p:spPr>
+          <a:xfrm>
+            <a:off x="914400" y="3666744"/>
+            <a:ext cx="2651760" cy="365760"/>
+          </a:xfrm>
+          <a:prstGeom prst="rect">
+            <a:avLst/>
+          </a:prstGeom>
+          <a:noFill/>
+          <a:ln/>
+        </p:spPr>
+        <p:txBody>
+          <a:bodyPr wrap="square" lIns="0" tIns="0" rIns="0" bIns="0" rtlCol="0" anchor="ctr"/>
+          <a:lstStyle/>
+          <a:p>
+            <a:pPr algn="ctr" indent="0" marL="0">
+              <a:buNone/>
+            </a:pPr>
+            <a:r>
+              <a:rPr lang="en-US" sz="1400" b="1" dirty="0">
+                <a:solidFill>
+                  <a:srgbClr val="1B2418"/>
+                </a:solidFill>
+                <a:latin typeface="Calibri" pitchFamily="34" charset="0"/>
+                <a:ea typeface="Calibri" pitchFamily="34" charset="-122"/>
+                <a:cs typeface="Calibri" pitchFamily="34" charset="-120"/>
+              </a:rPr>
+              <a:t>Fog node</a:t>
+            </a:r>
+            <a:endParaRPr lang="en-US" sz="1400" dirty="0"/>
+          </a:p>
+        </p:txBody>
+      </p:sp>
+      <p:sp>
+        <p:nvSpPr>
+          <p:cNvPr id="10" name="Text 8"/>
+          <p:cNvSpPr/>
+          <p:nvPr/>
+        </p:nvSpPr>
+        <p:spPr>
+          <a:xfrm>
+            <a:off x="914400" y="4050792"/>
+            <a:ext cx="2651760" cy="365760"/>
+          </a:xfrm>
+          <a:prstGeom prst="rect">
+            <a:avLst/>
+          </a:prstGeom>
+          <a:noFill/>
+          <a:ln/>
+        </p:spPr>
+        <p:txBody>
+          <a:bodyPr wrap="square" lIns="0" tIns="0" rIns="0" bIns="0" rtlCol="0" anchor="ctr"/>
+          <a:lstStyle/>
+          <a:p>
+            <a:pPr algn="ctr" indent="0" marL="0">
+              <a:buNone/>
+            </a:pPr>
+            <a:r>
+              <a:rPr lang="en-US" sz="1000" dirty="0">
+                <a:solidFill>
+                  <a:srgbClr val="5F6E55"/>
+                </a:solidFill>
+                <a:latin typeface="Calibri" pitchFamily="34" charset="0"/>
+                <a:ea typeface="Calibri" pitchFamily="34" charset="-122"/>
+                <a:cs typeface="Calibri" pitchFamily="34" charset="-120"/>
+              </a:rPr>
+              <a:t>windows · fire alerts</a:t>
+            </a:r>
+            <a:endParaRPr lang="en-US" sz="1000" dirty="0"/>
+          </a:p>
+        </p:txBody>
+      </p:sp>
+      <p:sp>
+        <p:nvSpPr>
+          <p:cNvPr id="11" name="Shape 9"/>
+          <p:cNvSpPr/>
+          <p:nvPr/>
+        </p:nvSpPr>
+        <p:spPr>
+          <a:xfrm>
+            <a:off x="3886200" y="3246120"/>
+            <a:ext cx="502920" cy="0"/>
+          </a:xfrm>
+          <a:prstGeom prst="line">
+            <a:avLst/>
+          </a:prstGeom>
+          <a:noFill/>
+          <a:ln w="31750">
+            <a:solidFill>
+              <a:srgbClr val="2C5F2D"/>
+            </a:solidFill>
+            <a:prstDash val="solid"/>
             <a:tailEnd type="triangle"/>
           </a:ln>
         </p:spPr>
       </p:sp>
       <p:sp>
         <p:nvSpPr>
-          <p:cNvPr id="13" name="Shape 11"/>
-          <p:cNvSpPr/>
-          <p:nvPr/>
-        </p:nvSpPr>
-        <p:spPr>
-          <a:xfrm>
-            <a:off x="4375587" y="2468880"/>
-            <a:ext cx="1572768" cy="1371600"/>
+          <p:cNvPr id="12" name="Shape 10"/>
+          <p:cNvSpPr/>
+          <p:nvPr/>
+        </p:nvSpPr>
+        <p:spPr>
+          <a:xfrm>
+            <a:off x="4572000" y="1554480"/>
+            <a:ext cx="6949440" cy="3383280"/>
           </a:xfrm>
           <a:prstGeom prst="roundRect">
             <a:avLst>
-              <a:gd name="adj" fmla="val 6667"/>
+              <a:gd name="adj" fmla="val 2703"/>
             </a:avLst>
           </a:prstGeom>
           <a:solidFill>
@@ -1897,99 +1919,145 @@
       </p:sp>
       <p:sp>
         <p:nvSpPr>
-          <p:cNvPr id="14" name="Shape 12"/>
-          <p:cNvSpPr/>
-          <p:nvPr/>
-        </p:nvSpPr>
-        <p:spPr>
-          <a:xfrm>
-            <a:off x="5061387" y="2670048"/>
-            <a:ext cx="201168" cy="201168"/>
-          </a:xfrm>
-          <a:prstGeom prst="ellipse">
-            <a:avLst/>
-          </a:prstGeom>
-          <a:solidFill>
-            <a:srgbClr val="2C5F2D"/>
-          </a:solidFill>
-          <a:ln/>
-        </p:spPr>
-      </p:sp>
-      <p:sp>
-        <p:nvSpPr>
-          <p:cNvPr id="15" name="Text 13"/>
-          <p:cNvSpPr/>
-          <p:nvPr/>
-        </p:nvSpPr>
-        <p:spPr>
-          <a:xfrm>
-            <a:off x="4329867" y="2926080"/>
-            <a:ext cx="1664208" cy="411480"/>
-          </a:xfrm>
-          <a:prstGeom prst="rect">
-            <a:avLst/>
-          </a:prstGeom>
-          <a:noFill/>
-          <a:ln/>
-        </p:spPr>
-        <p:txBody>
-          <a:bodyPr wrap="square" lIns="0" tIns="0" rIns="0" bIns="0" rtlCol="0" anchor="ctr"/>
+          <p:cNvPr id="13" name="Text 11"/>
+          <p:cNvSpPr/>
+          <p:nvPr/>
+        </p:nvSpPr>
+        <p:spPr>
+          <a:xfrm>
+            <a:off x="4572000" y="1691640"/>
+            <a:ext cx="6949440" cy="365760"/>
+          </a:xfrm>
+          <a:prstGeom prst="rect">
+            <a:avLst/>
+          </a:prstGeom>
+          <a:noFill/>
+          <a:ln/>
+        </p:spPr>
+        <p:txBody>
+          <a:bodyPr wrap="square" rtlCol="0" anchor="ctr"/>
           <a:lstStyle/>
           <a:p>
             <a:pPr algn="ctr" indent="0" marL="0">
               <a:buNone/>
             </a:pPr>
             <a:r>
-              <a:rPr lang="en-US" sz="1450" b="1" dirty="0">
-                <a:solidFill>
-                  <a:srgbClr val="1B2418"/>
+              <a:rPr lang="en-US" sz="1200" b="1" spc="200" kern="0" dirty="0">
+                <a:solidFill>
+                  <a:srgbClr val="2C5F2D"/>
                 </a:solidFill>
                 <a:latin typeface="Calibri" pitchFamily="34" charset="0"/>
                 <a:ea typeface="Calibri" pitchFamily="34" charset="-122"/>
                 <a:cs typeface="Calibri" pitchFamily="34" charset="-120"/>
               </a:rPr>
-              <a:t>Amazon SQS</a:t>
-            </a:r>
-            <a:endParaRPr lang="en-US" sz="1450" dirty="0"/>
-          </a:p>
-        </p:txBody>
-      </p:sp>
-      <p:sp>
-        <p:nvSpPr>
-          <p:cNvPr id="16" name="Text 14"/>
-          <p:cNvSpPr/>
-          <p:nvPr/>
-        </p:nvSpPr>
-        <p:spPr>
-          <a:xfrm>
-            <a:off x="4357299" y="3310128"/>
-            <a:ext cx="1609344" cy="457200"/>
-          </a:xfrm>
-          <a:prstGeom prst="rect">
-            <a:avLst/>
-          </a:prstGeom>
-          <a:noFill/>
-          <a:ln/>
-        </p:spPr>
-        <p:txBody>
-          <a:bodyPr wrap="square" lIns="0" tIns="0" rIns="0" bIns="0" rtlCol="0" anchor="t"/>
+              <a:t>CLOUD (serverless)</a:t>
+            </a:r>
+            <a:endParaRPr lang="en-US" sz="1200" dirty="0"/>
+          </a:p>
+        </p:txBody>
+      </p:sp>
+      <p:sp>
+        <p:nvSpPr>
+          <p:cNvPr id="14" name="Shape 12"/>
+          <p:cNvSpPr/>
+          <p:nvPr/>
+        </p:nvSpPr>
+        <p:spPr>
+          <a:xfrm>
+            <a:off x="4846320" y="2651760"/>
+            <a:ext cx="1463040" cy="1371600"/>
+          </a:xfrm>
+          <a:prstGeom prst="roundRect">
+            <a:avLst>
+              <a:gd name="adj" fmla="val 5333"/>
+            </a:avLst>
+          </a:prstGeom>
+          <a:solidFill>
+            <a:srgbClr val="FFFFFF"/>
+          </a:solidFill>
+          <a:ln w="15240">
+            <a:solidFill>
+              <a:srgbClr val="2C5F2D"/>
+            </a:solidFill>
+            <a:prstDash val="solid"/>
+          </a:ln>
+        </p:spPr>
+      </p:sp>
+      <p:sp>
+        <p:nvSpPr>
+          <p:cNvPr id="15" name="Text 13"/>
+          <p:cNvSpPr/>
+          <p:nvPr/>
+        </p:nvSpPr>
+        <p:spPr>
+          <a:xfrm>
+            <a:off x="4800600" y="2907792"/>
+            <a:ext cx="1554480" cy="457200"/>
+          </a:xfrm>
+          <a:prstGeom prst="rect">
+            <a:avLst/>
+          </a:prstGeom>
+          <a:noFill/>
+          <a:ln/>
+        </p:spPr>
+        <p:txBody>
+          <a:bodyPr wrap="square" lIns="0" tIns="0" rIns="0" bIns="0" rtlCol="0" anchor="ctr"/>
           <a:lstStyle/>
           <a:p>
             <a:pPr algn="ctr" indent="0" marL="0">
               <a:buNone/>
             </a:pPr>
             <a:r>
-              <a:rPr lang="en-US" sz="1050" dirty="0">
-                <a:solidFill>
-                  <a:srgbClr val="5F6E55"/>
+              <a:rPr lang="en-US" sz="1250" b="1" dirty="0">
+                <a:solidFill>
+                  <a:srgbClr val="1B2418"/>
                 </a:solidFill>
                 <a:latin typeface="Calibri" pitchFamily="34" charset="0"/>
                 <a:ea typeface="Calibri" pitchFamily="34" charset="-122"/>
                 <a:cs typeface="Calibri" pitchFamily="34" charset="-120"/>
               </a:rPr>
+              <a:t>Amazon SQS</a:t>
+            </a:r>
+            <a:endParaRPr lang="en-US" sz="1250" dirty="0"/>
+          </a:p>
+        </p:txBody>
+      </p:sp>
+      <p:sp>
+        <p:nvSpPr>
+          <p:cNvPr id="16" name="Text 14"/>
+          <p:cNvSpPr/>
+          <p:nvPr/>
+        </p:nvSpPr>
+        <p:spPr>
+          <a:xfrm>
+            <a:off x="4828032" y="3401568"/>
+            <a:ext cx="1499616" cy="457200"/>
+          </a:xfrm>
+          <a:prstGeom prst="rect">
+            <a:avLst/>
+          </a:prstGeom>
+          <a:noFill/>
+          <a:ln/>
+        </p:spPr>
+        <p:txBody>
+          <a:bodyPr wrap="square" lIns="0" tIns="0" rIns="0" bIns="0" rtlCol="0" anchor="ctr"/>
+          <a:lstStyle/>
+          <a:p>
+            <a:pPr algn="ctr" indent="0" marL="0">
+              <a:buNone/>
+            </a:pPr>
+            <a:r>
+              <a:rPr lang="en-US" sz="900" dirty="0">
+                <a:solidFill>
+                  <a:srgbClr val="5F6E55"/>
+                </a:solidFill>
+                <a:latin typeface="Calibri" pitchFamily="34" charset="0"/>
+                <a:ea typeface="Calibri" pitchFamily="34" charset="-122"/>
+                <a:cs typeface="Calibri" pitchFamily="34" charset="-120"/>
+              </a:rPr>
               <a:t>batched sends</a:t>
             </a:r>
-            <a:endParaRPr lang="en-US" sz="1050" dirty="0"/>
+            <a:endParaRPr lang="en-US" sz="900" dirty="0"/>
           </a:p>
         </p:txBody>
       </p:sp>
@@ -2001,14 +2069,14 @@
         </p:nvSpPr>
         <p:spPr>
           <a:xfrm>
-            <a:off x="5966643" y="3154680"/>
-            <a:ext cx="258409" cy="0"/>
+            <a:off x="6318504" y="3337560"/>
+            <a:ext cx="164592" cy="0"/>
           </a:xfrm>
           <a:prstGeom prst="line">
             <a:avLst/>
           </a:prstGeom>
           <a:noFill/>
-          <a:ln w="25400">
+          <a:ln w="20320">
             <a:solidFill>
               <a:srgbClr val="6A9A52"/>
             </a:solidFill>
@@ -2025,18 +2093,18 @@
         </p:nvSpPr>
         <p:spPr>
           <a:xfrm>
-            <a:off x="6243340" y="2468880"/>
-            <a:ext cx="1572768" cy="1371600"/>
+            <a:off x="6492240" y="2651760"/>
+            <a:ext cx="1463040" cy="1371600"/>
           </a:xfrm>
           <a:prstGeom prst="roundRect">
             <a:avLst>
-              <a:gd name="adj" fmla="val 6667"/>
+              <a:gd name="adj" fmla="val 5333"/>
             </a:avLst>
           </a:prstGeom>
           <a:solidFill>
-            <a:srgbClr val="EEF3EA"/>
+            <a:srgbClr val="FFFFFF"/>
           </a:solidFill>
-          <a:ln w="19050">
+          <a:ln w="15240">
             <a:solidFill>
               <a:srgbClr val="2C5F2D"/>
             </a:solidFill>
@@ -2046,34 +2114,14 @@
       </p:sp>
       <p:sp>
         <p:nvSpPr>
-          <p:cNvPr id="19" name="Shape 17"/>
-          <p:cNvSpPr/>
-          <p:nvPr/>
-        </p:nvSpPr>
-        <p:spPr>
-          <a:xfrm>
-            <a:off x="6929140" y="2670048"/>
-            <a:ext cx="201168" cy="201168"/>
-          </a:xfrm>
-          <a:prstGeom prst="ellipse">
-            <a:avLst/>
-          </a:prstGeom>
-          <a:solidFill>
-            <a:srgbClr val="2C5F2D"/>
-          </a:solidFill>
-          <a:ln/>
-        </p:spPr>
-      </p:sp>
-      <p:sp>
-        <p:nvSpPr>
-          <p:cNvPr id="20" name="Text 18"/>
-          <p:cNvSpPr/>
-          <p:nvPr/>
-        </p:nvSpPr>
-        <p:spPr>
-          <a:xfrm>
-            <a:off x="6197620" y="2926080"/>
-            <a:ext cx="1664208" cy="411480"/>
+          <p:cNvPr id="19" name="Text 17"/>
+          <p:cNvSpPr/>
+          <p:nvPr/>
+        </p:nvSpPr>
+        <p:spPr>
+          <a:xfrm>
+            <a:off x="6446520" y="2907792"/>
+            <a:ext cx="1554480" cy="457200"/>
           </a:xfrm>
           <a:prstGeom prst="rect">
             <a:avLst/>
@@ -2089,7 +2137,7 @@
               <a:buNone/>
             </a:pPr>
             <a:r>
-              <a:rPr lang="en-US" sz="1450" b="1" dirty="0">
+              <a:rPr lang="en-US" sz="1250" b="1" dirty="0">
                 <a:solidFill>
                   <a:srgbClr val="1B2418"/>
                 </a:solidFill>
@@ -2099,36 +2147,36 @@
               </a:rPr>
               <a:t>AWS Lambda</a:t>
             </a:r>
-            <a:endParaRPr lang="en-US" sz="1450" dirty="0"/>
-          </a:p>
-        </p:txBody>
-      </p:sp>
-      <p:sp>
-        <p:nvSpPr>
-          <p:cNvPr id="21" name="Text 19"/>
-          <p:cNvSpPr/>
-          <p:nvPr/>
-        </p:nvSpPr>
-        <p:spPr>
-          <a:xfrm>
-            <a:off x="6225052" y="3310128"/>
-            <a:ext cx="1609344" cy="457200"/>
-          </a:xfrm>
-          <a:prstGeom prst="rect">
-            <a:avLst/>
-          </a:prstGeom>
-          <a:noFill/>
-          <a:ln/>
-        </p:spPr>
-        <p:txBody>
-          <a:bodyPr wrap="square" lIns="0" tIns="0" rIns="0" bIns="0" rtlCol="0" anchor="t"/>
+            <a:endParaRPr lang="en-US" sz="1250" dirty="0"/>
+          </a:p>
+        </p:txBody>
+      </p:sp>
+      <p:sp>
+        <p:nvSpPr>
+          <p:cNvPr id="20" name="Text 18"/>
+          <p:cNvSpPr/>
+          <p:nvPr/>
+        </p:nvSpPr>
+        <p:spPr>
+          <a:xfrm>
+            <a:off x="6473952" y="3401568"/>
+            <a:ext cx="1499616" cy="457200"/>
+          </a:xfrm>
+          <a:prstGeom prst="rect">
+            <a:avLst/>
+          </a:prstGeom>
+          <a:noFill/>
+          <a:ln/>
+        </p:spPr>
+        <p:txBody>
+          <a:bodyPr wrap="square" lIns="0" tIns="0" rIns="0" bIns="0" rtlCol="0" anchor="ctr"/>
           <a:lstStyle/>
           <a:p>
             <a:pPr algn="ctr" indent="0" marL="0">
               <a:buNone/>
             </a:pPr>
             <a:r>
-              <a:rPr lang="en-US" sz="1050" dirty="0">
+              <a:rPr lang="en-US" sz="900" dirty="0">
                 <a:solidFill>
                   <a:srgbClr val="5F6E55"/>
                 </a:solidFill>
@@ -2138,26 +2186,26 @@
               </a:rPr>
               <a:t>nodejs20 ingest</a:t>
             </a:r>
-            <a:endParaRPr lang="en-US" sz="1050" dirty="0"/>
-          </a:p>
-        </p:txBody>
-      </p:sp>
-      <p:sp>
-        <p:nvSpPr>
-          <p:cNvPr id="22" name="Shape 20"/>
-          <p:cNvSpPr/>
-          <p:nvPr/>
-        </p:nvSpPr>
-        <p:spPr>
-          <a:xfrm>
-            <a:off x="7834396" y="3154680"/>
-            <a:ext cx="258409" cy="0"/>
+            <a:endParaRPr lang="en-US" sz="900" dirty="0"/>
+          </a:p>
+        </p:txBody>
+      </p:sp>
+      <p:sp>
+        <p:nvSpPr>
+          <p:cNvPr id="21" name="Shape 19"/>
+          <p:cNvSpPr/>
+          <p:nvPr/>
+        </p:nvSpPr>
+        <p:spPr>
+          <a:xfrm>
+            <a:off x="7964424" y="3337560"/>
+            <a:ext cx="164592" cy="0"/>
           </a:xfrm>
           <a:prstGeom prst="line">
             <a:avLst/>
           </a:prstGeom>
           <a:noFill/>
-          <a:ln w="25400">
+          <a:ln w="20320">
             <a:solidFill>
               <a:srgbClr val="6A9A52"/>
             </a:solidFill>
@@ -2168,24 +2216,24 @@
       </p:sp>
       <p:sp>
         <p:nvSpPr>
-          <p:cNvPr id="23" name="Shape 21"/>
-          <p:cNvSpPr/>
-          <p:nvPr/>
-        </p:nvSpPr>
-        <p:spPr>
-          <a:xfrm>
-            <a:off x="8111094" y="2468880"/>
-            <a:ext cx="1572768" cy="1371600"/>
+          <p:cNvPr id="22" name="Shape 20"/>
+          <p:cNvSpPr/>
+          <p:nvPr/>
+        </p:nvSpPr>
+        <p:spPr>
+          <a:xfrm>
+            <a:off x="8138160" y="2651760"/>
+            <a:ext cx="1463040" cy="1371600"/>
           </a:xfrm>
           <a:prstGeom prst="roundRect">
             <a:avLst>
-              <a:gd name="adj" fmla="val 6667"/>
+              <a:gd name="adj" fmla="val 5333"/>
             </a:avLst>
           </a:prstGeom>
           <a:solidFill>
-            <a:srgbClr val="EEF3EA"/>
+            <a:srgbClr val="FFFFFF"/>
           </a:solidFill>
-          <a:ln w="19050">
+          <a:ln w="15240">
             <a:solidFill>
               <a:srgbClr val="2C5F2D"/>
             </a:solidFill>
@@ -2195,34 +2243,14 @@
       </p:sp>
       <p:sp>
         <p:nvSpPr>
-          <p:cNvPr id="24" name="Shape 22"/>
-          <p:cNvSpPr/>
-          <p:nvPr/>
-        </p:nvSpPr>
-        <p:spPr>
-          <a:xfrm>
-            <a:off x="8796894" y="2670048"/>
-            <a:ext cx="201168" cy="201168"/>
-          </a:xfrm>
-          <a:prstGeom prst="ellipse">
-            <a:avLst/>
-          </a:prstGeom>
-          <a:solidFill>
-            <a:srgbClr val="2C5F2D"/>
-          </a:solidFill>
-          <a:ln/>
-        </p:spPr>
-      </p:sp>
-      <p:sp>
-        <p:nvSpPr>
-          <p:cNvPr id="25" name="Text 23"/>
-          <p:cNvSpPr/>
-          <p:nvPr/>
-        </p:nvSpPr>
-        <p:spPr>
-          <a:xfrm>
-            <a:off x="8065374" y="2926080"/>
-            <a:ext cx="1664208" cy="411480"/>
+          <p:cNvPr id="23" name="Text 21"/>
+          <p:cNvSpPr/>
+          <p:nvPr/>
+        </p:nvSpPr>
+        <p:spPr>
+          <a:xfrm>
+            <a:off x="8092440" y="2907792"/>
+            <a:ext cx="1554480" cy="457200"/>
           </a:xfrm>
           <a:prstGeom prst="rect">
             <a:avLst/>
@@ -2238,7 +2266,7 @@
               <a:buNone/>
             </a:pPr>
             <a:r>
-              <a:rPr lang="en-US" sz="1450" b="1" dirty="0">
+              <a:rPr lang="en-US" sz="1250" b="1" dirty="0">
                 <a:solidFill>
                   <a:srgbClr val="1B2418"/>
                 </a:solidFill>
@@ -2248,36 +2276,36 @@
               </a:rPr>
               <a:t>DynamoDB</a:t>
             </a:r>
-            <a:endParaRPr lang="en-US" sz="1450" dirty="0"/>
-          </a:p>
-        </p:txBody>
-      </p:sp>
-      <p:sp>
-        <p:nvSpPr>
-          <p:cNvPr id="26" name="Text 24"/>
-          <p:cNvSpPr/>
-          <p:nvPr/>
-        </p:nvSpPr>
-        <p:spPr>
-          <a:xfrm>
-            <a:off x="8092806" y="3310128"/>
-            <a:ext cx="1609344" cy="457200"/>
-          </a:xfrm>
-          <a:prstGeom prst="rect">
-            <a:avLst/>
-          </a:prstGeom>
-          <a:noFill/>
-          <a:ln/>
-        </p:spPr>
-        <p:txBody>
-          <a:bodyPr wrap="square" lIns="0" tIns="0" rIns="0" bIns="0" rtlCol="0" anchor="t"/>
+            <a:endParaRPr lang="en-US" sz="1250" dirty="0"/>
+          </a:p>
+        </p:txBody>
+      </p:sp>
+      <p:sp>
+        <p:nvSpPr>
+          <p:cNvPr id="24" name="Text 22"/>
+          <p:cNvSpPr/>
+          <p:nvPr/>
+        </p:nvSpPr>
+        <p:spPr>
+          <a:xfrm>
+            <a:off x="8119872" y="3401568"/>
+            <a:ext cx="1499616" cy="457200"/>
+          </a:xfrm>
+          <a:prstGeom prst="rect">
+            <a:avLst/>
+          </a:prstGeom>
+          <a:noFill/>
+          <a:ln/>
+        </p:spPr>
+        <p:txBody>
+          <a:bodyPr wrap="square" lIns="0" tIns="0" rIns="0" bIns="0" rtlCol="0" anchor="ctr"/>
           <a:lstStyle/>
           <a:p>
             <a:pPr algn="ctr" indent="0" marL="0">
               <a:buNone/>
             </a:pPr>
             <a:r>
-              <a:rPr lang="en-US" sz="1050" dirty="0">
+              <a:rPr lang="en-US" sz="900" dirty="0">
                 <a:solidFill>
                   <a:srgbClr val="5F6E55"/>
                 </a:solidFill>
@@ -2287,26 +2315,26 @@
               </a:rPr>
               <a:t>window history</a:t>
             </a:r>
-            <a:endParaRPr lang="en-US" sz="1050" dirty="0"/>
-          </a:p>
-        </p:txBody>
-      </p:sp>
-      <p:sp>
-        <p:nvSpPr>
-          <p:cNvPr id="27" name="Shape 25"/>
-          <p:cNvSpPr/>
-          <p:nvPr/>
-        </p:nvSpPr>
-        <p:spPr>
-          <a:xfrm>
-            <a:off x="9702150" y="3154680"/>
-            <a:ext cx="258409" cy="0"/>
+            <a:endParaRPr lang="en-US" sz="900" dirty="0"/>
+          </a:p>
+        </p:txBody>
+      </p:sp>
+      <p:sp>
+        <p:nvSpPr>
+          <p:cNvPr id="25" name="Shape 23"/>
+          <p:cNvSpPr/>
+          <p:nvPr/>
+        </p:nvSpPr>
+        <p:spPr>
+          <a:xfrm>
+            <a:off x="9610344" y="3337560"/>
+            <a:ext cx="164592" cy="0"/>
           </a:xfrm>
           <a:prstGeom prst="line">
             <a:avLst/>
           </a:prstGeom>
           <a:noFill/>
-          <a:ln w="25400">
+          <a:ln w="20320">
             <a:solidFill>
               <a:srgbClr val="6A9A52"/>
             </a:solidFill>
@@ -2317,24 +2345,24 @@
       </p:sp>
       <p:sp>
         <p:nvSpPr>
-          <p:cNvPr id="28" name="Shape 26"/>
-          <p:cNvSpPr/>
-          <p:nvPr/>
-        </p:nvSpPr>
-        <p:spPr>
-          <a:xfrm>
-            <a:off x="9978847" y="2468880"/>
-            <a:ext cx="1572768" cy="1371600"/>
+          <p:cNvPr id="26" name="Shape 24"/>
+          <p:cNvSpPr/>
+          <p:nvPr/>
+        </p:nvSpPr>
+        <p:spPr>
+          <a:xfrm>
+            <a:off x="9784080" y="2651760"/>
+            <a:ext cx="1463040" cy="1371600"/>
           </a:xfrm>
           <a:prstGeom prst="roundRect">
             <a:avLst>
-              <a:gd name="adj" fmla="val 6667"/>
+              <a:gd name="adj" fmla="val 5333"/>
             </a:avLst>
           </a:prstGeom>
           <a:solidFill>
-            <a:srgbClr val="EEF3EA"/>
+            <a:srgbClr val="FFFFFF"/>
           </a:solidFill>
-          <a:ln w="19050">
+          <a:ln w="15240">
             <a:solidFill>
               <a:srgbClr val="3F7C3F"/>
             </a:solidFill>
@@ -2344,34 +2372,14 @@
       </p:sp>
       <p:sp>
         <p:nvSpPr>
-          <p:cNvPr id="29" name="Shape 27"/>
-          <p:cNvSpPr/>
-          <p:nvPr/>
-        </p:nvSpPr>
-        <p:spPr>
-          <a:xfrm>
-            <a:off x="10664647" y="2670048"/>
-            <a:ext cx="201168" cy="201168"/>
-          </a:xfrm>
-          <a:prstGeom prst="ellipse">
-            <a:avLst/>
-          </a:prstGeom>
-          <a:solidFill>
-            <a:srgbClr val="3F7C3F"/>
-          </a:solidFill>
-          <a:ln/>
-        </p:spPr>
-      </p:sp>
-      <p:sp>
-        <p:nvSpPr>
-          <p:cNvPr id="30" name="Text 28"/>
-          <p:cNvSpPr/>
-          <p:nvPr/>
-        </p:nvSpPr>
-        <p:spPr>
-          <a:xfrm>
-            <a:off x="9933127" y="2926080"/>
-            <a:ext cx="1664208" cy="411480"/>
+          <p:cNvPr id="27" name="Text 25"/>
+          <p:cNvSpPr/>
+          <p:nvPr/>
+        </p:nvSpPr>
+        <p:spPr>
+          <a:xfrm>
+            <a:off x="9738360" y="2907792"/>
+            <a:ext cx="1554480" cy="457200"/>
           </a:xfrm>
           <a:prstGeom prst="rect">
             <a:avLst/>
@@ -2387,7 +2395,7 @@
               <a:buNone/>
             </a:pPr>
             <a:r>
-              <a:rPr lang="en-US" sz="1450" b="1" dirty="0">
+              <a:rPr lang="en-US" sz="1250" b="1" dirty="0">
                 <a:solidFill>
                   <a:srgbClr val="1B2418"/>
                 </a:solidFill>
@@ -2397,36 +2405,36 @@
               </a:rPr>
               <a:t>API GW + S3</a:t>
             </a:r>
-            <a:endParaRPr lang="en-US" sz="1450" dirty="0"/>
-          </a:p>
-        </p:txBody>
-      </p:sp>
-      <p:sp>
-        <p:nvSpPr>
-          <p:cNvPr id="31" name="Text 29"/>
-          <p:cNvSpPr/>
-          <p:nvPr/>
-        </p:nvSpPr>
-        <p:spPr>
-          <a:xfrm>
-            <a:off x="9960559" y="3310128"/>
-            <a:ext cx="1609344" cy="457200"/>
-          </a:xfrm>
-          <a:prstGeom prst="rect">
-            <a:avLst/>
-          </a:prstGeom>
-          <a:noFill/>
-          <a:ln/>
-        </p:spPr>
-        <p:txBody>
-          <a:bodyPr wrap="square" lIns="0" tIns="0" rIns="0" bIns="0" rtlCol="0" anchor="t"/>
+            <a:endParaRPr lang="en-US" sz="1250" dirty="0"/>
+          </a:p>
+        </p:txBody>
+      </p:sp>
+      <p:sp>
+        <p:nvSpPr>
+          <p:cNvPr id="28" name="Text 26"/>
+          <p:cNvSpPr/>
+          <p:nvPr/>
+        </p:nvSpPr>
+        <p:spPr>
+          <a:xfrm>
+            <a:off x="9765792" y="3401568"/>
+            <a:ext cx="1499616" cy="457200"/>
+          </a:xfrm>
+          <a:prstGeom prst="rect">
+            <a:avLst/>
+          </a:prstGeom>
+          <a:noFill/>
+          <a:ln/>
+        </p:spPr>
+        <p:txBody>
+          <a:bodyPr wrap="square" lIns="0" tIns="0" rIns="0" bIns="0" rtlCol="0" anchor="ctr"/>
           <a:lstStyle/>
           <a:p>
             <a:pPr algn="ctr" indent="0" marL="0">
               <a:buNone/>
             </a:pPr>
             <a:r>
-              <a:rPr lang="en-US" sz="1050" dirty="0">
+              <a:rPr lang="en-US" sz="900" dirty="0">
                 <a:solidFill>
                   <a:srgbClr val="5F6E55"/>
                 </a:solidFill>
@@ -2436,98 +2444,20 @@
               </a:rPr>
               <a:t>0–4 risk dial</a:t>
             </a:r>
-            <a:endParaRPr lang="en-US" sz="1050" dirty="0"/>
-          </a:p>
-        </p:txBody>
-      </p:sp>
-      <p:sp>
-        <p:nvSpPr>
-          <p:cNvPr id="32" name="Text 30"/>
-          <p:cNvSpPr/>
-          <p:nvPr/>
-        </p:nvSpPr>
-        <p:spPr>
-          <a:xfrm>
-            <a:off x="640080" y="3977640"/>
-            <a:ext cx="3440521" cy="274320"/>
-          </a:xfrm>
-          <a:prstGeom prst="rect">
-            <a:avLst/>
-          </a:prstGeom>
-          <a:noFill/>
-          <a:ln/>
-        </p:spPr>
-        <p:txBody>
-          <a:bodyPr wrap="square" rtlCol="0" anchor="ctr"/>
-          <a:lstStyle/>
-          <a:p>
-            <a:pPr algn="ctr" indent="0" marL="0">
-              <a:buNone/>
-            </a:pPr>
-            <a:r>
-              <a:rPr lang="en-US" sz="1100" b="1" spc="200" kern="0" dirty="0">
-                <a:solidFill>
-                  <a:srgbClr val="6A9A52"/>
-                </a:solidFill>
-                <a:latin typeface="Calibri" pitchFamily="34" charset="0"/>
-                <a:ea typeface="Calibri" pitchFamily="34" charset="-122"/>
-                <a:cs typeface="Calibri" pitchFamily="34" charset="-120"/>
-              </a:rPr>
-              <a:t>EDGE</a:t>
-            </a:r>
-            <a:endParaRPr lang="en-US" sz="1100" dirty="0"/>
-          </a:p>
-        </p:txBody>
-      </p:sp>
-      <p:sp>
-        <p:nvSpPr>
-          <p:cNvPr id="33" name="Text 31"/>
-          <p:cNvSpPr/>
-          <p:nvPr/>
-        </p:nvSpPr>
-        <p:spPr>
-          <a:xfrm>
-            <a:off x="4375587" y="3977640"/>
-            <a:ext cx="7176028" cy="274320"/>
-          </a:xfrm>
-          <a:prstGeom prst="rect">
-            <a:avLst/>
-          </a:prstGeom>
-          <a:noFill/>
-          <a:ln/>
-        </p:spPr>
-        <p:txBody>
-          <a:bodyPr wrap="square" rtlCol="0" anchor="ctr"/>
-          <a:lstStyle/>
-          <a:p>
-            <a:pPr algn="ctr" indent="0" marL="0">
-              <a:buNone/>
-            </a:pPr>
-            <a:r>
-              <a:rPr lang="en-US" sz="1100" b="1" spc="200" kern="0" dirty="0">
-                <a:solidFill>
-                  <a:srgbClr val="2C5F2D"/>
-                </a:solidFill>
-                <a:latin typeface="Calibri" pitchFamily="34" charset="0"/>
-                <a:ea typeface="Calibri" pitchFamily="34" charset="-122"/>
-                <a:cs typeface="Calibri" pitchFamily="34" charset="-120"/>
-              </a:rPr>
-              <a:t>CLOUD</a:t>
-            </a:r>
-            <a:endParaRPr lang="en-US" sz="1100" dirty="0"/>
-          </a:p>
-        </p:txBody>
-      </p:sp>
-      <p:sp>
-        <p:nvSpPr>
-          <p:cNvPr id="34" name="Text 32"/>
-          <p:cNvSpPr/>
-          <p:nvPr/>
-        </p:nvSpPr>
-        <p:spPr>
-          <a:xfrm>
-            <a:off x="640080" y="5212080"/>
-            <a:ext cx="10972800" cy="640080"/>
+            <a:endParaRPr lang="en-US" sz="900" dirty="0"/>
+          </a:p>
+        </p:txBody>
+      </p:sp>
+      <p:sp>
+        <p:nvSpPr>
+          <p:cNvPr id="29" name="Text 27"/>
+          <p:cNvSpPr/>
+          <p:nvPr/>
+        </p:nvSpPr>
+        <p:spPr>
+          <a:xfrm>
+            <a:off x="640080" y="5257800"/>
+            <a:ext cx="10972800" cy="731520"/>
           </a:xfrm>
           <a:prstGeom prst="rect">
             <a:avLst/>
@@ -2669,34 +2599,14 @@
       </p:sp>
       <p:sp>
         <p:nvSpPr>
-          <p:cNvPr id="4" name="Shape 2"/>
-          <p:cNvSpPr/>
-          <p:nvPr/>
-        </p:nvSpPr>
-        <p:spPr>
-          <a:xfrm>
-            <a:off x="731520" y="1965960"/>
-            <a:ext cx="685800" cy="685800"/>
-          </a:xfrm>
-          <a:prstGeom prst="ellipse">
-            <a:avLst/>
-          </a:prstGeom>
-          <a:solidFill>
-            <a:srgbClr val="2C5F2D"/>
-          </a:solidFill>
-          <a:ln/>
-        </p:spPr>
-      </p:sp>
-      <p:sp>
-        <p:nvSpPr>
-          <p:cNvPr id="5" name="Text 3"/>
-          <p:cNvSpPr/>
-          <p:nvPr/>
-        </p:nvSpPr>
-        <p:spPr>
-          <a:xfrm>
-            <a:off x="731520" y="1965960"/>
-            <a:ext cx="685800" cy="685800"/>
+          <p:cNvPr id="4" name="Text 2"/>
+          <p:cNvSpPr/>
+          <p:nvPr/>
+        </p:nvSpPr>
+        <p:spPr>
+          <a:xfrm>
+            <a:off x="640080" y="1737360"/>
+            <a:ext cx="1097280" cy="1097280"/>
           </a:xfrm>
           <a:prstGeom prst="rect">
             <a:avLst/>
@@ -2708,13 +2618,13 @@
           <a:bodyPr wrap="square" lIns="0" tIns="0" rIns="0" bIns="0" rtlCol="0" anchor="ctr"/>
           <a:lstStyle/>
           <a:p>
-            <a:pPr algn="ctr" indent="0" marL="0">
-              <a:buNone/>
-            </a:pPr>
-            <a:r>
-              <a:rPr lang="en-US" sz="2600" b="1" dirty="0">
-                <a:solidFill>
-                  <a:srgbClr val="FFFFFF"/>
+            <a:pPr indent="0" marL="0">
+              <a:buNone/>
+            </a:pPr>
+            <a:r>
+              <a:rPr lang="en-US" sz="5400" b="1" dirty="0">
+                <a:solidFill>
+                  <a:srgbClr val="EEF3EA"/>
                 </a:solidFill>
                 <a:latin typeface="Bookman Old Style" pitchFamily="34" charset="0"/>
                 <a:ea typeface="Bookman Old Style" pitchFamily="34" charset="-122"/>
@@ -2722,9 +2632,32 @@
               </a:rPr>
               <a:t>1</a:t>
             </a:r>
-            <a:endParaRPr lang="en-US" sz="2600" dirty="0"/>
-          </a:p>
-        </p:txBody>
+            <a:endParaRPr lang="en-US" sz="5400" dirty="0"/>
+          </a:p>
+        </p:txBody>
+      </p:sp>
+      <p:sp>
+        <p:nvSpPr>
+          <p:cNvPr id="5" name="Shape 3"/>
+          <p:cNvSpPr/>
+          <p:nvPr/>
+        </p:nvSpPr>
+        <p:spPr>
+          <a:xfrm>
+            <a:off x="1828800" y="1920240"/>
+            <a:ext cx="0" cy="1051560"/>
+          </a:xfrm>
+          <a:prstGeom prst="line">
+            <a:avLst/>
+          </a:prstGeom>
+          <a:noFill/>
+          <a:ln w="25400">
+            <a:solidFill>
+              <a:srgbClr val="3F7C3F"/>
+            </a:solidFill>
+            <a:prstDash val="solid"/>
+          </a:ln>
+        </p:spPr>
       </p:sp>
       <p:sp>
         <p:nvSpPr>
@@ -2734,8 +2667,8 @@
         </p:nvSpPr>
         <p:spPr>
           <a:xfrm>
-            <a:off x="1691640" y="1920240"/>
-            <a:ext cx="9875520" cy="411480"/>
+            <a:off x="2057400" y="1874520"/>
+            <a:ext cx="9509760" cy="411480"/>
           </a:xfrm>
           <a:prstGeom prst="rect">
             <a:avLst/>
@@ -2759,7 +2692,7 @@
                 <a:ea typeface="Calibri" pitchFamily="34" charset="-122"/>
                 <a:cs typeface="Calibri" pitchFamily="34" charset="-120"/>
               </a:rPr>
-              <a:t>Pipeline health, all green</a:t>
+              <a:t>A 0-to-4 fire-risk dial per station</a:t>
             </a:r>
             <a:endParaRPr lang="en-US" sz="1800" dirty="0"/>
           </a:p>
@@ -2773,8 +2706,8 @@
         </p:nvSpPr>
         <p:spPr>
           <a:xfrm>
-            <a:off x="1691640" y="2340864"/>
-            <a:ext cx="9875520" cy="640080"/>
+            <a:off x="2057400" y="2313432"/>
+            <a:ext cx="9509760" cy="822960"/>
           </a:xfrm>
           <a:prstGeom prst="rect">
             <a:avLst/>
@@ -2798,7 +2731,7 @@
                 <a:ea typeface="Calibri" pitchFamily="34" charset="-122"/>
                 <a:cs typeface="Calibri" pitchFamily="34" charset="-120"/>
               </a:rPr>
-              <a:t>A scripted check verifies sensors to fog to queue to ingest to store, live, end to end.</a:t>
+              <a:t>The dashboard grades each ranger station on read from earlier, lower thresholds — an escalation gradient ahead of any hard alarm.</a:t>
             </a:r>
             <a:endParaRPr lang="en-US" sz="1350" dirty="0"/>
           </a:p>
@@ -2806,34 +2739,14 @@
       </p:sp>
       <p:sp>
         <p:nvSpPr>
-          <p:cNvPr id="8" name="Shape 6"/>
-          <p:cNvSpPr/>
-          <p:nvPr/>
-        </p:nvSpPr>
-        <p:spPr>
-          <a:xfrm>
-            <a:off x="731520" y="3383280"/>
-            <a:ext cx="685800" cy="685800"/>
-          </a:xfrm>
-          <a:prstGeom prst="ellipse">
-            <a:avLst/>
-          </a:prstGeom>
-          <a:solidFill>
-            <a:srgbClr val="2C5F2D"/>
-          </a:solidFill>
-          <a:ln/>
-        </p:spPr>
-      </p:sp>
-      <p:sp>
-        <p:nvSpPr>
-          <p:cNvPr id="9" name="Text 7"/>
-          <p:cNvSpPr/>
-          <p:nvPr/>
-        </p:nvSpPr>
-        <p:spPr>
-          <a:xfrm>
-            <a:off x="731520" y="3383280"/>
-            <a:ext cx="685800" cy="685800"/>
+          <p:cNvPr id="8" name="Text 6"/>
+          <p:cNvSpPr/>
+          <p:nvPr/>
+        </p:nvSpPr>
+        <p:spPr>
+          <a:xfrm>
+            <a:off x="640080" y="3200400"/>
+            <a:ext cx="1097280" cy="1097280"/>
           </a:xfrm>
           <a:prstGeom prst="rect">
             <a:avLst/>
@@ -2845,13 +2758,13 @@
           <a:bodyPr wrap="square" lIns="0" tIns="0" rIns="0" bIns="0" rtlCol="0" anchor="ctr"/>
           <a:lstStyle/>
           <a:p>
-            <a:pPr algn="ctr" indent="0" marL="0">
-              <a:buNone/>
-            </a:pPr>
-            <a:r>
-              <a:rPr lang="en-US" sz="2600" b="1" dirty="0">
-                <a:solidFill>
-                  <a:srgbClr val="FFFFFF"/>
+            <a:pPr indent="0" marL="0">
+              <a:buNone/>
+            </a:pPr>
+            <a:r>
+              <a:rPr lang="en-US" sz="5400" b="1" dirty="0">
+                <a:solidFill>
+                  <a:srgbClr val="EEF3EA"/>
                 </a:solidFill>
                 <a:latin typeface="Bookman Old Style" pitchFamily="34" charset="0"/>
                 <a:ea typeface="Bookman Old Style" pitchFamily="34" charset="-122"/>
@@ -2859,9 +2772,32 @@
               </a:rPr>
               <a:t>2</a:t>
             </a:r>
-            <a:endParaRPr lang="en-US" sz="2600" dirty="0"/>
-          </a:p>
-        </p:txBody>
+            <a:endParaRPr lang="en-US" sz="5400" dirty="0"/>
+          </a:p>
+        </p:txBody>
+      </p:sp>
+      <p:sp>
+        <p:nvSpPr>
+          <p:cNvPr id="9" name="Shape 7"/>
+          <p:cNvSpPr/>
+          <p:nvPr/>
+        </p:nvSpPr>
+        <p:spPr>
+          <a:xfrm>
+            <a:off x="1828800" y="3383280"/>
+            <a:ext cx="0" cy="1051560"/>
+          </a:xfrm>
+          <a:prstGeom prst="line">
+            <a:avLst/>
+          </a:prstGeom>
+          <a:noFill/>
+          <a:ln w="25400">
+            <a:solidFill>
+              <a:srgbClr val="3F7C3F"/>
+            </a:solidFill>
+            <a:prstDash val="solid"/>
+          </a:ln>
+        </p:spPr>
       </p:sp>
       <p:sp>
         <p:nvSpPr>
@@ -2871,8 +2807,8 @@
         </p:nvSpPr>
         <p:spPr>
           <a:xfrm>
-            <a:off x="1691640" y="3337560"/>
-            <a:ext cx="9875520" cy="411480"/>
+            <a:off x="2057400" y="3337560"/>
+            <a:ext cx="9509760" cy="411480"/>
           </a:xfrm>
           <a:prstGeom prst="rect">
             <a:avLst/>
@@ -2896,7 +2832,7 @@
                 <a:ea typeface="Calibri" pitchFamily="34" charset="-122"/>
                 <a:cs typeface="Calibri" pitchFamily="34" charset="-120"/>
               </a:rPr>
-              <a:t>Two ranger stations</a:t>
+              <a:t>A smoke-density trend per station</a:t>
             </a:r>
             <a:endParaRPr lang="en-US" sz="1800" dirty="0"/>
           </a:p>
@@ -2910,8 +2846,8 @@
         </p:nvSpPr>
         <p:spPr>
           <a:xfrm>
-            <a:off x="1691640" y="3758184"/>
-            <a:ext cx="9875520" cy="640080"/>
+            <a:off x="2057400" y="3776472"/>
+            <a:ext cx="9509760" cy="822960"/>
           </a:xfrm>
           <a:prstGeom prst="rect">
             <a:avLst/>
@@ -2935,7 +2871,7 @@
                 <a:ea typeface="Calibri" pitchFamily="34" charset="-122"/>
                 <a:cs typeface="Calibri" pitchFamily="34" charset="-120"/>
               </a:rPr>
-              <a:t>Five fire metrics per station with a 0-to-4 fire-risk dial, and fire-detection alerts firing on a smoke spike.</a:t>
+              <a:t>Both stations' smoke charts run live, so a rising smoke plume is visible on the trend before it trips a hard alert.</a:t>
             </a:r>
             <a:endParaRPr lang="en-US" sz="1350" dirty="0"/>
           </a:p>
@@ -2943,34 +2879,14 @@
       </p:sp>
       <p:sp>
         <p:nvSpPr>
-          <p:cNvPr id="12" name="Shape 10"/>
-          <p:cNvSpPr/>
-          <p:nvPr/>
-        </p:nvSpPr>
-        <p:spPr>
-          <a:xfrm>
-            <a:off x="731520" y="4800600"/>
-            <a:ext cx="685800" cy="685800"/>
-          </a:xfrm>
-          <a:prstGeom prst="ellipse">
-            <a:avLst/>
-          </a:prstGeom>
-          <a:solidFill>
-            <a:srgbClr val="2C5F2D"/>
-          </a:solidFill>
-          <a:ln/>
-        </p:spPr>
-      </p:sp>
-      <p:sp>
-        <p:nvSpPr>
-          <p:cNvPr id="13" name="Text 11"/>
-          <p:cNvSpPr/>
-          <p:nvPr/>
-        </p:nvSpPr>
-        <p:spPr>
-          <a:xfrm>
-            <a:off x="731520" y="4800600"/>
-            <a:ext cx="685800" cy="685800"/>
+          <p:cNvPr id="12" name="Text 10"/>
+          <p:cNvSpPr/>
+          <p:nvPr/>
+        </p:nvSpPr>
+        <p:spPr>
+          <a:xfrm>
+            <a:off x="640080" y="4663440"/>
+            <a:ext cx="1097280" cy="1097280"/>
           </a:xfrm>
           <a:prstGeom prst="rect">
             <a:avLst/>
@@ -2982,13 +2898,13 @@
           <a:bodyPr wrap="square" lIns="0" tIns="0" rIns="0" bIns="0" rtlCol="0" anchor="ctr"/>
           <a:lstStyle/>
           <a:p>
-            <a:pPr algn="ctr" indent="0" marL="0">
-              <a:buNone/>
-            </a:pPr>
-            <a:r>
-              <a:rPr lang="en-US" sz="2600" b="1" dirty="0">
-                <a:solidFill>
-                  <a:srgbClr val="FFFFFF"/>
+            <a:pPr indent="0" marL="0">
+              <a:buNone/>
+            </a:pPr>
+            <a:r>
+              <a:rPr lang="en-US" sz="5400" b="1" dirty="0">
+                <a:solidFill>
+                  <a:srgbClr val="EEF3EA"/>
                 </a:solidFill>
                 <a:latin typeface="Bookman Old Style" pitchFamily="34" charset="0"/>
                 <a:ea typeface="Bookman Old Style" pitchFamily="34" charset="-122"/>
@@ -2996,9 +2912,32 @@
               </a:rPr>
               <a:t>3</a:t>
             </a:r>
-            <a:endParaRPr lang="en-US" sz="2600" dirty="0"/>
-          </a:p>
-        </p:txBody>
+            <a:endParaRPr lang="en-US" sz="5400" dirty="0"/>
+          </a:p>
+        </p:txBody>
+      </p:sp>
+      <p:sp>
+        <p:nvSpPr>
+          <p:cNvPr id="13" name="Shape 11"/>
+          <p:cNvSpPr/>
+          <p:nvPr/>
+        </p:nvSpPr>
+        <p:spPr>
+          <a:xfrm>
+            <a:off x="1828800" y="4846320"/>
+            <a:ext cx="0" cy="1051560"/>
+          </a:xfrm>
+          <a:prstGeom prst="line">
+            <a:avLst/>
+          </a:prstGeom>
+          <a:noFill/>
+          <a:ln w="25400">
+            <a:solidFill>
+              <a:srgbClr val="3F7C3F"/>
+            </a:solidFill>
+            <a:prstDash val="solid"/>
+          </a:ln>
+        </p:spPr>
       </p:sp>
       <p:sp>
         <p:nvSpPr>
@@ -3008,8 +2947,8 @@
         </p:nvSpPr>
         <p:spPr>
           <a:xfrm>
-            <a:off x="1691640" y="4754880"/>
-            <a:ext cx="9875520" cy="411480"/>
+            <a:off x="2057400" y="4800600"/>
+            <a:ext cx="9509760" cy="411480"/>
           </a:xfrm>
           <a:prstGeom prst="rect">
             <a:avLst/>
@@ -3033,7 +2972,7 @@
                 <a:ea typeface="Calibri" pitchFamily="34" charset="-122"/>
                 <a:cs typeface="Calibri" pitchFamily="34" charset="-120"/>
               </a:rPr>
-              <a:t>Tested and scales</a:t>
+              <a:t>A fire-detection alert on a smoke spike</a:t>
             </a:r>
             <a:endParaRPr lang="en-US" sz="1800" dirty="0"/>
           </a:p>
@@ -3047,8 +2986,8 @@
         </p:nvSpPr>
         <p:spPr>
           <a:xfrm>
-            <a:off x="1691640" y="5175504"/>
-            <a:ext cx="9875520" cy="640080"/>
+            <a:off x="2057400" y="5239512"/>
+            <a:ext cx="9509760" cy="822960"/>
           </a:xfrm>
           <a:prstGeom prst="rect">
             <a:avLst/>
@@ -3072,7 +3011,7 @@
                 <a:ea typeface="Calibri" pitchFamily="34" charset="-122"/>
                 <a:cs typeface="Calibri" pitchFamily="34" charset="-120"/>
               </a:rPr>
-              <a:t>95 automated tests pass across sensors, fog node, queue consumer and dashboard; a 2,000-message burst via 32 senders drains without stalling.</a:t>
+              <a:t>Drive smoke density up on one station and the fire-detection alert fires within a window, dial climbing toward 4.</a:t>
             </a:r>
             <a:endParaRPr lang="en-US" sz="1350" dirty="0"/>
           </a:p>
@@ -3086,7 +3025,7 @@
         </p:nvSpPr>
         <p:spPr>
           <a:xfrm>
-            <a:off x="640080" y="6263640"/>
+            <a:off x="640080" y="6309360"/>
             <a:ext cx="10972800" cy="365760"/>
           </a:xfrm>
           <a:prstGeom prst="rect">
@@ -3157,24 +3096,24 @@
         </p:nvSpPr>
         <p:spPr>
           <a:xfrm>
-            <a:off x="640080" y="640080"/>
-            <a:ext cx="10972800" cy="640080"/>
-          </a:xfrm>
-          <a:prstGeom prst="rect">
-            <a:avLst/>
-          </a:prstGeom>
-          <a:noFill/>
-          <a:ln/>
-        </p:spPr>
-        <p:txBody>
-          <a:bodyPr wrap="square" rtlCol="0" anchor="ctr"/>
+            <a:off x="640080" y="594360"/>
+            <a:ext cx="10972800" cy="822960"/>
+          </a:xfrm>
+          <a:prstGeom prst="rect">
+            <a:avLst/>
+          </a:prstGeom>
+          <a:noFill/>
+          <a:ln/>
+        </p:spPr>
+        <p:txBody>
+          <a:bodyPr wrap="square" rtlCol="0" anchor="t"/>
           <a:lstStyle/>
           <a:p>
             <a:pPr indent="0" marL="0">
               <a:buNone/>
             </a:pPr>
             <a:r>
-              <a:rPr lang="en-US" sz="3000" b="1" dirty="0">
+              <a:rPr lang="en-US" sz="2800" b="1" dirty="0">
                 <a:solidFill>
                   <a:srgbClr val="FFFFFF"/>
                 </a:solidFill>
@@ -3184,7 +3123,7 @@
               </a:rPr>
               <a:t>Hardest Part — an invisible credential bug</a:t>
             </a:r>
-            <a:endParaRPr lang="en-US" sz="3000" dirty="0"/>
+            <a:endParaRPr lang="en-US" sz="2800" dirty="0"/>
           </a:p>
         </p:txBody>
       </p:sp>
@@ -3196,12 +3135,12 @@
         </p:nvSpPr>
         <p:spPr>
           <a:xfrm>
-            <a:off x="731520" y="1920240"/>
-            <a:ext cx="10698480" cy="1965960"/>
+            <a:off x="731520" y="1874520"/>
+            <a:ext cx="5212080" cy="4160520"/>
           </a:xfrm>
           <a:prstGeom prst="roundRect">
             <a:avLst>
-              <a:gd name="adj" fmla="val 4651"/>
+              <a:gd name="adj" fmla="val 2198"/>
             </a:avLst>
           </a:prstGeom>
           <a:solidFill>
@@ -3223,7 +3162,7 @@
         </p:nvSpPr>
         <p:spPr>
           <a:xfrm>
-            <a:off x="1005840" y="2103120"/>
+            <a:off x="1051560" y="2103120"/>
             <a:ext cx="3657600" cy="457200"/>
           </a:xfrm>
           <a:prstGeom prst="rect">
@@ -3262,8 +3201,8 @@
         </p:nvSpPr>
         <p:spPr>
           <a:xfrm>
-            <a:off x="1005840" y="2578608"/>
-            <a:ext cx="9966960" cy="1188720"/>
+            <a:off x="1051560" y="2651760"/>
+            <a:ext cx="4572000" cy="3200400"/>
           </a:xfrm>
           <a:prstGeom prst="rect">
             <a:avLst/>
@@ -3277,12 +3216,12 @@
           <a:p>
             <a:pPr indent="0" marL="0">
               <a:lnSpc>
-                <a:spcPct val="105000"/>
+                <a:spcPct val="110000"/>
               </a:lnSpc>
               <a:buNone/>
             </a:pPr>
             <a:r>
-              <a:rPr lang="en-US" sz="1300" dirty="0">
+              <a:rPr lang="en-US" sz="1350" dirty="0">
                 <a:solidFill>
                   <a:srgbClr val="D3E1CB"/>
                 </a:solidFill>
@@ -3292,7 +3231,7 @@
               </a:rPr>
               <a:t>Locally the pipeline signs its queue and database calls with the emulator's dummy credentials, and it decided when to use them by checking whether an AWS access-key variable was present. But real AWS injects that exact variable into every function it runs — so in production every call would be signed with incomplete credentials and rejected. All 95 tests stayed green; nothing could fail until the first real deployment.</a:t>
             </a:r>
-            <a:endParaRPr lang="en-US" sz="1300" dirty="0"/>
+            <a:endParaRPr lang="en-US" sz="1350" dirty="0"/>
           </a:p>
         </p:txBody>
       </p:sp>
@@ -3304,12 +3243,12 @@
         </p:nvSpPr>
         <p:spPr>
           <a:xfrm>
-            <a:off x="731520" y="4041648"/>
-            <a:ext cx="10698480" cy="1965960"/>
+            <a:off x="6263640" y="1874520"/>
+            <a:ext cx="5212080" cy="4160520"/>
           </a:xfrm>
           <a:prstGeom prst="roundRect">
             <a:avLst>
-              <a:gd name="adj" fmla="val 4651"/>
+              <a:gd name="adj" fmla="val 2198"/>
             </a:avLst>
           </a:prstGeom>
           <a:solidFill>
@@ -3331,7 +3270,7 @@
         </p:nvSpPr>
         <p:spPr>
           <a:xfrm>
-            <a:off x="1005840" y="4224528"/>
+            <a:off x="6583680" y="2103120"/>
             <a:ext cx="3657600" cy="457200"/>
           </a:xfrm>
           <a:prstGeom prst="rect">
@@ -3370,8 +3309,8 @@
         </p:nvSpPr>
         <p:spPr>
           <a:xfrm>
-            <a:off x="1005840" y="4700016"/>
-            <a:ext cx="9966960" cy="1188720"/>
+            <a:off x="6583680" y="2651760"/>
+            <a:ext cx="4572000" cy="3200400"/>
           </a:xfrm>
           <a:prstGeom prst="rect">
             <a:avLst/>
@@ -3385,12 +3324,12 @@
           <a:p>
             <a:pPr indent="0" marL="0">
               <a:lnSpc>
-                <a:spcPct val="105000"/>
+                <a:spcPct val="110000"/>
               </a:lnSpc>
               <a:buNone/>
             </a:pPr>
             <a:r>
-              <a:rPr lang="en-US" sz="1300" dirty="0">
+              <a:rPr lang="en-US" sz="1350" dirty="0">
                 <a:solidFill>
                   <a:srgbClr val="D3E1CB"/>
                 </a:solidFill>
@@ -3400,7 +3339,7 @@
               </a:rPr>
               <a:t>Gate on a signal that only exists locally: the emulator's endpoint address. On real AWS it is absent, so the platform's own credentials take over automatically. New tests now pin that behaviour down in both profiles.</a:t>
             </a:r>
-            <a:endParaRPr lang="en-US" sz="1300" dirty="0"/>
+            <a:endParaRPr lang="en-US" sz="1350" dirty="0"/>
           </a:p>
         </p:txBody>
       </p:sp>

--- a/ppt/DeekondaRakshan_X25180754_wildfire-forest-monitoring.pptx
+++ b/ppt/DeekondaRakshan_X25180754_wildfire-forest-monitoring.pptx
@@ -3070,7 +3070,7 @@
     <p:bg>
       <p:bgPr>
         <a:solidFill>
-          <a:srgbClr val="1A2418"/>
+          <a:srgbClr val="FFFFFF"/>
         </a:solidFill>
       </p:bgPr>
     </p:bg>
@@ -3096,7 +3096,7 @@
         </p:nvSpPr>
         <p:spPr>
           <a:xfrm>
-            <a:off x="640080" y="594360"/>
+            <a:off x="640080" y="502920"/>
             <a:ext cx="10972800" cy="822960"/>
           </a:xfrm>
           <a:prstGeom prst="rect">
@@ -3115,7 +3115,7 @@
             <a:r>
               <a:rPr lang="en-US" sz="2800" b="1" dirty="0">
                 <a:solidFill>
-                  <a:srgbClr val="FFFFFF"/>
+                  <a:srgbClr val="1B2418"/>
                 </a:solidFill>
                 <a:latin typeface="Bookman Old Style" pitchFamily="34" charset="0"/>
                 <a:ea typeface="Bookman Old Style" pitchFamily="34" charset="-122"/>
@@ -3135,8 +3135,8 @@
         </p:nvSpPr>
         <p:spPr>
           <a:xfrm>
-            <a:off x="731520" y="1874520"/>
-            <a:ext cx="5212080" cy="4160520"/>
+            <a:off x="640080" y="1874520"/>
+            <a:ext cx="4937760" cy="4160520"/>
           </a:xfrm>
           <a:prstGeom prst="roundRect">
             <a:avLst>
@@ -3144,9 +3144,9 @@
             </a:avLst>
           </a:prstGeom>
           <a:solidFill>
-            <a:srgbClr val="273522"/>
+            <a:srgbClr val="EEF3EA"/>
           </a:solidFill>
-          <a:ln w="15875">
+          <a:ln w="19050">
             <a:solidFill>
               <a:srgbClr val="E4772E"/>
             </a:solidFill>
@@ -3162,7 +3162,7 @@
         </p:nvSpPr>
         <p:spPr>
           <a:xfrm>
-            <a:off x="1051560" y="2103120"/>
+            <a:off x="960120" y="2103120"/>
             <a:ext cx="3657600" cy="457200"/>
           </a:xfrm>
           <a:prstGeom prst="rect">
@@ -3201,8 +3201,8 @@
         </p:nvSpPr>
         <p:spPr>
           <a:xfrm>
-            <a:off x="1051560" y="2651760"/>
-            <a:ext cx="4572000" cy="3200400"/>
+            <a:off x="960120" y="2651760"/>
+            <a:ext cx="4343400" cy="3200400"/>
           </a:xfrm>
           <a:prstGeom prst="rect">
             <a:avLst/>
@@ -3216,14 +3216,14 @@
           <a:p>
             <a:pPr indent="0" marL="0">
               <a:lnSpc>
-                <a:spcPct val="110000"/>
+                <a:spcPct val="112000"/>
               </a:lnSpc>
               <a:buNone/>
             </a:pPr>
             <a:r>
               <a:rPr lang="en-US" sz="1350" dirty="0">
                 <a:solidFill>
-                  <a:srgbClr val="D3E1CB"/>
+                  <a:srgbClr val="1B2418"/>
                 </a:solidFill>
                 <a:latin typeface="Calibri" pitchFamily="34" charset="0"/>
                 <a:ea typeface="Calibri" pitchFamily="34" charset="-122"/>
@@ -3243,8 +3243,8 @@
         </p:nvSpPr>
         <p:spPr>
           <a:xfrm>
-            <a:off x="6263640" y="1874520"/>
-            <a:ext cx="5212080" cy="4160520"/>
+            <a:off x="6611112" y="1874520"/>
+            <a:ext cx="4937760" cy="4160520"/>
           </a:xfrm>
           <a:prstGeom prst="roundRect">
             <a:avLst>
@@ -3252,11 +3252,11 @@
             </a:avLst>
           </a:prstGeom>
           <a:solidFill>
-            <a:srgbClr val="273522"/>
+            <a:srgbClr val="EEF3EA"/>
           </a:solidFill>
-          <a:ln w="15875">
+          <a:ln w="19050">
             <a:solidFill>
-              <a:srgbClr val="6A9A52"/>
+              <a:srgbClr val="3F7C3F"/>
             </a:solidFill>
             <a:prstDash val="solid"/>
           </a:ln>
@@ -3270,7 +3270,7 @@
         </p:nvSpPr>
         <p:spPr>
           <a:xfrm>
-            <a:off x="6583680" y="2103120"/>
+            <a:off x="6931152" y="2103120"/>
             <a:ext cx="3657600" cy="457200"/>
           </a:xfrm>
           <a:prstGeom prst="rect">
@@ -3289,7 +3289,7 @@
             <a:r>
               <a:rPr lang="en-US" sz="1900" b="1" dirty="0">
                 <a:solidFill>
-                  <a:srgbClr val="6A9A52"/>
+                  <a:srgbClr val="3F7C3F"/>
                 </a:solidFill>
                 <a:latin typeface="Bookman Old Style" pitchFamily="34" charset="0"/>
                 <a:ea typeface="Bookman Old Style" pitchFamily="34" charset="-122"/>
@@ -3309,8 +3309,8 @@
         </p:nvSpPr>
         <p:spPr>
           <a:xfrm>
-            <a:off x="6583680" y="2651760"/>
-            <a:ext cx="4572000" cy="3200400"/>
+            <a:off x="6931152" y="2651760"/>
+            <a:ext cx="4343400" cy="3200400"/>
           </a:xfrm>
           <a:prstGeom prst="rect">
             <a:avLst/>
@@ -3324,14 +3324,14 @@
           <a:p>
             <a:pPr indent="0" marL="0">
               <a:lnSpc>
-                <a:spcPct val="110000"/>
+                <a:spcPct val="112000"/>
               </a:lnSpc>
               <a:buNone/>
             </a:pPr>
             <a:r>
               <a:rPr lang="en-US" sz="1350" dirty="0">
                 <a:solidFill>
-                  <a:srgbClr val="D3E1CB"/>
+                  <a:srgbClr val="1B2418"/>
                 </a:solidFill>
                 <a:latin typeface="Calibri" pitchFamily="34" charset="0"/>
                 <a:ea typeface="Calibri" pitchFamily="34" charset="-122"/>
@@ -3342,6 +3342,26 @@
             <a:endParaRPr lang="en-US" sz="1350" dirty="0"/>
           </a:p>
         </p:txBody>
+      </p:sp>
+      <p:sp>
+        <p:nvSpPr>
+          <p:cNvPr id="9" name="Shape 7"/>
+          <p:cNvSpPr/>
+          <p:nvPr/>
+        </p:nvSpPr>
+        <p:spPr>
+          <a:xfrm>
+            <a:off x="5669280" y="3703320"/>
+            <a:ext cx="841248" cy="512064"/>
+          </a:xfrm>
+          <a:prstGeom prst="rightArrow">
+            <a:avLst/>
+          </a:prstGeom>
+          <a:solidFill>
+            <a:srgbClr val="2C5F2D"/>
+          </a:solidFill>
+          <a:ln/>
+        </p:spPr>
       </p:sp>
     </p:spTree>
   </p:cSld>

--- a/ppt/DeekondaRakshan_X25180754_wildfire-forest-monitoring.pptx
+++ b/ppt/DeekondaRakshan_X25180754_wildfire-forest-monitoring.pptx
@@ -1598,18 +1598,18 @@
         </p:nvSpPr>
         <p:spPr>
           <a:xfrm>
-            <a:off x="640080" y="1554480"/>
-            <a:ext cx="3200400" cy="3383280"/>
+            <a:off x="3992728" y="1234440"/>
+            <a:ext cx="4206240" cy="658368"/>
           </a:xfrm>
           <a:prstGeom prst="roundRect">
             <a:avLst>
-              <a:gd name="adj" fmla="val 2857"/>
+              <a:gd name="adj" fmla="val 11111"/>
             </a:avLst>
           </a:prstGeom>
           <a:solidFill>
             <a:srgbClr val="EEF3EA"/>
           </a:solidFill>
-          <a:ln w="19050">
+          <a:ln w="17780">
             <a:solidFill>
               <a:srgbClr val="6A9A52"/>
             </a:solidFill>
@@ -1619,69 +1619,62 @@
       </p:sp>
       <p:sp>
         <p:nvSpPr>
-          <p:cNvPr id="4" name="Text 2"/>
-          <p:cNvSpPr/>
-          <p:nvPr/>
-        </p:nvSpPr>
-        <p:spPr>
-          <a:xfrm>
-            <a:off x="640080" y="1691640"/>
-            <a:ext cx="3200400" cy="365760"/>
-          </a:xfrm>
-          <a:prstGeom prst="rect">
-            <a:avLst/>
-          </a:prstGeom>
-          <a:noFill/>
-          <a:ln/>
-        </p:spPr>
-        <p:txBody>
-          <a:bodyPr wrap="square" rtlCol="0" anchor="ctr"/>
-          <a:lstStyle/>
-          <a:p>
-            <a:pPr algn="ctr" indent="0" marL="0">
-              <a:buNone/>
-            </a:pPr>
-            <a:r>
-              <a:rPr lang="en-US" sz="1200" b="1" spc="300" kern="0" dirty="0">
-                <a:solidFill>
-                  <a:srgbClr val="6A9A52"/>
+          <p:cNvPr id="4" name="Shape 2"/>
+          <p:cNvSpPr/>
+          <p:nvPr/>
+        </p:nvSpPr>
+        <p:spPr>
+          <a:xfrm>
+            <a:off x="4193896" y="1481328"/>
+            <a:ext cx="164592" cy="164592"/>
+          </a:xfrm>
+          <a:prstGeom prst="ellipse">
+            <a:avLst/>
+          </a:prstGeom>
+          <a:solidFill>
+            <a:srgbClr val="6A9A52"/>
+          </a:solidFill>
+          <a:ln/>
+        </p:spPr>
+      </p:sp>
+      <p:sp>
+        <p:nvSpPr>
+          <p:cNvPr id="5" name="Text 3"/>
+          <p:cNvSpPr/>
+          <p:nvPr/>
+        </p:nvSpPr>
+        <p:spPr>
+          <a:xfrm>
+            <a:off x="4495648" y="1234440"/>
+            <a:ext cx="2194560" cy="658368"/>
+          </a:xfrm>
+          <a:prstGeom prst="rect">
+            <a:avLst/>
+          </a:prstGeom>
+          <a:noFill/>
+          <a:ln/>
+        </p:spPr>
+        <p:txBody>
+          <a:bodyPr wrap="square" lIns="0" tIns="0" rIns="0" bIns="0" rtlCol="0" anchor="ctr"/>
+          <a:lstStyle/>
+          <a:p>
+            <a:pPr indent="0" marL="0">
+              <a:buNone/>
+            </a:pPr>
+            <a:r>
+              <a:rPr lang="en-US" sz="1350" b="1" dirty="0">
+                <a:solidFill>
+                  <a:srgbClr val="1B2418"/>
                 </a:solidFill>
                 <a:latin typeface="Calibri" pitchFamily="34" charset="0"/>
                 <a:ea typeface="Calibri" pitchFamily="34" charset="-122"/>
                 <a:cs typeface="Calibri" pitchFamily="34" charset="-120"/>
               </a:rPr>
-              <a:t>EDGE</a:t>
-            </a:r>
-            <a:endParaRPr lang="en-US" sz="1200" dirty="0"/>
-          </a:p>
-        </p:txBody>
-      </p:sp>
-      <p:sp>
-        <p:nvSpPr>
-          <p:cNvPr id="5" name="Shape 3"/>
-          <p:cNvSpPr/>
-          <p:nvPr/>
-        </p:nvSpPr>
-        <p:spPr>
-          <a:xfrm>
-            <a:off x="914400" y="2286000"/>
-            <a:ext cx="2651760" cy="1005840"/>
-          </a:xfrm>
-          <a:prstGeom prst="roundRect">
-            <a:avLst>
-              <a:gd name="adj" fmla="val 7273"/>
-            </a:avLst>
-          </a:prstGeom>
-          <a:solidFill>
-            <a:srgbClr val="FFFFFF"/>
-          </a:solidFill>
-          <a:ln w="15240">
-            <a:solidFill>
-              <a:srgbClr val="6A9A52"/>
-            </a:solidFill>
-            <a:prstDash val="solid"/>
-          </a:ln>
-        </p:spPr>
+              <a:t>Field sensors</a:t>
+            </a:r>
+            <a:endParaRPr lang="en-US" sz="1350" dirty="0"/>
+          </a:p>
+        </p:txBody>
       </p:sp>
       <p:sp>
         <p:nvSpPr>
@@ -1691,8 +1684,8 @@
         </p:nvSpPr>
         <p:spPr>
           <a:xfrm>
-            <a:off x="914400" y="2432304"/>
-            <a:ext cx="2651760" cy="365760"/>
+            <a:off x="6644488" y="1234440"/>
+            <a:ext cx="1463040" cy="658368"/>
           </a:xfrm>
           <a:prstGeom prst="rect">
             <a:avLst/>
@@ -1704,379 +1697,40 @@
           <a:bodyPr wrap="square" lIns="0" tIns="0" rIns="0" bIns="0" rtlCol="0" anchor="ctr"/>
           <a:lstStyle/>
           <a:p>
-            <a:pPr algn="ctr" indent="0" marL="0">
-              <a:buNone/>
-            </a:pPr>
-            <a:r>
-              <a:rPr lang="en-US" sz="1400" b="1" dirty="0">
-                <a:solidFill>
-                  <a:srgbClr val="1B2418"/>
+            <a:pPr algn="r" indent="0" marL="0">
+              <a:buNone/>
+            </a:pPr>
+            <a:r>
+              <a:rPr lang="en-US" sz="950" dirty="0">
+                <a:solidFill>
+                  <a:srgbClr val="5F6E55"/>
                 </a:solidFill>
                 <a:latin typeface="Calibri" pitchFamily="34" charset="0"/>
                 <a:ea typeface="Calibri" pitchFamily="34" charset="-122"/>
                 <a:cs typeface="Calibri" pitchFamily="34" charset="-120"/>
               </a:rPr>
-              <a:t>Field sensors</a:t>
-            </a:r>
-            <a:endParaRPr lang="en-US" sz="1400" dirty="0"/>
-          </a:p>
-        </p:txBody>
-      </p:sp>
-      <p:sp>
-        <p:nvSpPr>
-          <p:cNvPr id="7" name="Text 5"/>
-          <p:cNvSpPr/>
-          <p:nvPr/>
-        </p:nvSpPr>
-        <p:spPr>
-          <a:xfrm>
-            <a:off x="914400" y="2816352"/>
-            <a:ext cx="2651760" cy="365760"/>
-          </a:xfrm>
-          <a:prstGeom prst="rect">
-            <a:avLst/>
-          </a:prstGeom>
-          <a:noFill/>
-          <a:ln/>
-        </p:spPr>
-        <p:txBody>
-          <a:bodyPr wrap="square" lIns="0" tIns="0" rIns="0" bIns="0" rtlCol="0" anchor="ctr"/>
-          <a:lstStyle/>
-          <a:p>
-            <a:pPr algn="ctr" indent="0" marL="0">
-              <a:buNone/>
-            </a:pPr>
-            <a:r>
-              <a:rPr lang="en-US" sz="1000" dirty="0">
-                <a:solidFill>
-                  <a:srgbClr val="5F6E55"/>
-                </a:solidFill>
-                <a:latin typeface="Calibri" pitchFamily="34" charset="0"/>
-                <a:ea typeface="Calibri" pitchFamily="34" charset="-122"/>
-                <a:cs typeface="Calibri" pitchFamily="34" charset="-120"/>
-              </a:rPr>
               <a:t>10 · 2 stations · 5 metrics</a:t>
             </a:r>
-            <a:endParaRPr lang="en-US" sz="1000" dirty="0"/>
-          </a:p>
-        </p:txBody>
-      </p:sp>
-      <p:sp>
-        <p:nvSpPr>
-          <p:cNvPr id="8" name="Shape 6"/>
-          <p:cNvSpPr/>
-          <p:nvPr/>
-        </p:nvSpPr>
-        <p:spPr>
-          <a:xfrm>
-            <a:off x="914400" y="3520440"/>
-            <a:ext cx="2651760" cy="1005840"/>
-          </a:xfrm>
-          <a:prstGeom prst="roundRect">
-            <a:avLst>
-              <a:gd name="adj" fmla="val 7273"/>
-            </a:avLst>
-          </a:prstGeom>
-          <a:solidFill>
-            <a:srgbClr val="FFFFFF"/>
-          </a:solidFill>
-          <a:ln w="15240">
-            <a:solidFill>
-              <a:srgbClr val="6A9A52"/>
-            </a:solidFill>
-            <a:prstDash val="solid"/>
-          </a:ln>
-        </p:spPr>
-      </p:sp>
-      <p:sp>
-        <p:nvSpPr>
-          <p:cNvPr id="9" name="Text 7"/>
-          <p:cNvSpPr/>
-          <p:nvPr/>
-        </p:nvSpPr>
-        <p:spPr>
-          <a:xfrm>
-            <a:off x="914400" y="3666744"/>
-            <a:ext cx="2651760" cy="365760"/>
-          </a:xfrm>
-          <a:prstGeom prst="rect">
-            <a:avLst/>
-          </a:prstGeom>
-          <a:noFill/>
-          <a:ln/>
-        </p:spPr>
-        <p:txBody>
-          <a:bodyPr wrap="square" lIns="0" tIns="0" rIns="0" bIns="0" rtlCol="0" anchor="ctr"/>
-          <a:lstStyle/>
-          <a:p>
-            <a:pPr algn="ctr" indent="0" marL="0">
-              <a:buNone/>
-            </a:pPr>
-            <a:r>
-              <a:rPr lang="en-US" sz="1400" b="1" dirty="0">
-                <a:solidFill>
-                  <a:srgbClr val="1B2418"/>
-                </a:solidFill>
-                <a:latin typeface="Calibri" pitchFamily="34" charset="0"/>
-                <a:ea typeface="Calibri" pitchFamily="34" charset="-122"/>
-                <a:cs typeface="Calibri" pitchFamily="34" charset="-120"/>
-              </a:rPr>
-              <a:t>Fog node</a:t>
-            </a:r>
-            <a:endParaRPr lang="en-US" sz="1400" dirty="0"/>
-          </a:p>
-        </p:txBody>
-      </p:sp>
-      <p:sp>
-        <p:nvSpPr>
-          <p:cNvPr id="10" name="Text 8"/>
-          <p:cNvSpPr/>
-          <p:nvPr/>
-        </p:nvSpPr>
-        <p:spPr>
-          <a:xfrm>
-            <a:off x="914400" y="4050792"/>
-            <a:ext cx="2651760" cy="365760"/>
-          </a:xfrm>
-          <a:prstGeom prst="rect">
-            <a:avLst/>
-          </a:prstGeom>
-          <a:noFill/>
-          <a:ln/>
-        </p:spPr>
-        <p:txBody>
-          <a:bodyPr wrap="square" lIns="0" tIns="0" rIns="0" bIns="0" rtlCol="0" anchor="ctr"/>
-          <a:lstStyle/>
-          <a:p>
-            <a:pPr algn="ctr" indent="0" marL="0">
-              <a:buNone/>
-            </a:pPr>
-            <a:r>
-              <a:rPr lang="en-US" sz="1000" dirty="0">
-                <a:solidFill>
-                  <a:srgbClr val="5F6E55"/>
-                </a:solidFill>
-                <a:latin typeface="Calibri" pitchFamily="34" charset="0"/>
-                <a:ea typeface="Calibri" pitchFamily="34" charset="-122"/>
-                <a:cs typeface="Calibri" pitchFamily="34" charset="-120"/>
-              </a:rPr>
-              <a:t>windows · fire alerts</a:t>
-            </a:r>
-            <a:endParaRPr lang="en-US" sz="1000" dirty="0"/>
-          </a:p>
-        </p:txBody>
-      </p:sp>
-      <p:sp>
-        <p:nvSpPr>
-          <p:cNvPr id="11" name="Shape 9"/>
-          <p:cNvSpPr/>
-          <p:nvPr/>
-        </p:nvSpPr>
-        <p:spPr>
-          <a:xfrm>
-            <a:off x="3886200" y="3246120"/>
-            <a:ext cx="502920" cy="0"/>
+            <a:endParaRPr lang="en-US" sz="950" dirty="0"/>
+          </a:p>
+        </p:txBody>
+      </p:sp>
+      <p:sp>
+        <p:nvSpPr>
+          <p:cNvPr id="7" name="Shape 5"/>
+          <p:cNvSpPr/>
+          <p:nvPr/>
+        </p:nvSpPr>
+        <p:spPr>
+          <a:xfrm>
+            <a:off x="6095848" y="1892808"/>
+            <a:ext cx="0" cy="219456"/>
           </a:xfrm>
           <a:prstGeom prst="line">
             <a:avLst/>
           </a:prstGeom>
           <a:noFill/>
-          <a:ln w="31750">
-            <a:solidFill>
-              <a:srgbClr val="2C5F2D"/>
-            </a:solidFill>
-            <a:prstDash val="solid"/>
-            <a:tailEnd type="triangle"/>
-          </a:ln>
-        </p:spPr>
-      </p:sp>
-      <p:sp>
-        <p:nvSpPr>
-          <p:cNvPr id="12" name="Shape 10"/>
-          <p:cNvSpPr/>
-          <p:nvPr/>
-        </p:nvSpPr>
-        <p:spPr>
-          <a:xfrm>
-            <a:off x="4572000" y="1554480"/>
-            <a:ext cx="6949440" cy="3383280"/>
-          </a:xfrm>
-          <a:prstGeom prst="roundRect">
-            <a:avLst>
-              <a:gd name="adj" fmla="val 2703"/>
-            </a:avLst>
-          </a:prstGeom>
-          <a:solidFill>
-            <a:srgbClr val="EEF3EA"/>
-          </a:solidFill>
-          <a:ln w="19050">
-            <a:solidFill>
-              <a:srgbClr val="2C5F2D"/>
-            </a:solidFill>
-            <a:prstDash val="solid"/>
-          </a:ln>
-        </p:spPr>
-      </p:sp>
-      <p:sp>
-        <p:nvSpPr>
-          <p:cNvPr id="13" name="Text 11"/>
-          <p:cNvSpPr/>
-          <p:nvPr/>
-        </p:nvSpPr>
-        <p:spPr>
-          <a:xfrm>
-            <a:off x="4572000" y="1691640"/>
-            <a:ext cx="6949440" cy="365760"/>
-          </a:xfrm>
-          <a:prstGeom prst="rect">
-            <a:avLst/>
-          </a:prstGeom>
-          <a:noFill/>
-          <a:ln/>
-        </p:spPr>
-        <p:txBody>
-          <a:bodyPr wrap="square" rtlCol="0" anchor="ctr"/>
-          <a:lstStyle/>
-          <a:p>
-            <a:pPr algn="ctr" indent="0" marL="0">
-              <a:buNone/>
-            </a:pPr>
-            <a:r>
-              <a:rPr lang="en-US" sz="1200" b="1" spc="200" kern="0" dirty="0">
-                <a:solidFill>
-                  <a:srgbClr val="2C5F2D"/>
-                </a:solidFill>
-                <a:latin typeface="Calibri" pitchFamily="34" charset="0"/>
-                <a:ea typeface="Calibri" pitchFamily="34" charset="-122"/>
-                <a:cs typeface="Calibri" pitchFamily="34" charset="-120"/>
-              </a:rPr>
-              <a:t>CLOUD (serverless)</a:t>
-            </a:r>
-            <a:endParaRPr lang="en-US" sz="1200" dirty="0"/>
-          </a:p>
-        </p:txBody>
-      </p:sp>
-      <p:sp>
-        <p:nvSpPr>
-          <p:cNvPr id="14" name="Shape 12"/>
-          <p:cNvSpPr/>
-          <p:nvPr/>
-        </p:nvSpPr>
-        <p:spPr>
-          <a:xfrm>
-            <a:off x="4846320" y="2651760"/>
-            <a:ext cx="1463040" cy="1371600"/>
-          </a:xfrm>
-          <a:prstGeom prst="roundRect">
-            <a:avLst>
-              <a:gd name="adj" fmla="val 5333"/>
-            </a:avLst>
-          </a:prstGeom>
-          <a:solidFill>
-            <a:srgbClr val="FFFFFF"/>
-          </a:solidFill>
-          <a:ln w="15240">
-            <a:solidFill>
-              <a:srgbClr val="2C5F2D"/>
-            </a:solidFill>
-            <a:prstDash val="solid"/>
-          </a:ln>
-        </p:spPr>
-      </p:sp>
-      <p:sp>
-        <p:nvSpPr>
-          <p:cNvPr id="15" name="Text 13"/>
-          <p:cNvSpPr/>
-          <p:nvPr/>
-        </p:nvSpPr>
-        <p:spPr>
-          <a:xfrm>
-            <a:off x="4800600" y="2907792"/>
-            <a:ext cx="1554480" cy="457200"/>
-          </a:xfrm>
-          <a:prstGeom prst="rect">
-            <a:avLst/>
-          </a:prstGeom>
-          <a:noFill/>
-          <a:ln/>
-        </p:spPr>
-        <p:txBody>
-          <a:bodyPr wrap="square" lIns="0" tIns="0" rIns="0" bIns="0" rtlCol="0" anchor="ctr"/>
-          <a:lstStyle/>
-          <a:p>
-            <a:pPr algn="ctr" indent="0" marL="0">
-              <a:buNone/>
-            </a:pPr>
-            <a:r>
-              <a:rPr lang="en-US" sz="1250" b="1" dirty="0">
-                <a:solidFill>
-                  <a:srgbClr val="1B2418"/>
-                </a:solidFill>
-                <a:latin typeface="Calibri" pitchFamily="34" charset="0"/>
-                <a:ea typeface="Calibri" pitchFamily="34" charset="-122"/>
-                <a:cs typeface="Calibri" pitchFamily="34" charset="-120"/>
-              </a:rPr>
-              <a:t>Amazon SQS</a:t>
-            </a:r>
-            <a:endParaRPr lang="en-US" sz="1250" dirty="0"/>
-          </a:p>
-        </p:txBody>
-      </p:sp>
-      <p:sp>
-        <p:nvSpPr>
-          <p:cNvPr id="16" name="Text 14"/>
-          <p:cNvSpPr/>
-          <p:nvPr/>
-        </p:nvSpPr>
-        <p:spPr>
-          <a:xfrm>
-            <a:off x="4828032" y="3401568"/>
-            <a:ext cx="1499616" cy="457200"/>
-          </a:xfrm>
-          <a:prstGeom prst="rect">
-            <a:avLst/>
-          </a:prstGeom>
-          <a:noFill/>
-          <a:ln/>
-        </p:spPr>
-        <p:txBody>
-          <a:bodyPr wrap="square" lIns="0" tIns="0" rIns="0" bIns="0" rtlCol="0" anchor="ctr"/>
-          <a:lstStyle/>
-          <a:p>
-            <a:pPr algn="ctr" indent="0" marL="0">
-              <a:buNone/>
-            </a:pPr>
-            <a:r>
-              <a:rPr lang="en-US" sz="900" dirty="0">
-                <a:solidFill>
-                  <a:srgbClr val="5F6E55"/>
-                </a:solidFill>
-                <a:latin typeface="Calibri" pitchFamily="34" charset="0"/>
-                <a:ea typeface="Calibri" pitchFamily="34" charset="-122"/>
-                <a:cs typeface="Calibri" pitchFamily="34" charset="-120"/>
-              </a:rPr>
-              <a:t>batched sends</a:t>
-            </a:r>
-            <a:endParaRPr lang="en-US" sz="900" dirty="0"/>
-          </a:p>
-        </p:txBody>
-      </p:sp>
-      <p:sp>
-        <p:nvSpPr>
-          <p:cNvPr id="17" name="Shape 15"/>
-          <p:cNvSpPr/>
-          <p:nvPr/>
-        </p:nvSpPr>
-        <p:spPr>
-          <a:xfrm>
-            <a:off x="6318504" y="3337560"/>
-            <a:ext cx="164592" cy="0"/>
-          </a:xfrm>
-          <a:prstGeom prst="line">
-            <a:avLst/>
-          </a:prstGeom>
-          <a:noFill/>
-          <a:ln w="20320">
+          <a:ln w="25400">
             <a:solidFill>
               <a:srgbClr val="6A9A52"/>
             </a:solidFill>
@@ -2087,26 +1741,26 @@
       </p:sp>
       <p:sp>
         <p:nvSpPr>
-          <p:cNvPr id="18" name="Shape 16"/>
-          <p:cNvSpPr/>
-          <p:nvPr/>
-        </p:nvSpPr>
-        <p:spPr>
-          <a:xfrm>
-            <a:off x="6492240" y="2651760"/>
-            <a:ext cx="1463040" cy="1371600"/>
+          <p:cNvPr id="8" name="Shape 6"/>
+          <p:cNvSpPr/>
+          <p:nvPr/>
+        </p:nvSpPr>
+        <p:spPr>
+          <a:xfrm>
+            <a:off x="3992728" y="2112264"/>
+            <a:ext cx="4206240" cy="658368"/>
           </a:xfrm>
           <a:prstGeom prst="roundRect">
             <a:avLst>
-              <a:gd name="adj" fmla="val 5333"/>
+              <a:gd name="adj" fmla="val 11111"/>
             </a:avLst>
           </a:prstGeom>
           <a:solidFill>
-            <a:srgbClr val="FFFFFF"/>
-          </a:solidFill>
-          <a:ln w="15240">
+            <a:srgbClr val="EEF3EA"/>
+          </a:solidFill>
+          <a:ln w="17780">
             <a:solidFill>
-              <a:srgbClr val="2C5F2D"/>
+              <a:srgbClr val="6A9A52"/>
             </a:solidFill>
             <a:prstDash val="solid"/>
           </a:ln>
@@ -2114,14 +1768,34 @@
       </p:sp>
       <p:sp>
         <p:nvSpPr>
-          <p:cNvPr id="19" name="Text 17"/>
-          <p:cNvSpPr/>
-          <p:nvPr/>
-        </p:nvSpPr>
-        <p:spPr>
-          <a:xfrm>
-            <a:off x="6446520" y="2907792"/>
-            <a:ext cx="1554480" cy="457200"/>
+          <p:cNvPr id="9" name="Shape 7"/>
+          <p:cNvSpPr/>
+          <p:nvPr/>
+        </p:nvSpPr>
+        <p:spPr>
+          <a:xfrm>
+            <a:off x="4193896" y="2359152"/>
+            <a:ext cx="164592" cy="164592"/>
+          </a:xfrm>
+          <a:prstGeom prst="ellipse">
+            <a:avLst/>
+          </a:prstGeom>
+          <a:solidFill>
+            <a:srgbClr val="6A9A52"/>
+          </a:solidFill>
+          <a:ln/>
+        </p:spPr>
+      </p:sp>
+      <p:sp>
+        <p:nvSpPr>
+          <p:cNvPr id="10" name="Text 8"/>
+          <p:cNvSpPr/>
+          <p:nvPr/>
+        </p:nvSpPr>
+        <p:spPr>
+          <a:xfrm>
+            <a:off x="4495648" y="2112264"/>
+            <a:ext cx="2194560" cy="658368"/>
           </a:xfrm>
           <a:prstGeom prst="rect">
             <a:avLst/>
@@ -2133,11 +1807,11 @@
           <a:bodyPr wrap="square" lIns="0" tIns="0" rIns="0" bIns="0" rtlCol="0" anchor="ctr"/>
           <a:lstStyle/>
           <a:p>
-            <a:pPr algn="ctr" indent="0" marL="0">
-              <a:buNone/>
-            </a:pPr>
-            <a:r>
-              <a:rPr lang="en-US" sz="1250" b="1" dirty="0">
+            <a:pPr indent="0" marL="0">
+              <a:buNone/>
+            </a:pPr>
+            <a:r>
+              <a:rPr lang="en-US" sz="1350" b="1" dirty="0">
                 <a:solidFill>
                   <a:srgbClr val="1B2418"/>
                 </a:solidFill>
@@ -2145,22 +1819,22 @@
                 <a:ea typeface="Calibri" pitchFamily="34" charset="-122"/>
                 <a:cs typeface="Calibri" pitchFamily="34" charset="-120"/>
               </a:rPr>
-              <a:t>AWS Lambda</a:t>
-            </a:r>
-            <a:endParaRPr lang="en-US" sz="1250" dirty="0"/>
-          </a:p>
-        </p:txBody>
-      </p:sp>
-      <p:sp>
-        <p:nvSpPr>
-          <p:cNvPr id="20" name="Text 18"/>
-          <p:cNvSpPr/>
-          <p:nvPr/>
-        </p:nvSpPr>
-        <p:spPr>
-          <a:xfrm>
-            <a:off x="6473952" y="3401568"/>
-            <a:ext cx="1499616" cy="457200"/>
+              <a:t>Fog node</a:t>
+            </a:r>
+            <a:endParaRPr lang="en-US" sz="1350" dirty="0"/>
+          </a:p>
+        </p:txBody>
+      </p:sp>
+      <p:sp>
+        <p:nvSpPr>
+          <p:cNvPr id="11" name="Text 9"/>
+          <p:cNvSpPr/>
+          <p:nvPr/>
+        </p:nvSpPr>
+        <p:spPr>
+          <a:xfrm>
+            <a:off x="6644488" y="2112264"/>
+            <a:ext cx="1463040" cy="658368"/>
           </a:xfrm>
           <a:prstGeom prst="rect">
             <a:avLst/>
@@ -2172,11 +1846,11 @@
           <a:bodyPr wrap="square" lIns="0" tIns="0" rIns="0" bIns="0" rtlCol="0" anchor="ctr"/>
           <a:lstStyle/>
           <a:p>
-            <a:pPr algn="ctr" indent="0" marL="0">
-              <a:buNone/>
-            </a:pPr>
-            <a:r>
-              <a:rPr lang="en-US" sz="900" dirty="0">
+            <a:pPr algn="r" indent="0" marL="0">
+              <a:buNone/>
+            </a:pPr>
+            <a:r>
+              <a:rPr lang="en-US" sz="950" dirty="0">
                 <a:solidFill>
                   <a:srgbClr val="5F6E55"/>
                 </a:solidFill>
@@ -2184,28 +1858,28 @@
                 <a:ea typeface="Calibri" pitchFamily="34" charset="-122"/>
                 <a:cs typeface="Calibri" pitchFamily="34" charset="-120"/>
               </a:rPr>
-              <a:t>nodejs20 ingest</a:t>
-            </a:r>
-            <a:endParaRPr lang="en-US" sz="900" dirty="0"/>
-          </a:p>
-        </p:txBody>
-      </p:sp>
-      <p:sp>
-        <p:nvSpPr>
-          <p:cNvPr id="21" name="Shape 19"/>
-          <p:cNvSpPr/>
-          <p:nvPr/>
-        </p:nvSpPr>
-        <p:spPr>
-          <a:xfrm>
-            <a:off x="7964424" y="3337560"/>
-            <a:ext cx="164592" cy="0"/>
+              <a:t>windows · fire alerts</a:t>
+            </a:r>
+            <a:endParaRPr lang="en-US" sz="950" dirty="0"/>
+          </a:p>
+        </p:txBody>
+      </p:sp>
+      <p:sp>
+        <p:nvSpPr>
+          <p:cNvPr id="12" name="Shape 10"/>
+          <p:cNvSpPr/>
+          <p:nvPr/>
+        </p:nvSpPr>
+        <p:spPr>
+          <a:xfrm>
+            <a:off x="6095848" y="2770632"/>
+            <a:ext cx="0" cy="219456"/>
           </a:xfrm>
           <a:prstGeom prst="line">
             <a:avLst/>
           </a:prstGeom>
           <a:noFill/>
-          <a:ln w="20320">
+          <a:ln w="25400">
             <a:solidFill>
               <a:srgbClr val="6A9A52"/>
             </a:solidFill>
@@ -2216,24 +1890,24 @@
       </p:sp>
       <p:sp>
         <p:nvSpPr>
-          <p:cNvPr id="22" name="Shape 20"/>
-          <p:cNvSpPr/>
-          <p:nvPr/>
-        </p:nvSpPr>
-        <p:spPr>
-          <a:xfrm>
-            <a:off x="8138160" y="2651760"/>
-            <a:ext cx="1463040" cy="1371600"/>
+          <p:cNvPr id="13" name="Shape 11"/>
+          <p:cNvSpPr/>
+          <p:nvPr/>
+        </p:nvSpPr>
+        <p:spPr>
+          <a:xfrm>
+            <a:off x="3992728" y="2990088"/>
+            <a:ext cx="4206240" cy="658368"/>
           </a:xfrm>
           <a:prstGeom prst="roundRect">
             <a:avLst>
-              <a:gd name="adj" fmla="val 5333"/>
+              <a:gd name="adj" fmla="val 11111"/>
             </a:avLst>
           </a:prstGeom>
           <a:solidFill>
-            <a:srgbClr val="FFFFFF"/>
-          </a:solidFill>
-          <a:ln w="15240">
+            <a:srgbClr val="EEF3EA"/>
+          </a:solidFill>
+          <a:ln w="17780">
             <a:solidFill>
               <a:srgbClr val="2C5F2D"/>
             </a:solidFill>
@@ -2243,14 +1917,34 @@
       </p:sp>
       <p:sp>
         <p:nvSpPr>
-          <p:cNvPr id="23" name="Text 21"/>
-          <p:cNvSpPr/>
-          <p:nvPr/>
-        </p:nvSpPr>
-        <p:spPr>
-          <a:xfrm>
-            <a:off x="8092440" y="2907792"/>
-            <a:ext cx="1554480" cy="457200"/>
+          <p:cNvPr id="14" name="Shape 12"/>
+          <p:cNvSpPr/>
+          <p:nvPr/>
+        </p:nvSpPr>
+        <p:spPr>
+          <a:xfrm>
+            <a:off x="4193896" y="3236976"/>
+            <a:ext cx="164592" cy="164592"/>
+          </a:xfrm>
+          <a:prstGeom prst="ellipse">
+            <a:avLst/>
+          </a:prstGeom>
+          <a:solidFill>
+            <a:srgbClr val="2C5F2D"/>
+          </a:solidFill>
+          <a:ln/>
+        </p:spPr>
+      </p:sp>
+      <p:sp>
+        <p:nvSpPr>
+          <p:cNvPr id="15" name="Text 13"/>
+          <p:cNvSpPr/>
+          <p:nvPr/>
+        </p:nvSpPr>
+        <p:spPr>
+          <a:xfrm>
+            <a:off x="4495648" y="2990088"/>
+            <a:ext cx="2194560" cy="658368"/>
           </a:xfrm>
           <a:prstGeom prst="rect">
             <a:avLst/>
@@ -2262,11 +1956,11 @@
           <a:bodyPr wrap="square" lIns="0" tIns="0" rIns="0" bIns="0" rtlCol="0" anchor="ctr"/>
           <a:lstStyle/>
           <a:p>
-            <a:pPr algn="ctr" indent="0" marL="0">
-              <a:buNone/>
-            </a:pPr>
-            <a:r>
-              <a:rPr lang="en-US" sz="1250" b="1" dirty="0">
+            <a:pPr indent="0" marL="0">
+              <a:buNone/>
+            </a:pPr>
+            <a:r>
+              <a:rPr lang="en-US" sz="1350" b="1" dirty="0">
                 <a:solidFill>
                   <a:srgbClr val="1B2418"/>
                 </a:solidFill>
@@ -2274,22 +1968,22 @@
                 <a:ea typeface="Calibri" pitchFamily="34" charset="-122"/>
                 <a:cs typeface="Calibri" pitchFamily="34" charset="-120"/>
               </a:rPr>
-              <a:t>DynamoDB</a:t>
-            </a:r>
-            <a:endParaRPr lang="en-US" sz="1250" dirty="0"/>
-          </a:p>
-        </p:txBody>
-      </p:sp>
-      <p:sp>
-        <p:nvSpPr>
-          <p:cNvPr id="24" name="Text 22"/>
-          <p:cNvSpPr/>
-          <p:nvPr/>
-        </p:nvSpPr>
-        <p:spPr>
-          <a:xfrm>
-            <a:off x="8119872" y="3401568"/>
-            <a:ext cx="1499616" cy="457200"/>
+              <a:t>Amazon SQS</a:t>
+            </a:r>
+            <a:endParaRPr lang="en-US" sz="1350" dirty="0"/>
+          </a:p>
+        </p:txBody>
+      </p:sp>
+      <p:sp>
+        <p:nvSpPr>
+          <p:cNvPr id="16" name="Text 14"/>
+          <p:cNvSpPr/>
+          <p:nvPr/>
+        </p:nvSpPr>
+        <p:spPr>
+          <a:xfrm>
+            <a:off x="6644488" y="2990088"/>
+            <a:ext cx="1463040" cy="658368"/>
           </a:xfrm>
           <a:prstGeom prst="rect">
             <a:avLst/>
@@ -2301,11 +1995,11 @@
           <a:bodyPr wrap="square" lIns="0" tIns="0" rIns="0" bIns="0" rtlCol="0" anchor="ctr"/>
           <a:lstStyle/>
           <a:p>
-            <a:pPr algn="ctr" indent="0" marL="0">
-              <a:buNone/>
-            </a:pPr>
-            <a:r>
-              <a:rPr lang="en-US" sz="900" dirty="0">
+            <a:pPr algn="r" indent="0" marL="0">
+              <a:buNone/>
+            </a:pPr>
+            <a:r>
+              <a:rPr lang="en-US" sz="950" dirty="0">
                 <a:solidFill>
                   <a:srgbClr val="5F6E55"/>
                 </a:solidFill>
@@ -2313,28 +2007,28 @@
                 <a:ea typeface="Calibri" pitchFamily="34" charset="-122"/>
                 <a:cs typeface="Calibri" pitchFamily="34" charset="-120"/>
               </a:rPr>
-              <a:t>window history</a:t>
-            </a:r>
-            <a:endParaRPr lang="en-US" sz="900" dirty="0"/>
-          </a:p>
-        </p:txBody>
-      </p:sp>
-      <p:sp>
-        <p:nvSpPr>
-          <p:cNvPr id="25" name="Shape 23"/>
-          <p:cNvSpPr/>
-          <p:nvPr/>
-        </p:nvSpPr>
-        <p:spPr>
-          <a:xfrm>
-            <a:off x="9610344" y="3337560"/>
-            <a:ext cx="164592" cy="0"/>
+              <a:t>batched sends</a:t>
+            </a:r>
+            <a:endParaRPr lang="en-US" sz="950" dirty="0"/>
+          </a:p>
+        </p:txBody>
+      </p:sp>
+      <p:sp>
+        <p:nvSpPr>
+          <p:cNvPr id="17" name="Shape 15"/>
+          <p:cNvSpPr/>
+          <p:nvPr/>
+        </p:nvSpPr>
+        <p:spPr>
+          <a:xfrm>
+            <a:off x="6095848" y="3648456"/>
+            <a:ext cx="0" cy="219456"/>
           </a:xfrm>
           <a:prstGeom prst="line">
             <a:avLst/>
           </a:prstGeom>
           <a:noFill/>
-          <a:ln w="20320">
+          <a:ln w="25400">
             <a:solidFill>
               <a:srgbClr val="6A9A52"/>
             </a:solidFill>
@@ -2345,24 +2039,322 @@
       </p:sp>
       <p:sp>
         <p:nvSpPr>
-          <p:cNvPr id="26" name="Shape 24"/>
-          <p:cNvSpPr/>
-          <p:nvPr/>
-        </p:nvSpPr>
-        <p:spPr>
-          <a:xfrm>
-            <a:off x="9784080" y="2651760"/>
-            <a:ext cx="1463040" cy="1371600"/>
+          <p:cNvPr id="18" name="Shape 16"/>
+          <p:cNvSpPr/>
+          <p:nvPr/>
+        </p:nvSpPr>
+        <p:spPr>
+          <a:xfrm>
+            <a:off x="3992728" y="3867912"/>
+            <a:ext cx="4206240" cy="658368"/>
           </a:xfrm>
           <a:prstGeom prst="roundRect">
             <a:avLst>
-              <a:gd name="adj" fmla="val 5333"/>
+              <a:gd name="adj" fmla="val 11111"/>
             </a:avLst>
           </a:prstGeom>
           <a:solidFill>
-            <a:srgbClr val="FFFFFF"/>
-          </a:solidFill>
-          <a:ln w="15240">
+            <a:srgbClr val="EEF3EA"/>
+          </a:solidFill>
+          <a:ln w="17780">
+            <a:solidFill>
+              <a:srgbClr val="2C5F2D"/>
+            </a:solidFill>
+            <a:prstDash val="solid"/>
+          </a:ln>
+        </p:spPr>
+      </p:sp>
+      <p:sp>
+        <p:nvSpPr>
+          <p:cNvPr id="19" name="Shape 17"/>
+          <p:cNvSpPr/>
+          <p:nvPr/>
+        </p:nvSpPr>
+        <p:spPr>
+          <a:xfrm>
+            <a:off x="4193896" y="4114800"/>
+            <a:ext cx="164592" cy="164592"/>
+          </a:xfrm>
+          <a:prstGeom prst="ellipse">
+            <a:avLst/>
+          </a:prstGeom>
+          <a:solidFill>
+            <a:srgbClr val="2C5F2D"/>
+          </a:solidFill>
+          <a:ln/>
+        </p:spPr>
+      </p:sp>
+      <p:sp>
+        <p:nvSpPr>
+          <p:cNvPr id="20" name="Text 18"/>
+          <p:cNvSpPr/>
+          <p:nvPr/>
+        </p:nvSpPr>
+        <p:spPr>
+          <a:xfrm>
+            <a:off x="4495648" y="3867912"/>
+            <a:ext cx="2194560" cy="658368"/>
+          </a:xfrm>
+          <a:prstGeom prst="rect">
+            <a:avLst/>
+          </a:prstGeom>
+          <a:noFill/>
+          <a:ln/>
+        </p:spPr>
+        <p:txBody>
+          <a:bodyPr wrap="square" lIns="0" tIns="0" rIns="0" bIns="0" rtlCol="0" anchor="ctr"/>
+          <a:lstStyle/>
+          <a:p>
+            <a:pPr indent="0" marL="0">
+              <a:buNone/>
+            </a:pPr>
+            <a:r>
+              <a:rPr lang="en-US" sz="1350" b="1" dirty="0">
+                <a:solidFill>
+                  <a:srgbClr val="1B2418"/>
+                </a:solidFill>
+                <a:latin typeface="Calibri" pitchFamily="34" charset="0"/>
+                <a:ea typeface="Calibri" pitchFamily="34" charset="-122"/>
+                <a:cs typeface="Calibri" pitchFamily="34" charset="-120"/>
+              </a:rPr>
+              <a:t>AWS Lambda</a:t>
+            </a:r>
+            <a:endParaRPr lang="en-US" sz="1350" dirty="0"/>
+          </a:p>
+        </p:txBody>
+      </p:sp>
+      <p:sp>
+        <p:nvSpPr>
+          <p:cNvPr id="21" name="Text 19"/>
+          <p:cNvSpPr/>
+          <p:nvPr/>
+        </p:nvSpPr>
+        <p:spPr>
+          <a:xfrm>
+            <a:off x="6644488" y="3867912"/>
+            <a:ext cx="1463040" cy="658368"/>
+          </a:xfrm>
+          <a:prstGeom prst="rect">
+            <a:avLst/>
+          </a:prstGeom>
+          <a:noFill/>
+          <a:ln/>
+        </p:spPr>
+        <p:txBody>
+          <a:bodyPr wrap="square" lIns="0" tIns="0" rIns="0" bIns="0" rtlCol="0" anchor="ctr"/>
+          <a:lstStyle/>
+          <a:p>
+            <a:pPr algn="r" indent="0" marL="0">
+              <a:buNone/>
+            </a:pPr>
+            <a:r>
+              <a:rPr lang="en-US" sz="950" dirty="0">
+                <a:solidFill>
+                  <a:srgbClr val="5F6E55"/>
+                </a:solidFill>
+                <a:latin typeface="Calibri" pitchFamily="34" charset="0"/>
+                <a:ea typeface="Calibri" pitchFamily="34" charset="-122"/>
+                <a:cs typeface="Calibri" pitchFamily="34" charset="-120"/>
+              </a:rPr>
+              <a:t>nodejs20 ingest</a:t>
+            </a:r>
+            <a:endParaRPr lang="en-US" sz="950" dirty="0"/>
+          </a:p>
+        </p:txBody>
+      </p:sp>
+      <p:sp>
+        <p:nvSpPr>
+          <p:cNvPr id="22" name="Shape 20"/>
+          <p:cNvSpPr/>
+          <p:nvPr/>
+        </p:nvSpPr>
+        <p:spPr>
+          <a:xfrm>
+            <a:off x="6095848" y="4526280"/>
+            <a:ext cx="0" cy="219456"/>
+          </a:xfrm>
+          <a:prstGeom prst="line">
+            <a:avLst/>
+          </a:prstGeom>
+          <a:noFill/>
+          <a:ln w="25400">
+            <a:solidFill>
+              <a:srgbClr val="6A9A52"/>
+            </a:solidFill>
+            <a:prstDash val="solid"/>
+            <a:tailEnd type="triangle"/>
+          </a:ln>
+        </p:spPr>
+      </p:sp>
+      <p:sp>
+        <p:nvSpPr>
+          <p:cNvPr id="23" name="Shape 21"/>
+          <p:cNvSpPr/>
+          <p:nvPr/>
+        </p:nvSpPr>
+        <p:spPr>
+          <a:xfrm>
+            <a:off x="3992728" y="4745736"/>
+            <a:ext cx="4206240" cy="658368"/>
+          </a:xfrm>
+          <a:prstGeom prst="roundRect">
+            <a:avLst>
+              <a:gd name="adj" fmla="val 11111"/>
+            </a:avLst>
+          </a:prstGeom>
+          <a:solidFill>
+            <a:srgbClr val="EEF3EA"/>
+          </a:solidFill>
+          <a:ln w="17780">
+            <a:solidFill>
+              <a:srgbClr val="2C5F2D"/>
+            </a:solidFill>
+            <a:prstDash val="solid"/>
+          </a:ln>
+        </p:spPr>
+      </p:sp>
+      <p:sp>
+        <p:nvSpPr>
+          <p:cNvPr id="24" name="Shape 22"/>
+          <p:cNvSpPr/>
+          <p:nvPr/>
+        </p:nvSpPr>
+        <p:spPr>
+          <a:xfrm>
+            <a:off x="4193896" y="4992624"/>
+            <a:ext cx="164592" cy="164592"/>
+          </a:xfrm>
+          <a:prstGeom prst="ellipse">
+            <a:avLst/>
+          </a:prstGeom>
+          <a:solidFill>
+            <a:srgbClr val="2C5F2D"/>
+          </a:solidFill>
+          <a:ln/>
+        </p:spPr>
+      </p:sp>
+      <p:sp>
+        <p:nvSpPr>
+          <p:cNvPr id="25" name="Text 23"/>
+          <p:cNvSpPr/>
+          <p:nvPr/>
+        </p:nvSpPr>
+        <p:spPr>
+          <a:xfrm>
+            <a:off x="4495648" y="4745736"/>
+            <a:ext cx="2194560" cy="658368"/>
+          </a:xfrm>
+          <a:prstGeom prst="rect">
+            <a:avLst/>
+          </a:prstGeom>
+          <a:noFill/>
+          <a:ln/>
+        </p:spPr>
+        <p:txBody>
+          <a:bodyPr wrap="square" lIns="0" tIns="0" rIns="0" bIns="0" rtlCol="0" anchor="ctr"/>
+          <a:lstStyle/>
+          <a:p>
+            <a:pPr indent="0" marL="0">
+              <a:buNone/>
+            </a:pPr>
+            <a:r>
+              <a:rPr lang="en-US" sz="1350" b="1" dirty="0">
+                <a:solidFill>
+                  <a:srgbClr val="1B2418"/>
+                </a:solidFill>
+                <a:latin typeface="Calibri" pitchFamily="34" charset="0"/>
+                <a:ea typeface="Calibri" pitchFamily="34" charset="-122"/>
+                <a:cs typeface="Calibri" pitchFamily="34" charset="-120"/>
+              </a:rPr>
+              <a:t>DynamoDB</a:t>
+            </a:r>
+            <a:endParaRPr lang="en-US" sz="1350" dirty="0"/>
+          </a:p>
+        </p:txBody>
+      </p:sp>
+      <p:sp>
+        <p:nvSpPr>
+          <p:cNvPr id="26" name="Text 24"/>
+          <p:cNvSpPr/>
+          <p:nvPr/>
+        </p:nvSpPr>
+        <p:spPr>
+          <a:xfrm>
+            <a:off x="6644488" y="4745736"/>
+            <a:ext cx="1463040" cy="658368"/>
+          </a:xfrm>
+          <a:prstGeom prst="rect">
+            <a:avLst/>
+          </a:prstGeom>
+          <a:noFill/>
+          <a:ln/>
+        </p:spPr>
+        <p:txBody>
+          <a:bodyPr wrap="square" lIns="0" tIns="0" rIns="0" bIns="0" rtlCol="0" anchor="ctr"/>
+          <a:lstStyle/>
+          <a:p>
+            <a:pPr algn="r" indent="0" marL="0">
+              <a:buNone/>
+            </a:pPr>
+            <a:r>
+              <a:rPr lang="en-US" sz="950" dirty="0">
+                <a:solidFill>
+                  <a:srgbClr val="5F6E55"/>
+                </a:solidFill>
+                <a:latin typeface="Calibri" pitchFamily="34" charset="0"/>
+                <a:ea typeface="Calibri" pitchFamily="34" charset="-122"/>
+                <a:cs typeface="Calibri" pitchFamily="34" charset="-120"/>
+              </a:rPr>
+              <a:t>window history</a:t>
+            </a:r>
+            <a:endParaRPr lang="en-US" sz="950" dirty="0"/>
+          </a:p>
+        </p:txBody>
+      </p:sp>
+      <p:sp>
+        <p:nvSpPr>
+          <p:cNvPr id="27" name="Shape 25"/>
+          <p:cNvSpPr/>
+          <p:nvPr/>
+        </p:nvSpPr>
+        <p:spPr>
+          <a:xfrm>
+            <a:off x="6095848" y="5404104"/>
+            <a:ext cx="0" cy="219456"/>
+          </a:xfrm>
+          <a:prstGeom prst="line">
+            <a:avLst/>
+          </a:prstGeom>
+          <a:noFill/>
+          <a:ln w="25400">
+            <a:solidFill>
+              <a:srgbClr val="6A9A52"/>
+            </a:solidFill>
+            <a:prstDash val="solid"/>
+            <a:tailEnd type="triangle"/>
+          </a:ln>
+        </p:spPr>
+      </p:sp>
+      <p:sp>
+        <p:nvSpPr>
+          <p:cNvPr id="28" name="Shape 26"/>
+          <p:cNvSpPr/>
+          <p:nvPr/>
+        </p:nvSpPr>
+        <p:spPr>
+          <a:xfrm>
+            <a:off x="3992728" y="5623560"/>
+            <a:ext cx="4206240" cy="658368"/>
+          </a:xfrm>
+          <a:prstGeom prst="roundRect">
+            <a:avLst>
+              <a:gd name="adj" fmla="val 11111"/>
+            </a:avLst>
+          </a:prstGeom>
+          <a:solidFill>
+            <a:srgbClr val="EEF3EA"/>
+          </a:solidFill>
+          <a:ln w="17780">
             <a:solidFill>
               <a:srgbClr val="3F7C3F"/>
             </a:solidFill>
@@ -2372,14 +2364,34 @@
       </p:sp>
       <p:sp>
         <p:nvSpPr>
-          <p:cNvPr id="27" name="Text 25"/>
-          <p:cNvSpPr/>
-          <p:nvPr/>
-        </p:nvSpPr>
-        <p:spPr>
-          <a:xfrm>
-            <a:off x="9738360" y="2907792"/>
-            <a:ext cx="1554480" cy="457200"/>
+          <p:cNvPr id="29" name="Shape 27"/>
+          <p:cNvSpPr/>
+          <p:nvPr/>
+        </p:nvSpPr>
+        <p:spPr>
+          <a:xfrm>
+            <a:off x="4193896" y="5870448"/>
+            <a:ext cx="164592" cy="164592"/>
+          </a:xfrm>
+          <a:prstGeom prst="ellipse">
+            <a:avLst/>
+          </a:prstGeom>
+          <a:solidFill>
+            <a:srgbClr val="3F7C3F"/>
+          </a:solidFill>
+          <a:ln/>
+        </p:spPr>
+      </p:sp>
+      <p:sp>
+        <p:nvSpPr>
+          <p:cNvPr id="30" name="Text 28"/>
+          <p:cNvSpPr/>
+          <p:nvPr/>
+        </p:nvSpPr>
+        <p:spPr>
+          <a:xfrm>
+            <a:off x="4495648" y="5623560"/>
+            <a:ext cx="2194560" cy="658368"/>
           </a:xfrm>
           <a:prstGeom prst="rect">
             <a:avLst/>
@@ -2391,11 +2403,11 @@
           <a:bodyPr wrap="square" lIns="0" tIns="0" rIns="0" bIns="0" rtlCol="0" anchor="ctr"/>
           <a:lstStyle/>
           <a:p>
-            <a:pPr algn="ctr" indent="0" marL="0">
-              <a:buNone/>
-            </a:pPr>
-            <a:r>
-              <a:rPr lang="en-US" sz="1250" b="1" dirty="0">
+            <a:pPr indent="0" marL="0">
+              <a:buNone/>
+            </a:pPr>
+            <a:r>
+              <a:rPr lang="en-US" sz="1350" b="1" dirty="0">
                 <a:solidFill>
                   <a:srgbClr val="1B2418"/>
                 </a:solidFill>
@@ -2405,20 +2417,20 @@
               </a:rPr>
               <a:t>API GW + S3</a:t>
             </a:r>
-            <a:endParaRPr lang="en-US" sz="1250" dirty="0"/>
-          </a:p>
-        </p:txBody>
-      </p:sp>
-      <p:sp>
-        <p:nvSpPr>
-          <p:cNvPr id="28" name="Text 26"/>
-          <p:cNvSpPr/>
-          <p:nvPr/>
-        </p:nvSpPr>
-        <p:spPr>
-          <a:xfrm>
-            <a:off x="9765792" y="3401568"/>
-            <a:ext cx="1499616" cy="457200"/>
+            <a:endParaRPr lang="en-US" sz="1350" dirty="0"/>
+          </a:p>
+        </p:txBody>
+      </p:sp>
+      <p:sp>
+        <p:nvSpPr>
+          <p:cNvPr id="31" name="Text 29"/>
+          <p:cNvSpPr/>
+          <p:nvPr/>
+        </p:nvSpPr>
+        <p:spPr>
+          <a:xfrm>
+            <a:off x="6644488" y="5623560"/>
+            <a:ext cx="1463040" cy="658368"/>
           </a:xfrm>
           <a:prstGeom prst="rect">
             <a:avLst/>
@@ -2430,11 +2442,11 @@
           <a:bodyPr wrap="square" lIns="0" tIns="0" rIns="0" bIns="0" rtlCol="0" anchor="ctr"/>
           <a:lstStyle/>
           <a:p>
-            <a:pPr algn="ctr" indent="0" marL="0">
-              <a:buNone/>
-            </a:pPr>
-            <a:r>
-              <a:rPr lang="en-US" sz="900" dirty="0">
+            <a:pPr algn="r" indent="0" marL="0">
+              <a:buNone/>
+            </a:pPr>
+            <a:r>
+              <a:rPr lang="en-US" sz="950" dirty="0">
                 <a:solidFill>
                   <a:srgbClr val="5F6E55"/>
                 </a:solidFill>
@@ -2444,20 +2456,20 @@
               </a:rPr>
               <a:t>0–4 risk dial</a:t>
             </a:r>
-            <a:endParaRPr lang="en-US" sz="900" dirty="0"/>
-          </a:p>
-        </p:txBody>
-      </p:sp>
-      <p:sp>
-        <p:nvSpPr>
-          <p:cNvPr id="29" name="Text 27"/>
-          <p:cNvSpPr/>
-          <p:nvPr/>
-        </p:nvSpPr>
-        <p:spPr>
-          <a:xfrm>
-            <a:off x="640080" y="5257800"/>
-            <a:ext cx="10972800" cy="731520"/>
+            <a:endParaRPr lang="en-US" sz="950" dirty="0"/>
+          </a:p>
+        </p:txBody>
+      </p:sp>
+      <p:sp>
+        <p:nvSpPr>
+          <p:cNvPr id="32" name="Text 30"/>
+          <p:cNvSpPr/>
+          <p:nvPr/>
+        </p:nvSpPr>
+        <p:spPr>
+          <a:xfrm>
+            <a:off x="2438248" y="1234440"/>
+            <a:ext cx="1371600" cy="365760"/>
           </a:xfrm>
           <a:prstGeom prst="rect">
             <a:avLst/>
@@ -2469,7 +2481,85 @@
           <a:bodyPr wrap="square" rtlCol="0" anchor="ctr"/>
           <a:lstStyle/>
           <a:p>
-            <a:pPr algn="ctr" indent="0" marL="0">
+            <a:pPr algn="r" indent="0" marL="0">
+              <a:buNone/>
+            </a:pPr>
+            <a:r>
+              <a:rPr lang="en-US" sz="1100" b="1" spc="200" kern="0" dirty="0">
+                <a:solidFill>
+                  <a:srgbClr val="6A9A52"/>
+                </a:solidFill>
+                <a:latin typeface="Calibri" pitchFamily="34" charset="0"/>
+                <a:ea typeface="Calibri" pitchFamily="34" charset="-122"/>
+                <a:cs typeface="Calibri" pitchFamily="34" charset="-120"/>
+              </a:rPr>
+              <a:t>EDGE</a:t>
+            </a:r>
+            <a:endParaRPr lang="en-US" sz="1100" dirty="0"/>
+          </a:p>
+        </p:txBody>
+      </p:sp>
+      <p:sp>
+        <p:nvSpPr>
+          <p:cNvPr id="33" name="Text 31"/>
+          <p:cNvSpPr/>
+          <p:nvPr/>
+        </p:nvSpPr>
+        <p:spPr>
+          <a:xfrm>
+            <a:off x="2438248" y="2990088"/>
+            <a:ext cx="1371600" cy="365760"/>
+          </a:xfrm>
+          <a:prstGeom prst="rect">
+            <a:avLst/>
+          </a:prstGeom>
+          <a:noFill/>
+          <a:ln/>
+        </p:spPr>
+        <p:txBody>
+          <a:bodyPr wrap="square" rtlCol="0" anchor="ctr"/>
+          <a:lstStyle/>
+          <a:p>
+            <a:pPr algn="r" indent="0" marL="0">
+              <a:buNone/>
+            </a:pPr>
+            <a:r>
+              <a:rPr lang="en-US" sz="1100" b="1" spc="200" kern="0" dirty="0">
+                <a:solidFill>
+                  <a:srgbClr val="2C5F2D"/>
+                </a:solidFill>
+                <a:latin typeface="Calibri" pitchFamily="34" charset="0"/>
+                <a:ea typeface="Calibri" pitchFamily="34" charset="-122"/>
+                <a:cs typeface="Calibri" pitchFamily="34" charset="-120"/>
+              </a:rPr>
+              <a:t>CLOUD</a:t>
+            </a:r>
+            <a:endParaRPr lang="en-US" sz="1100" dirty="0"/>
+          </a:p>
+        </p:txBody>
+      </p:sp>
+      <p:sp>
+        <p:nvSpPr>
+          <p:cNvPr id="34" name="Text 32"/>
+          <p:cNvSpPr/>
+          <p:nvPr/>
+        </p:nvSpPr>
+        <p:spPr>
+          <a:xfrm>
+            <a:off x="8656168" y="2743200"/>
+            <a:ext cx="3291840" cy="2194560"/>
+          </a:xfrm>
+          <a:prstGeom prst="rect">
+            <a:avLst/>
+          </a:prstGeom>
+          <a:noFill/>
+          <a:ln/>
+        </p:spPr>
+        <p:txBody>
+          <a:bodyPr wrap="square" rtlCol="0" anchor="ctr"/>
+          <a:lstStyle/>
+          <a:p>
+            <a:pPr indent="0" marL="0">
               <a:buNone/>
             </a:pPr>
             <a:r>
@@ -3135,12 +3225,12 @@
         </p:nvSpPr>
         <p:spPr>
           <a:xfrm>
-            <a:off x="640080" y="1874520"/>
-            <a:ext cx="4937760" cy="4160520"/>
+            <a:off x="731520" y="1920240"/>
+            <a:ext cx="10698480" cy="1965960"/>
           </a:xfrm>
           <a:prstGeom prst="roundRect">
             <a:avLst>
-              <a:gd name="adj" fmla="val 2198"/>
+              <a:gd name="adj" fmla="val 4651"/>
             </a:avLst>
           </a:prstGeom>
           <a:solidFill>
@@ -3162,7 +3252,7 @@
         </p:nvSpPr>
         <p:spPr>
           <a:xfrm>
-            <a:off x="960120" y="2103120"/>
+            <a:off x="1005840" y="2103120"/>
             <a:ext cx="3657600" cy="457200"/>
           </a:xfrm>
           <a:prstGeom prst="rect">
@@ -3201,8 +3291,8 @@
         </p:nvSpPr>
         <p:spPr>
           <a:xfrm>
-            <a:off x="960120" y="2651760"/>
-            <a:ext cx="4343400" cy="3200400"/>
+            <a:off x="1005840" y="2578608"/>
+            <a:ext cx="9966960" cy="1188720"/>
           </a:xfrm>
           <a:prstGeom prst="rect">
             <a:avLst/>
@@ -3216,12 +3306,12 @@
           <a:p>
             <a:pPr indent="0" marL="0">
               <a:lnSpc>
-                <a:spcPct val="112000"/>
+                <a:spcPct val="105000"/>
               </a:lnSpc>
               <a:buNone/>
             </a:pPr>
             <a:r>
-              <a:rPr lang="en-US" sz="1350" dirty="0">
+              <a:rPr lang="en-US" sz="1300" dirty="0">
                 <a:solidFill>
                   <a:srgbClr val="1B2418"/>
                 </a:solidFill>
@@ -3231,7 +3321,7 @@
               </a:rPr>
               <a:t>Locally the pipeline signs its queue and database calls with the emulator's dummy credentials, and it decided when to use them by checking whether an AWS access-key variable was present. But real AWS injects that exact variable into every function it runs — so in production every call would be signed with incomplete credentials and rejected. All 95 tests stayed green; nothing could fail until the first real deployment.</a:t>
             </a:r>
-            <a:endParaRPr lang="en-US" sz="1350" dirty="0"/>
+            <a:endParaRPr lang="en-US" sz="1300" dirty="0"/>
           </a:p>
         </p:txBody>
       </p:sp>
@@ -3243,12 +3333,12 @@
         </p:nvSpPr>
         <p:spPr>
           <a:xfrm>
-            <a:off x="6611112" y="1874520"/>
-            <a:ext cx="4937760" cy="4160520"/>
+            <a:off x="731520" y="4041648"/>
+            <a:ext cx="10698480" cy="1965960"/>
           </a:xfrm>
           <a:prstGeom prst="roundRect">
             <a:avLst>
-              <a:gd name="adj" fmla="val 2198"/>
+              <a:gd name="adj" fmla="val 4651"/>
             </a:avLst>
           </a:prstGeom>
           <a:solidFill>
@@ -3270,7 +3360,7 @@
         </p:nvSpPr>
         <p:spPr>
           <a:xfrm>
-            <a:off x="6931152" y="2103120"/>
+            <a:off x="1005840" y="4224528"/>
             <a:ext cx="3657600" cy="457200"/>
           </a:xfrm>
           <a:prstGeom prst="rect">
@@ -3309,8 +3399,8 @@
         </p:nvSpPr>
         <p:spPr>
           <a:xfrm>
-            <a:off x="6931152" y="2651760"/>
-            <a:ext cx="4343400" cy="3200400"/>
+            <a:off x="1005840" y="4700016"/>
+            <a:ext cx="9966960" cy="1188720"/>
           </a:xfrm>
           <a:prstGeom prst="rect">
             <a:avLst/>
@@ -3324,12 +3414,12 @@
           <a:p>
             <a:pPr indent="0" marL="0">
               <a:lnSpc>
-                <a:spcPct val="112000"/>
+                <a:spcPct val="105000"/>
               </a:lnSpc>
               <a:buNone/>
             </a:pPr>
             <a:r>
-              <a:rPr lang="en-US" sz="1350" dirty="0">
+              <a:rPr lang="en-US" sz="1300" dirty="0">
                 <a:solidFill>
                   <a:srgbClr val="1B2418"/>
                 </a:solidFill>
@@ -3339,29 +3429,9 @@
               </a:rPr>
               <a:t>Gate on a signal that only exists locally: the emulator's endpoint address. On real AWS it is absent, so the platform's own credentials take over automatically. New tests now pin that behaviour down in both profiles.</a:t>
             </a:r>
-            <a:endParaRPr lang="en-US" sz="1350" dirty="0"/>
-          </a:p>
-        </p:txBody>
-      </p:sp>
-      <p:sp>
-        <p:nvSpPr>
-          <p:cNvPr id="9" name="Shape 7"/>
-          <p:cNvSpPr/>
-          <p:nvPr/>
-        </p:nvSpPr>
-        <p:spPr>
-          <a:xfrm>
-            <a:off x="5669280" y="3703320"/>
-            <a:ext cx="841248" cy="512064"/>
-          </a:xfrm>
-          <a:prstGeom prst="rightArrow">
-            <a:avLst/>
-          </a:prstGeom>
-          <a:solidFill>
-            <a:srgbClr val="2C5F2D"/>
-          </a:solidFill>
-          <a:ln/>
-        </p:spPr>
+            <a:endParaRPr lang="en-US" sz="1300" dirty="0"/>
+          </a:p>
+        </p:txBody>
       </p:sp>
     </p:spTree>
   </p:cSld>

--- a/ppt/DeekondaRakshan_X25180754_wildfire-forest-monitoring.pptx
+++ b/ppt/DeekondaRakshan_X25180754_wildfire-forest-monitoring.pptx
@@ -2689,59 +2689,24 @@
       </p:sp>
       <p:sp>
         <p:nvSpPr>
-          <p:cNvPr id="4" name="Text 2"/>
-          <p:cNvSpPr/>
-          <p:nvPr/>
-        </p:nvSpPr>
-        <p:spPr>
-          <a:xfrm>
-            <a:off x="640080" y="1737360"/>
-            <a:ext cx="1097280" cy="1097280"/>
-          </a:xfrm>
-          <a:prstGeom prst="rect">
-            <a:avLst/>
-          </a:prstGeom>
-          <a:noFill/>
-          <a:ln/>
-        </p:spPr>
-        <p:txBody>
-          <a:bodyPr wrap="square" lIns="0" tIns="0" rIns="0" bIns="0" rtlCol="0" anchor="ctr"/>
-          <a:lstStyle/>
-          <a:p>
-            <a:pPr indent="0" marL="0">
-              <a:buNone/>
-            </a:pPr>
-            <a:r>
-              <a:rPr lang="en-US" sz="5400" b="1" dirty="0">
-                <a:solidFill>
-                  <a:srgbClr val="EEF3EA"/>
-                </a:solidFill>
-                <a:latin typeface="Bookman Old Style" pitchFamily="34" charset="0"/>
-                <a:ea typeface="Bookman Old Style" pitchFamily="34" charset="-122"/>
-                <a:cs typeface="Bookman Old Style" pitchFamily="34" charset="-120"/>
-              </a:rPr>
-              <a:t>1</a:t>
-            </a:r>
-            <a:endParaRPr lang="en-US" sz="5400" dirty="0"/>
-          </a:p>
-        </p:txBody>
-      </p:sp>
-      <p:sp>
-        <p:nvSpPr>
-          <p:cNvPr id="5" name="Shape 3"/>
-          <p:cNvSpPr/>
-          <p:nvPr/>
-        </p:nvSpPr>
-        <p:spPr>
-          <a:xfrm>
-            <a:off x="1828800" y="1920240"/>
-            <a:ext cx="0" cy="1051560"/>
-          </a:xfrm>
-          <a:prstGeom prst="line">
-            <a:avLst/>
-          </a:prstGeom>
-          <a:noFill/>
-          <a:ln w="25400">
+          <p:cNvPr id="4" name="Shape 2"/>
+          <p:cNvSpPr/>
+          <p:nvPr/>
+        </p:nvSpPr>
+        <p:spPr>
+          <a:xfrm>
+            <a:off x="640080" y="1828800"/>
+            <a:ext cx="10881360" cy="1371600"/>
+          </a:xfrm>
+          <a:prstGeom prst="roundRect">
+            <a:avLst>
+              <a:gd name="adj" fmla="val 6667"/>
+            </a:avLst>
+          </a:prstGeom>
+          <a:solidFill>
+            <a:srgbClr val="EEF3EA"/>
+          </a:solidFill>
+          <a:ln w="15240">
             <a:solidFill>
               <a:srgbClr val="3F7C3F"/>
             </a:solidFill>
@@ -2751,14 +2716,34 @@
       </p:sp>
       <p:sp>
         <p:nvSpPr>
+          <p:cNvPr id="5" name="Shape 3"/>
+          <p:cNvSpPr/>
+          <p:nvPr/>
+        </p:nvSpPr>
+        <p:spPr>
+          <a:xfrm>
+            <a:off x="960120" y="2203704"/>
+            <a:ext cx="621792" cy="621792"/>
+          </a:xfrm>
+          <a:prstGeom prst="ellipse">
+            <a:avLst/>
+          </a:prstGeom>
+          <a:solidFill>
+            <a:srgbClr val="2C5F2D"/>
+          </a:solidFill>
+          <a:ln/>
+        </p:spPr>
+      </p:sp>
+      <p:sp>
+        <p:nvSpPr>
           <p:cNvPr id="6" name="Text 4"/>
           <p:cNvSpPr/>
           <p:nvPr/>
         </p:nvSpPr>
         <p:spPr>
           <a:xfrm>
-            <a:off x="2057400" y="1874520"/>
-            <a:ext cx="9509760" cy="411480"/>
+            <a:off x="960120" y="2203704"/>
+            <a:ext cx="621792" cy="621792"/>
           </a:xfrm>
           <a:prstGeom prst="rect">
             <a:avLst/>
@@ -2770,11 +2755,50 @@
           <a:bodyPr wrap="square" lIns="0" tIns="0" rIns="0" bIns="0" rtlCol="0" anchor="ctr"/>
           <a:lstStyle/>
           <a:p>
+            <a:pPr algn="ctr" indent="0" marL="0">
+              <a:buNone/>
+            </a:pPr>
+            <a:r>
+              <a:rPr lang="en-US" sz="2200" b="1" dirty="0">
+                <a:solidFill>
+                  <a:srgbClr val="FFFFFF"/>
+                </a:solidFill>
+                <a:latin typeface="Bookman Old Style" pitchFamily="34" charset="0"/>
+                <a:ea typeface="Bookman Old Style" pitchFamily="34" charset="-122"/>
+                <a:cs typeface="Bookman Old Style" pitchFamily="34" charset="-120"/>
+              </a:rPr>
+              <a:t>1</a:t>
+            </a:r>
+            <a:endParaRPr lang="en-US" sz="2200" dirty="0"/>
+          </a:p>
+        </p:txBody>
+      </p:sp>
+      <p:sp>
+        <p:nvSpPr>
+          <p:cNvPr id="7" name="Text 5"/>
+          <p:cNvSpPr/>
+          <p:nvPr/>
+        </p:nvSpPr>
+        <p:spPr>
+          <a:xfrm>
+            <a:off x="1828800" y="2029968"/>
+            <a:ext cx="9418320" cy="411480"/>
+          </a:xfrm>
+          <a:prstGeom prst="rect">
+            <a:avLst/>
+          </a:prstGeom>
+          <a:noFill/>
+          <a:ln/>
+        </p:spPr>
+        <p:txBody>
+          <a:bodyPr wrap="square" lIns="0" tIns="0" rIns="0" bIns="0" rtlCol="0" anchor="ctr"/>
+          <a:lstStyle/>
+          <a:p>
             <a:pPr indent="0" marL="0">
               <a:buNone/>
             </a:pPr>
             <a:r>
-              <a:rPr lang="en-US" sz="1800" b="1" dirty="0">
+              <a:rPr lang="en-US" sz="1700" b="1" dirty="0">
                 <a:solidFill>
                   <a:srgbClr val="1B2418"/>
                 </a:solidFill>
@@ -2784,20 +2808,20 @@
               </a:rPr>
               <a:t>A 0-to-4 fire-risk dial per station</a:t>
             </a:r>
-            <a:endParaRPr lang="en-US" sz="1800" dirty="0"/>
-          </a:p>
-        </p:txBody>
-      </p:sp>
-      <p:sp>
-        <p:nvSpPr>
-          <p:cNvPr id="7" name="Text 5"/>
-          <p:cNvSpPr/>
-          <p:nvPr/>
-        </p:nvSpPr>
-        <p:spPr>
-          <a:xfrm>
-            <a:off x="2057400" y="2313432"/>
-            <a:ext cx="9509760" cy="822960"/>
+            <a:endParaRPr lang="en-US" sz="1700" dirty="0"/>
+          </a:p>
+        </p:txBody>
+      </p:sp>
+      <p:sp>
+        <p:nvSpPr>
+          <p:cNvPr id="8" name="Text 6"/>
+          <p:cNvSpPr/>
+          <p:nvPr/>
+        </p:nvSpPr>
+        <p:spPr>
+          <a:xfrm>
+            <a:off x="1828800" y="2450592"/>
+            <a:ext cx="9418320" cy="594360"/>
           </a:xfrm>
           <a:prstGeom prst="rect">
             <a:avLst/>
@@ -2810,10 +2834,13 @@
           <a:lstStyle/>
           <a:p>
             <a:pPr indent="0" marL="0">
-              <a:buNone/>
-            </a:pPr>
-            <a:r>
-              <a:rPr lang="en-US" sz="1350" dirty="0">
+              <a:lnSpc>
+                <a:spcPct val="105000"/>
+              </a:lnSpc>
+              <a:buNone/>
+            </a:pPr>
+            <a:r>
+              <a:rPr lang="en-US" sz="1300" dirty="0">
                 <a:solidFill>
                   <a:srgbClr val="5F6E55"/>
                 </a:solidFill>
@@ -2823,46 +2850,7 @@
               </a:rPr>
               <a:t>The dashboard grades each ranger station on read from earlier, lower thresholds — an escalation gradient ahead of any hard alarm.</a:t>
             </a:r>
-            <a:endParaRPr lang="en-US" sz="1350" dirty="0"/>
-          </a:p>
-        </p:txBody>
-      </p:sp>
-      <p:sp>
-        <p:nvSpPr>
-          <p:cNvPr id="8" name="Text 6"/>
-          <p:cNvSpPr/>
-          <p:nvPr/>
-        </p:nvSpPr>
-        <p:spPr>
-          <a:xfrm>
-            <a:off x="640080" y="3200400"/>
-            <a:ext cx="1097280" cy="1097280"/>
-          </a:xfrm>
-          <a:prstGeom prst="rect">
-            <a:avLst/>
-          </a:prstGeom>
-          <a:noFill/>
-          <a:ln/>
-        </p:spPr>
-        <p:txBody>
-          <a:bodyPr wrap="square" lIns="0" tIns="0" rIns="0" bIns="0" rtlCol="0" anchor="ctr"/>
-          <a:lstStyle/>
-          <a:p>
-            <a:pPr indent="0" marL="0">
-              <a:buNone/>
-            </a:pPr>
-            <a:r>
-              <a:rPr lang="en-US" sz="5400" b="1" dirty="0">
-                <a:solidFill>
-                  <a:srgbClr val="EEF3EA"/>
-                </a:solidFill>
-                <a:latin typeface="Bookman Old Style" pitchFamily="34" charset="0"/>
-                <a:ea typeface="Bookman Old Style" pitchFamily="34" charset="-122"/>
-                <a:cs typeface="Bookman Old Style" pitchFamily="34" charset="-120"/>
-              </a:rPr>
-              <a:t>2</a:t>
-            </a:r>
-            <a:endParaRPr lang="en-US" sz="5400" dirty="0"/>
+            <a:endParaRPr lang="en-US" sz="1300" dirty="0"/>
           </a:p>
         </p:txBody>
       </p:sp>
@@ -2874,14 +2862,18 @@
         </p:nvSpPr>
         <p:spPr>
           <a:xfrm>
-            <a:off x="1828800" y="3383280"/>
-            <a:ext cx="0" cy="1051560"/>
-          </a:xfrm>
-          <a:prstGeom prst="line">
-            <a:avLst/>
-          </a:prstGeom>
-          <a:noFill/>
-          <a:ln w="25400">
+            <a:off x="640080" y="3401568"/>
+            <a:ext cx="5303520" cy="2606040"/>
+          </a:xfrm>
+          <a:prstGeom prst="roundRect">
+            <a:avLst>
+              <a:gd name="adj" fmla="val 3509"/>
+            </a:avLst>
+          </a:prstGeom>
+          <a:solidFill>
+            <a:srgbClr val="EEF3EA"/>
+          </a:solidFill>
+          <a:ln w="15240">
             <a:solidFill>
               <a:srgbClr val="3F7C3F"/>
             </a:solidFill>
@@ -2891,14 +2883,34 @@
       </p:sp>
       <p:sp>
         <p:nvSpPr>
-          <p:cNvPr id="10" name="Text 8"/>
-          <p:cNvSpPr/>
-          <p:nvPr/>
-        </p:nvSpPr>
-        <p:spPr>
-          <a:xfrm>
-            <a:off x="2057400" y="3337560"/>
-            <a:ext cx="9509760" cy="411480"/>
+          <p:cNvPr id="10" name="Shape 8"/>
+          <p:cNvSpPr/>
+          <p:nvPr/>
+        </p:nvSpPr>
+        <p:spPr>
+          <a:xfrm>
+            <a:off x="914400" y="3675888"/>
+            <a:ext cx="603504" cy="603504"/>
+          </a:xfrm>
+          <a:prstGeom prst="ellipse">
+            <a:avLst/>
+          </a:prstGeom>
+          <a:solidFill>
+            <a:srgbClr val="2C5F2D"/>
+          </a:solidFill>
+          <a:ln/>
+        </p:spPr>
+      </p:sp>
+      <p:sp>
+        <p:nvSpPr>
+          <p:cNvPr id="11" name="Text 9"/>
+          <p:cNvSpPr/>
+          <p:nvPr/>
+        </p:nvSpPr>
+        <p:spPr>
+          <a:xfrm>
+            <a:off x="914400" y="3675888"/>
+            <a:ext cx="603504" cy="603504"/>
           </a:xfrm>
           <a:prstGeom prst="rect">
             <a:avLst/>
@@ -2910,11 +2922,50 @@
           <a:bodyPr wrap="square" lIns="0" tIns="0" rIns="0" bIns="0" rtlCol="0" anchor="ctr"/>
           <a:lstStyle/>
           <a:p>
+            <a:pPr algn="ctr" indent="0" marL="0">
+              <a:buNone/>
+            </a:pPr>
+            <a:r>
+              <a:rPr lang="en-US" sz="2200" b="1" dirty="0">
+                <a:solidFill>
+                  <a:srgbClr val="FFFFFF"/>
+                </a:solidFill>
+                <a:latin typeface="Bookman Old Style" pitchFamily="34" charset="0"/>
+                <a:ea typeface="Bookman Old Style" pitchFamily="34" charset="-122"/>
+                <a:cs typeface="Bookman Old Style" pitchFamily="34" charset="-120"/>
+              </a:rPr>
+              <a:t>2</a:t>
+            </a:r>
+            <a:endParaRPr lang="en-US" sz="2200" dirty="0"/>
+          </a:p>
+        </p:txBody>
+      </p:sp>
+      <p:sp>
+        <p:nvSpPr>
+          <p:cNvPr id="12" name="Text 10"/>
+          <p:cNvSpPr/>
+          <p:nvPr/>
+        </p:nvSpPr>
+        <p:spPr>
+          <a:xfrm>
+            <a:off x="914400" y="4425696"/>
+            <a:ext cx="4754880" cy="777240"/>
+          </a:xfrm>
+          <a:prstGeom prst="rect">
+            <a:avLst/>
+          </a:prstGeom>
+          <a:noFill/>
+          <a:ln/>
+        </p:spPr>
+        <p:txBody>
+          <a:bodyPr wrap="square" lIns="0" tIns="0" rIns="0" bIns="0" rtlCol="0" anchor="ctr"/>
+          <a:lstStyle/>
+          <a:p>
             <a:pPr indent="0" marL="0">
               <a:buNone/>
             </a:pPr>
             <a:r>
-              <a:rPr lang="en-US" sz="1800" b="1" dirty="0">
+              <a:rPr lang="en-US" sz="1600" b="1" dirty="0">
                 <a:solidFill>
                   <a:srgbClr val="1B2418"/>
                 </a:solidFill>
@@ -2924,20 +2975,20 @@
               </a:rPr>
               <a:t>A smoke-density trend per station</a:t>
             </a:r>
-            <a:endParaRPr lang="en-US" sz="1800" dirty="0"/>
-          </a:p>
-        </p:txBody>
-      </p:sp>
-      <p:sp>
-        <p:nvSpPr>
-          <p:cNvPr id="11" name="Text 9"/>
-          <p:cNvSpPr/>
-          <p:nvPr/>
-        </p:nvSpPr>
-        <p:spPr>
-          <a:xfrm>
-            <a:off x="2057400" y="3776472"/>
-            <a:ext cx="9509760" cy="822960"/>
+            <a:endParaRPr lang="en-US" sz="1600" dirty="0"/>
+          </a:p>
+        </p:txBody>
+      </p:sp>
+      <p:sp>
+        <p:nvSpPr>
+          <p:cNvPr id="13" name="Text 11"/>
+          <p:cNvSpPr/>
+          <p:nvPr/>
+        </p:nvSpPr>
+        <p:spPr>
+          <a:xfrm>
+            <a:off x="914400" y="5184648"/>
+            <a:ext cx="4754880" cy="640080"/>
           </a:xfrm>
           <a:prstGeom prst="rect">
             <a:avLst/>
@@ -2950,10 +3001,13 @@
           <a:lstStyle/>
           <a:p>
             <a:pPr indent="0" marL="0">
-              <a:buNone/>
-            </a:pPr>
-            <a:r>
-              <a:rPr lang="en-US" sz="1350" dirty="0">
+              <a:lnSpc>
+                <a:spcPct val="106000"/>
+              </a:lnSpc>
+              <a:buNone/>
+            </a:pPr>
+            <a:r>
+              <a:rPr lang="en-US" sz="1250" dirty="0">
                 <a:solidFill>
                   <a:srgbClr val="5F6E55"/>
                 </a:solidFill>
@@ -2963,65 +3017,30 @@
               </a:rPr>
               <a:t>Both stations' smoke charts run live, so a rising smoke plume is visible on the trend before it trips a hard alert.</a:t>
             </a:r>
-            <a:endParaRPr lang="en-US" sz="1350" dirty="0"/>
-          </a:p>
-        </p:txBody>
-      </p:sp>
-      <p:sp>
-        <p:nvSpPr>
-          <p:cNvPr id="12" name="Text 10"/>
-          <p:cNvSpPr/>
-          <p:nvPr/>
-        </p:nvSpPr>
-        <p:spPr>
-          <a:xfrm>
-            <a:off x="640080" y="4663440"/>
-            <a:ext cx="1097280" cy="1097280"/>
-          </a:xfrm>
-          <a:prstGeom prst="rect">
-            <a:avLst/>
-          </a:prstGeom>
-          <a:noFill/>
-          <a:ln/>
-        </p:spPr>
-        <p:txBody>
-          <a:bodyPr wrap="square" lIns="0" tIns="0" rIns="0" bIns="0" rtlCol="0" anchor="ctr"/>
-          <a:lstStyle/>
-          <a:p>
-            <a:pPr indent="0" marL="0">
-              <a:buNone/>
-            </a:pPr>
-            <a:r>
-              <a:rPr lang="en-US" sz="5400" b="1" dirty="0">
-                <a:solidFill>
-                  <a:srgbClr val="EEF3EA"/>
-                </a:solidFill>
-                <a:latin typeface="Bookman Old Style" pitchFamily="34" charset="0"/>
-                <a:ea typeface="Bookman Old Style" pitchFamily="34" charset="-122"/>
-                <a:cs typeface="Bookman Old Style" pitchFamily="34" charset="-120"/>
-              </a:rPr>
-              <a:t>3</a:t>
-            </a:r>
-            <a:endParaRPr lang="en-US" sz="5400" dirty="0"/>
-          </a:p>
-        </p:txBody>
-      </p:sp>
-      <p:sp>
-        <p:nvSpPr>
-          <p:cNvPr id="13" name="Shape 11"/>
-          <p:cNvSpPr/>
-          <p:nvPr/>
-        </p:nvSpPr>
-        <p:spPr>
-          <a:xfrm>
-            <a:off x="1828800" y="4846320"/>
-            <a:ext cx="0" cy="1051560"/>
-          </a:xfrm>
-          <a:prstGeom prst="line">
-            <a:avLst/>
-          </a:prstGeom>
-          <a:noFill/>
-          <a:ln w="25400">
+            <a:endParaRPr lang="en-US" sz="1250" dirty="0"/>
+          </a:p>
+        </p:txBody>
+      </p:sp>
+      <p:sp>
+        <p:nvSpPr>
+          <p:cNvPr id="14" name="Shape 12"/>
+          <p:cNvSpPr/>
+          <p:nvPr/>
+        </p:nvSpPr>
+        <p:spPr>
+          <a:xfrm>
+            <a:off x="6217920" y="3401568"/>
+            <a:ext cx="5303520" cy="2606040"/>
+          </a:xfrm>
+          <a:prstGeom prst="roundRect">
+            <a:avLst>
+              <a:gd name="adj" fmla="val 3509"/>
+            </a:avLst>
+          </a:prstGeom>
+          <a:solidFill>
+            <a:srgbClr val="EEF3EA"/>
+          </a:solidFill>
+          <a:ln w="15240">
             <a:solidFill>
               <a:srgbClr val="3F7C3F"/>
             </a:solidFill>
@@ -3031,14 +3050,34 @@
       </p:sp>
       <p:sp>
         <p:nvSpPr>
-          <p:cNvPr id="14" name="Text 12"/>
-          <p:cNvSpPr/>
-          <p:nvPr/>
-        </p:nvSpPr>
-        <p:spPr>
-          <a:xfrm>
-            <a:off x="2057400" y="4800600"/>
-            <a:ext cx="9509760" cy="411480"/>
+          <p:cNvPr id="15" name="Shape 13"/>
+          <p:cNvSpPr/>
+          <p:nvPr/>
+        </p:nvSpPr>
+        <p:spPr>
+          <a:xfrm>
+            <a:off x="6492240" y="3675888"/>
+            <a:ext cx="603504" cy="603504"/>
+          </a:xfrm>
+          <a:prstGeom prst="ellipse">
+            <a:avLst/>
+          </a:prstGeom>
+          <a:solidFill>
+            <a:srgbClr val="2C5F2D"/>
+          </a:solidFill>
+          <a:ln/>
+        </p:spPr>
+      </p:sp>
+      <p:sp>
+        <p:nvSpPr>
+          <p:cNvPr id="16" name="Text 14"/>
+          <p:cNvSpPr/>
+          <p:nvPr/>
+        </p:nvSpPr>
+        <p:spPr>
+          <a:xfrm>
+            <a:off x="6492240" y="3675888"/>
+            <a:ext cx="603504" cy="603504"/>
           </a:xfrm>
           <a:prstGeom prst="rect">
             <a:avLst/>
@@ -3050,11 +3089,50 @@
           <a:bodyPr wrap="square" lIns="0" tIns="0" rIns="0" bIns="0" rtlCol="0" anchor="ctr"/>
           <a:lstStyle/>
           <a:p>
+            <a:pPr algn="ctr" indent="0" marL="0">
+              <a:buNone/>
+            </a:pPr>
+            <a:r>
+              <a:rPr lang="en-US" sz="2200" b="1" dirty="0">
+                <a:solidFill>
+                  <a:srgbClr val="FFFFFF"/>
+                </a:solidFill>
+                <a:latin typeface="Bookman Old Style" pitchFamily="34" charset="0"/>
+                <a:ea typeface="Bookman Old Style" pitchFamily="34" charset="-122"/>
+                <a:cs typeface="Bookman Old Style" pitchFamily="34" charset="-120"/>
+              </a:rPr>
+              <a:t>3</a:t>
+            </a:r>
+            <a:endParaRPr lang="en-US" sz="2200" dirty="0"/>
+          </a:p>
+        </p:txBody>
+      </p:sp>
+      <p:sp>
+        <p:nvSpPr>
+          <p:cNvPr id="17" name="Text 15"/>
+          <p:cNvSpPr/>
+          <p:nvPr/>
+        </p:nvSpPr>
+        <p:spPr>
+          <a:xfrm>
+            <a:off x="6492240" y="4425696"/>
+            <a:ext cx="4754880" cy="777240"/>
+          </a:xfrm>
+          <a:prstGeom prst="rect">
+            <a:avLst/>
+          </a:prstGeom>
+          <a:noFill/>
+          <a:ln/>
+        </p:spPr>
+        <p:txBody>
+          <a:bodyPr wrap="square" lIns="0" tIns="0" rIns="0" bIns="0" rtlCol="0" anchor="ctr"/>
+          <a:lstStyle/>
+          <a:p>
             <a:pPr indent="0" marL="0">
               <a:buNone/>
             </a:pPr>
             <a:r>
-              <a:rPr lang="en-US" sz="1800" b="1" dirty="0">
+              <a:rPr lang="en-US" sz="1600" b="1" dirty="0">
                 <a:solidFill>
                   <a:srgbClr val="1B2418"/>
                 </a:solidFill>
@@ -3064,20 +3142,20 @@
               </a:rPr>
               <a:t>A fire-detection alert on a smoke spike</a:t>
             </a:r>
-            <a:endParaRPr lang="en-US" sz="1800" dirty="0"/>
-          </a:p>
-        </p:txBody>
-      </p:sp>
-      <p:sp>
-        <p:nvSpPr>
-          <p:cNvPr id="15" name="Text 13"/>
-          <p:cNvSpPr/>
-          <p:nvPr/>
-        </p:nvSpPr>
-        <p:spPr>
-          <a:xfrm>
-            <a:off x="2057400" y="5239512"/>
-            <a:ext cx="9509760" cy="822960"/>
+            <a:endParaRPr lang="en-US" sz="1600" dirty="0"/>
+          </a:p>
+        </p:txBody>
+      </p:sp>
+      <p:sp>
+        <p:nvSpPr>
+          <p:cNvPr id="18" name="Text 16"/>
+          <p:cNvSpPr/>
+          <p:nvPr/>
+        </p:nvSpPr>
+        <p:spPr>
+          <a:xfrm>
+            <a:off x="6492240" y="5184648"/>
+            <a:ext cx="4754880" cy="640080"/>
           </a:xfrm>
           <a:prstGeom prst="rect">
             <a:avLst/>
@@ -3090,10 +3168,13 @@
           <a:lstStyle/>
           <a:p>
             <a:pPr indent="0" marL="0">
-              <a:buNone/>
-            </a:pPr>
-            <a:r>
-              <a:rPr lang="en-US" sz="1350" dirty="0">
+              <a:lnSpc>
+                <a:spcPct val="106000"/>
+              </a:lnSpc>
+              <a:buNone/>
+            </a:pPr>
+            <a:r>
+              <a:rPr lang="en-US" sz="1250" dirty="0">
                 <a:solidFill>
                   <a:srgbClr val="5F6E55"/>
                 </a:solidFill>
@@ -3103,46 +3184,7 @@
               </a:rPr>
               <a:t>Drive smoke density up on one station and the fire-detection alert fires within a window, dial climbing toward 4.</a:t>
             </a:r>
-            <a:endParaRPr lang="en-US" sz="1350" dirty="0"/>
-          </a:p>
-        </p:txBody>
-      </p:sp>
-      <p:sp>
-        <p:nvSpPr>
-          <p:cNvPr id="16" name="Text 14"/>
-          <p:cNvSpPr/>
-          <p:nvPr/>
-        </p:nvSpPr>
-        <p:spPr>
-          <a:xfrm>
-            <a:off x="640080" y="6309360"/>
-            <a:ext cx="10972800" cy="365760"/>
-          </a:xfrm>
-          <a:prstGeom prst="rect">
-            <a:avLst/>
-          </a:prstGeom>
-          <a:noFill/>
-          <a:ln/>
-        </p:spPr>
-        <p:txBody>
-          <a:bodyPr wrap="square" rtlCol="0" anchor="ctr"/>
-          <a:lstStyle/>
-          <a:p>
-            <a:pPr indent="0" marL="0">
-              <a:buNone/>
-            </a:pPr>
-            <a:r>
-              <a:rPr lang="en-US" sz="1300" i="1" dirty="0">
-                <a:solidFill>
-                  <a:srgbClr val="6A9A52"/>
-                </a:solidFill>
-                <a:latin typeface="Calibri" pitchFamily="34" charset="0"/>
-                <a:ea typeface="Calibri" pitchFamily="34" charset="-122"/>
-                <a:cs typeface="Calibri" pitchFamily="34" charset="-120"/>
-              </a:rPr>
-              <a:t>Switch to the live dashboard here — backup video ready.</a:t>
-            </a:r>
-            <a:endParaRPr lang="en-US" sz="1300" dirty="0"/>
+            <a:endParaRPr lang="en-US" sz="1250" dirty="0"/>
           </a:p>
         </p:txBody>
       </p:sp>

--- a/ppt/DeekondaRakshan_X25180754_wildfire-forest-monitoring.pptx
+++ b/ppt/DeekondaRakshan_X25180754_wildfire-forest-monitoring.pptx
@@ -1124,7 +1124,7 @@
     <p:bg>
       <p:bgPr>
         <a:solidFill>
-          <a:srgbClr val="1A2418"/>
+          <a:srgbClr val="FFFFFF"/>
         </a:solidFill>
       </p:bgPr>
     </p:bg>
@@ -1270,7 +1270,7 @@
             <a:r>
               <a:rPr lang="en-US" sz="2000" dirty="0">
                 <a:solidFill>
-                  <a:srgbClr val="D3E1CB"/>
+                  <a:srgbClr val="1B2418"/>
                 </a:solidFill>
                 <a:latin typeface="Calibri" pitchFamily="34" charset="0"/>
                 <a:ea typeface="Calibri" pitchFamily="34" charset="-122"/>
@@ -1284,41 +1284,14 @@
       </p:sp>
       <p:sp>
         <p:nvSpPr>
-          <p:cNvPr id="6" name="Shape 4"/>
+          <p:cNvPr id="6" name="Text 4"/>
           <p:cNvSpPr/>
           <p:nvPr/>
         </p:nvSpPr>
         <p:spPr>
           <a:xfrm>
             <a:off x="5120640" y="4023360"/>
-            <a:ext cx="2926080" cy="566928"/>
-          </a:xfrm>
-          <a:prstGeom prst="roundRect">
-            <a:avLst>
-              <a:gd name="adj" fmla="val 50000"/>
-            </a:avLst>
-          </a:prstGeom>
-          <a:solidFill>
-            <a:srgbClr val="23301F"/>
-          </a:solidFill>
-          <a:ln w="12700">
-            <a:solidFill>
-              <a:srgbClr val="E4772E"/>
-            </a:solidFill>
-            <a:prstDash val="solid"/>
-          </a:ln>
-        </p:spPr>
-      </p:sp>
-      <p:sp>
-        <p:nvSpPr>
-          <p:cNvPr id="7" name="Text 5"/>
-          <p:cNvSpPr/>
-          <p:nvPr/>
-        </p:nvSpPr>
-        <p:spPr>
-          <a:xfrm>
-            <a:off x="5120640" y="4023360"/>
-            <a:ext cx="2926080" cy="566928"/>
+            <a:ext cx="3474720" cy="411480"/>
           </a:xfrm>
           <a:prstGeom prst="rect">
             <a:avLst/>
@@ -1330,13 +1303,13 @@
           <a:bodyPr wrap="square" lIns="0" tIns="0" rIns="0" bIns="0" rtlCol="0" anchor="ctr"/>
           <a:lstStyle/>
           <a:p>
-            <a:pPr algn="ctr" indent="0" marL="0">
-              <a:buNone/>
-            </a:pPr>
-            <a:r>
-              <a:rPr lang="en-US" sz="1350" b="1" dirty="0">
-                <a:solidFill>
-                  <a:srgbClr val="E4772E"/>
+            <a:pPr indent="0" marL="0">
+              <a:buNone/>
+            </a:pPr>
+            <a:r>
+              <a:rPr lang="en-US" sz="1500" b="1" dirty="0">
+                <a:solidFill>
+                  <a:srgbClr val="2C5F2D"/>
                 </a:solidFill>
                 <a:latin typeface="Calibri" pitchFamily="34" charset="0"/>
                 <a:ea typeface="Calibri" pitchFamily="34" charset="-122"/>
@@ -1344,47 +1317,20 @@
               </a:rPr>
               <a:t>Heat alarm 42 °C</a:t>
             </a:r>
-            <a:endParaRPr lang="en-US" sz="1350" dirty="0"/>
-          </a:p>
-        </p:txBody>
-      </p:sp>
-      <p:sp>
-        <p:nvSpPr>
-          <p:cNvPr id="8" name="Shape 6"/>
-          <p:cNvSpPr/>
-          <p:nvPr/>
-        </p:nvSpPr>
-        <p:spPr>
-          <a:xfrm>
-            <a:off x="5120640" y="4709160"/>
-            <a:ext cx="2926080" cy="566928"/>
-          </a:xfrm>
-          <a:prstGeom prst="roundRect">
-            <a:avLst>
-              <a:gd name="adj" fmla="val 50000"/>
-            </a:avLst>
-          </a:prstGeom>
-          <a:solidFill>
-            <a:srgbClr val="23301F"/>
-          </a:solidFill>
-          <a:ln w="12700">
-            <a:solidFill>
-              <a:srgbClr val="E4772E"/>
-            </a:solidFill>
-            <a:prstDash val="solid"/>
-          </a:ln>
-        </p:spPr>
-      </p:sp>
-      <p:sp>
-        <p:nvSpPr>
-          <p:cNvPr id="9" name="Text 7"/>
-          <p:cNvSpPr/>
-          <p:nvPr/>
-        </p:nvSpPr>
-        <p:spPr>
-          <a:xfrm>
-            <a:off x="5120640" y="4709160"/>
-            <a:ext cx="2926080" cy="566928"/>
+            <a:endParaRPr lang="en-US" sz="1500" dirty="0"/>
+          </a:p>
+        </p:txBody>
+      </p:sp>
+      <p:sp>
+        <p:nvSpPr>
+          <p:cNvPr id="7" name="Text 5"/>
+          <p:cNvSpPr/>
+          <p:nvPr/>
+        </p:nvSpPr>
+        <p:spPr>
+          <a:xfrm>
+            <a:off x="5120640" y="4526280"/>
+            <a:ext cx="3474720" cy="411480"/>
           </a:xfrm>
           <a:prstGeom prst="rect">
             <a:avLst/>
@@ -1396,13 +1342,13 @@
           <a:bodyPr wrap="square" lIns="0" tIns="0" rIns="0" bIns="0" rtlCol="0" anchor="ctr"/>
           <a:lstStyle/>
           <a:p>
-            <a:pPr algn="ctr" indent="0" marL="0">
-              <a:buNone/>
-            </a:pPr>
-            <a:r>
-              <a:rPr lang="en-US" sz="1350" b="1" dirty="0">
-                <a:solidFill>
-                  <a:srgbClr val="E4772E"/>
+            <a:pPr indent="0" marL="0">
+              <a:buNone/>
+            </a:pPr>
+            <a:r>
+              <a:rPr lang="en-US" sz="1500" b="1" dirty="0">
+                <a:solidFill>
+                  <a:srgbClr val="2C5F2D"/>
                 </a:solidFill>
                 <a:latin typeface="Calibri" pitchFamily="34" charset="0"/>
                 <a:ea typeface="Calibri" pitchFamily="34" charset="-122"/>
@@ -1410,47 +1356,20 @@
               </a:rPr>
               <a:t>Risk climbs from 30 °C</a:t>
             </a:r>
-            <a:endParaRPr lang="en-US" sz="1350" dirty="0"/>
-          </a:p>
-        </p:txBody>
-      </p:sp>
-      <p:sp>
-        <p:nvSpPr>
-          <p:cNvPr id="10" name="Shape 8"/>
-          <p:cNvSpPr/>
-          <p:nvPr/>
-        </p:nvSpPr>
-        <p:spPr>
-          <a:xfrm>
-            <a:off x="5120640" y="5394960"/>
-            <a:ext cx="2926080" cy="566928"/>
-          </a:xfrm>
-          <a:prstGeom prst="roundRect">
-            <a:avLst>
-              <a:gd name="adj" fmla="val 50000"/>
-            </a:avLst>
-          </a:prstGeom>
-          <a:solidFill>
-            <a:srgbClr val="23301F"/>
-          </a:solidFill>
-          <a:ln w="12700">
-            <a:solidFill>
-              <a:srgbClr val="E4772E"/>
-            </a:solidFill>
-            <a:prstDash val="solid"/>
-          </a:ln>
-        </p:spPr>
-      </p:sp>
-      <p:sp>
-        <p:nvSpPr>
-          <p:cNvPr id="11" name="Text 9"/>
-          <p:cNvSpPr/>
-          <p:nvPr/>
-        </p:nvSpPr>
-        <p:spPr>
-          <a:xfrm>
-            <a:off x="5120640" y="5394960"/>
-            <a:ext cx="2926080" cy="566928"/>
+            <a:endParaRPr lang="en-US" sz="1500" dirty="0"/>
+          </a:p>
+        </p:txBody>
+      </p:sp>
+      <p:sp>
+        <p:nvSpPr>
+          <p:cNvPr id="8" name="Text 6"/>
+          <p:cNvSpPr/>
+          <p:nvPr/>
+        </p:nvSpPr>
+        <p:spPr>
+          <a:xfrm>
+            <a:off x="5120640" y="5029200"/>
+            <a:ext cx="3474720" cy="411480"/>
           </a:xfrm>
           <a:prstGeom prst="rect">
             <a:avLst/>
@@ -1462,13 +1381,13 @@
           <a:bodyPr wrap="square" lIns="0" tIns="0" rIns="0" bIns="0" rtlCol="0" anchor="ctr"/>
           <a:lstStyle/>
           <a:p>
-            <a:pPr algn="ctr" indent="0" marL="0">
-              <a:buNone/>
-            </a:pPr>
-            <a:r>
-              <a:rPr lang="en-US" sz="1350" b="1" dirty="0">
-                <a:solidFill>
-                  <a:srgbClr val="E4772E"/>
+            <a:pPr indent="0" marL="0">
+              <a:buNone/>
+            </a:pPr>
+            <a:r>
+              <a:rPr lang="en-US" sz="1500" b="1" dirty="0">
+                <a:solidFill>
+                  <a:srgbClr val="2C5F2D"/>
                 </a:solidFill>
                 <a:latin typeface="Calibri" pitchFamily="34" charset="0"/>
                 <a:ea typeface="Calibri" pitchFamily="34" charset="-122"/>
@@ -1476,13 +1395,13 @@
               </a:rPr>
               <a:t>1 s smoke samples</a:t>
             </a:r>
-            <a:endParaRPr lang="en-US" sz="1350" dirty="0"/>
-          </a:p>
-        </p:txBody>
-      </p:sp>
-      <p:sp>
-        <p:nvSpPr>
-          <p:cNvPr id="12" name="Text 10"/>
+            <a:endParaRPr lang="en-US" sz="1500" dirty="0"/>
+          </a:p>
+        </p:txBody>
+      </p:sp>
+      <p:sp>
+        <p:nvSpPr>
+          <p:cNvPr id="9" name="Text 7"/>
           <p:cNvSpPr/>
           <p:nvPr/>
         </p:nvSpPr>
@@ -1504,17 +1423,6 @@
             <a:pPr indent="0" marL="0">
               <a:buNone/>
             </a:pPr>
-            <a:r>
-              <a:rPr lang="en-US" sz="1250" dirty="0">
-                <a:solidFill>
-                  <a:srgbClr val="5F6E55"/>
-                </a:solidFill>
-                <a:latin typeface="Calibri" pitchFamily="34" charset="0"/>
-                <a:ea typeface="Calibri" pitchFamily="34" charset="-122"/>
-                <a:cs typeface="Calibri" pitchFamily="34" charset="-120"/>
-              </a:rPr>
-              <a:t>Fog &amp; Edge Computing (H9FECC)   ·   deployed live on AWS</a:t>
-            </a:r>
             <a:endParaRPr lang="en-US" sz="1250" dirty="0"/>
           </a:p>
         </p:txBody>

--- a/ppt/DeekondaRakshan_X25180754_wildfire-forest-monitoring.pptx
+++ b/ppt/DeekondaRakshan_X25180754_wildfire-forest-monitoring.pptx
@@ -1124,7 +1124,7 @@
     <p:bg>
       <p:bgPr>
         <a:solidFill>
-          <a:srgbClr val="FFFFFF"/>
+          <a:srgbClr val="14100C"/>
         </a:solidFill>
       </p:bgPr>
     </p:bg>
@@ -1150,28 +1150,77 @@
         </p:nvSpPr>
         <p:spPr>
           <a:xfrm>
-            <a:off x="0" y="0"/>
-            <a:ext cx="4663440" cy="6858000"/>
-          </a:xfrm>
-          <a:prstGeom prst="rect">
-            <a:avLst/>
-          </a:prstGeom>
-          <a:solidFill>
-            <a:srgbClr val="2C5F2D"/>
-          </a:solidFill>
-          <a:ln/>
-        </p:spPr>
-      </p:sp>
-      <p:sp>
-        <p:nvSpPr>
-          <p:cNvPr id="3" name="Text 1"/>
-          <p:cNvSpPr/>
-          <p:nvPr/>
-        </p:nvSpPr>
-        <p:spPr>
-          <a:xfrm>
-            <a:off x="502920" y="1280160"/>
-            <a:ext cx="3749040" cy="2377440"/>
+            <a:off x="777240" y="685800"/>
+            <a:ext cx="10637215" cy="0"/>
+          </a:xfrm>
+          <a:prstGeom prst="line">
+            <a:avLst/>
+          </a:prstGeom>
+          <a:noFill/>
+          <a:ln w="44450">
+            <a:solidFill>
+              <a:srgbClr val="E8622C"/>
+            </a:solidFill>
+            <a:prstDash val="solid"/>
+          </a:ln>
+        </p:spPr>
+      </p:sp>
+      <p:sp>
+        <p:nvSpPr>
+          <p:cNvPr id="3" name="Shape 1"/>
+          <p:cNvSpPr/>
+          <p:nvPr/>
+        </p:nvSpPr>
+        <p:spPr>
+          <a:xfrm>
+            <a:off x="777240" y="786384"/>
+            <a:ext cx="10637215" cy="0"/>
+          </a:xfrm>
+          <a:prstGeom prst="line">
+            <a:avLst/>
+          </a:prstGeom>
+          <a:noFill/>
+          <a:ln w="12700">
+            <a:solidFill>
+              <a:srgbClr val="E8622C"/>
+            </a:solidFill>
+            <a:prstDash val="solid"/>
+          </a:ln>
+        </p:spPr>
+      </p:sp>
+      <p:sp>
+        <p:nvSpPr>
+          <p:cNvPr id="4" name="Shape 2"/>
+          <p:cNvSpPr/>
+          <p:nvPr/>
+        </p:nvSpPr>
+        <p:spPr>
+          <a:xfrm>
+            <a:off x="777240" y="6144768"/>
+            <a:ext cx="10637215" cy="0"/>
+          </a:xfrm>
+          <a:prstGeom prst="line">
+            <a:avLst/>
+          </a:prstGeom>
+          <a:noFill/>
+          <a:ln w="44450">
+            <a:solidFill>
+              <a:srgbClr val="E8622C"/>
+            </a:solidFill>
+            <a:prstDash val="solid"/>
+          </a:ln>
+        </p:spPr>
+      </p:sp>
+      <p:sp>
+        <p:nvSpPr>
+          <p:cNvPr id="5" name="Text 3"/>
+          <p:cNvSpPr/>
+          <p:nvPr/>
+        </p:nvSpPr>
+        <p:spPr>
+          <a:xfrm>
+            <a:off x="758952" y="1783080"/>
+            <a:ext cx="10637215" cy="1645920"/>
           </a:xfrm>
           <a:prstGeom prst="rect">
             <a:avLst/>
@@ -1184,12 +1233,15 @@
           <a:lstStyle/>
           <a:p>
             <a:pPr indent="0" marL="0">
-              <a:buNone/>
-            </a:pPr>
-            <a:r>
-              <a:rPr lang="en-US" sz="3400" b="1" dirty="0">
-                <a:solidFill>
-                  <a:srgbClr val="FFFFFF"/>
+              <a:lnSpc>
+                <a:spcPct val="98000"/>
+              </a:lnSpc>
+              <a:buNone/>
+            </a:pPr>
+            <a:r>
+              <a:rPr lang="en-US" sz="3800" b="1" dirty="0">
+                <a:solidFill>
+                  <a:srgbClr val="EEF2F6"/>
                 </a:solidFill>
                 <a:latin typeface="Bookman Old Style" pitchFamily="34" charset="0"/>
                 <a:ea typeface="Bookman Old Style" pitchFamily="34" charset="-122"/>
@@ -1197,20 +1249,20 @@
               </a:rPr>
               <a:t>Wildfire Forest Monitoring</a:t>
             </a:r>
-            <a:endParaRPr lang="en-US" sz="3400" dirty="0"/>
-          </a:p>
-        </p:txBody>
-      </p:sp>
-      <p:sp>
-        <p:nvSpPr>
-          <p:cNvPr id="4" name="Text 2"/>
-          <p:cNvSpPr/>
-          <p:nvPr/>
-        </p:nvSpPr>
-        <p:spPr>
-          <a:xfrm>
-            <a:off x="521208" y="5394960"/>
-            <a:ext cx="3840480" cy="731520"/>
+            <a:endParaRPr lang="en-US" sz="3800" dirty="0"/>
+          </a:p>
+        </p:txBody>
+      </p:sp>
+      <p:sp>
+        <p:nvSpPr>
+          <p:cNvPr id="6" name="Text 4"/>
+          <p:cNvSpPr/>
+          <p:nvPr/>
+        </p:nvSpPr>
+        <p:spPr>
+          <a:xfrm>
+            <a:off x="777240" y="3474720"/>
+            <a:ext cx="10637215" cy="365760"/>
           </a:xfrm>
           <a:prstGeom prst="rect">
             <a:avLst/>
@@ -1226,9 +1278,9 @@
               <a:buNone/>
             </a:pPr>
             <a:r>
-              <a:rPr lang="en-US" sz="1500" dirty="0">
-                <a:solidFill>
-                  <a:srgbClr val="D3E1CB"/>
+              <a:rPr lang="en-US" sz="1450" dirty="0">
+                <a:solidFill>
+                  <a:srgbClr val="8B98A6"/>
                 </a:solidFill>
                 <a:latin typeface="Calibri" pitchFamily="34" charset="0"/>
                 <a:ea typeface="Calibri" pitchFamily="34" charset="-122"/>
@@ -1236,41 +1288,41 @@
               </a:rPr>
               <a:t>Deekonda Rakshan   ·   X25180754</a:t>
             </a:r>
-            <a:endParaRPr lang="en-US" sz="1500" dirty="0"/>
-          </a:p>
-        </p:txBody>
-      </p:sp>
-      <p:sp>
-        <p:nvSpPr>
-          <p:cNvPr id="5" name="Text 3"/>
-          <p:cNvSpPr/>
-          <p:nvPr/>
-        </p:nvSpPr>
-        <p:spPr>
-          <a:xfrm>
-            <a:off x="5120640" y="1371600"/>
-            <a:ext cx="6492240" cy="2011680"/>
-          </a:xfrm>
-          <a:prstGeom prst="rect">
-            <a:avLst/>
-          </a:prstGeom>
-          <a:noFill/>
-          <a:ln/>
-        </p:spPr>
-        <p:txBody>
-          <a:bodyPr wrap="square" rtlCol="0" anchor="ctr"/>
+            <a:endParaRPr lang="en-US" sz="1450" dirty="0"/>
+          </a:p>
+        </p:txBody>
+      </p:sp>
+      <p:sp>
+        <p:nvSpPr>
+          <p:cNvPr id="7" name="Text 5"/>
+          <p:cNvSpPr/>
+          <p:nvPr/>
+        </p:nvSpPr>
+        <p:spPr>
+          <a:xfrm>
+            <a:off x="777240" y="4069080"/>
+            <a:ext cx="8138160" cy="1188720"/>
+          </a:xfrm>
+          <a:prstGeom prst="rect">
+            <a:avLst/>
+          </a:prstGeom>
+          <a:noFill/>
+          <a:ln/>
+        </p:spPr>
+        <p:txBody>
+          <a:bodyPr wrap="square" rtlCol="0" anchor="t"/>
           <a:lstStyle/>
           <a:p>
             <a:pPr indent="0" marL="0">
               <a:lnSpc>
-                <a:spcPct val="112000"/>
+                <a:spcPct val="130000"/>
               </a:lnSpc>
               <a:buNone/>
             </a:pPr>
             <a:r>
-              <a:rPr lang="en-US" sz="2000" dirty="0">
-                <a:solidFill>
-                  <a:srgbClr val="1B2418"/>
+              <a:rPr lang="en-US" sz="1400" dirty="0">
+                <a:solidFill>
+                  <a:srgbClr val="EEF2F6"/>
                 </a:solidFill>
                 <a:latin typeface="Calibri" pitchFamily="34" charset="0"/>
                 <a:ea typeface="Calibri" pitchFamily="34" charset="-122"/>
@@ -1278,152 +1330,7 @@
               </a:rPr>
               <a:t>Fire weather compounds quietly — heat, smoke, wind and drying soil each look tolerable alone; the danger is the combination, and it can develop between two routine checks.</a:t>
             </a:r>
-            <a:endParaRPr lang="en-US" sz="2000" dirty="0"/>
-          </a:p>
-        </p:txBody>
-      </p:sp>
-      <p:sp>
-        <p:nvSpPr>
-          <p:cNvPr id="6" name="Text 4"/>
-          <p:cNvSpPr/>
-          <p:nvPr/>
-        </p:nvSpPr>
-        <p:spPr>
-          <a:xfrm>
-            <a:off x="5120640" y="4023360"/>
-            <a:ext cx="3474720" cy="411480"/>
-          </a:xfrm>
-          <a:prstGeom prst="rect">
-            <a:avLst/>
-          </a:prstGeom>
-          <a:noFill/>
-          <a:ln/>
-        </p:spPr>
-        <p:txBody>
-          <a:bodyPr wrap="square" lIns="0" tIns="0" rIns="0" bIns="0" rtlCol="0" anchor="ctr"/>
-          <a:lstStyle/>
-          <a:p>
-            <a:pPr indent="0" marL="0">
-              <a:buNone/>
-            </a:pPr>
-            <a:r>
-              <a:rPr lang="en-US" sz="1500" b="1" dirty="0">
-                <a:solidFill>
-                  <a:srgbClr val="2C5F2D"/>
-                </a:solidFill>
-                <a:latin typeface="Calibri" pitchFamily="34" charset="0"/>
-                <a:ea typeface="Calibri" pitchFamily="34" charset="-122"/>
-                <a:cs typeface="Calibri" pitchFamily="34" charset="-120"/>
-              </a:rPr>
-              <a:t>Heat alarm 42 °C</a:t>
-            </a:r>
-            <a:endParaRPr lang="en-US" sz="1500" dirty="0"/>
-          </a:p>
-        </p:txBody>
-      </p:sp>
-      <p:sp>
-        <p:nvSpPr>
-          <p:cNvPr id="7" name="Text 5"/>
-          <p:cNvSpPr/>
-          <p:nvPr/>
-        </p:nvSpPr>
-        <p:spPr>
-          <a:xfrm>
-            <a:off x="5120640" y="4526280"/>
-            <a:ext cx="3474720" cy="411480"/>
-          </a:xfrm>
-          <a:prstGeom prst="rect">
-            <a:avLst/>
-          </a:prstGeom>
-          <a:noFill/>
-          <a:ln/>
-        </p:spPr>
-        <p:txBody>
-          <a:bodyPr wrap="square" lIns="0" tIns="0" rIns="0" bIns="0" rtlCol="0" anchor="ctr"/>
-          <a:lstStyle/>
-          <a:p>
-            <a:pPr indent="0" marL="0">
-              <a:buNone/>
-            </a:pPr>
-            <a:r>
-              <a:rPr lang="en-US" sz="1500" b="1" dirty="0">
-                <a:solidFill>
-                  <a:srgbClr val="2C5F2D"/>
-                </a:solidFill>
-                <a:latin typeface="Calibri" pitchFamily="34" charset="0"/>
-                <a:ea typeface="Calibri" pitchFamily="34" charset="-122"/>
-                <a:cs typeface="Calibri" pitchFamily="34" charset="-120"/>
-              </a:rPr>
-              <a:t>Risk climbs from 30 °C</a:t>
-            </a:r>
-            <a:endParaRPr lang="en-US" sz="1500" dirty="0"/>
-          </a:p>
-        </p:txBody>
-      </p:sp>
-      <p:sp>
-        <p:nvSpPr>
-          <p:cNvPr id="8" name="Text 6"/>
-          <p:cNvSpPr/>
-          <p:nvPr/>
-        </p:nvSpPr>
-        <p:spPr>
-          <a:xfrm>
-            <a:off x="5120640" y="5029200"/>
-            <a:ext cx="3474720" cy="411480"/>
-          </a:xfrm>
-          <a:prstGeom prst="rect">
-            <a:avLst/>
-          </a:prstGeom>
-          <a:noFill/>
-          <a:ln/>
-        </p:spPr>
-        <p:txBody>
-          <a:bodyPr wrap="square" lIns="0" tIns="0" rIns="0" bIns="0" rtlCol="0" anchor="ctr"/>
-          <a:lstStyle/>
-          <a:p>
-            <a:pPr indent="0" marL="0">
-              <a:buNone/>
-            </a:pPr>
-            <a:r>
-              <a:rPr lang="en-US" sz="1500" b="1" dirty="0">
-                <a:solidFill>
-                  <a:srgbClr val="2C5F2D"/>
-                </a:solidFill>
-                <a:latin typeface="Calibri" pitchFamily="34" charset="0"/>
-                <a:ea typeface="Calibri" pitchFamily="34" charset="-122"/>
-                <a:cs typeface="Calibri" pitchFamily="34" charset="-120"/>
-              </a:rPr>
-              <a:t>1 s smoke samples</a:t>
-            </a:r>
-            <a:endParaRPr lang="en-US" sz="1500" dirty="0"/>
-          </a:p>
-        </p:txBody>
-      </p:sp>
-      <p:sp>
-        <p:nvSpPr>
-          <p:cNvPr id="9" name="Text 7"/>
-          <p:cNvSpPr/>
-          <p:nvPr/>
-        </p:nvSpPr>
-        <p:spPr>
-          <a:xfrm>
-            <a:off x="5120640" y="6172200"/>
-            <a:ext cx="6400800" cy="365760"/>
-          </a:xfrm>
-          <a:prstGeom prst="rect">
-            <a:avLst/>
-          </a:prstGeom>
-          <a:noFill/>
-          <a:ln/>
-        </p:spPr>
-        <p:txBody>
-          <a:bodyPr wrap="square" rtlCol="0" anchor="ctr"/>
-          <a:lstStyle/>
-          <a:p>
-            <a:pPr indent="0" marL="0">
-              <a:buNone/>
-            </a:pPr>
-            <a:endParaRPr lang="en-US" sz="1250" dirty="0"/>
+            <a:endParaRPr lang="en-US" sz="1400" dirty="0"/>
           </a:p>
         </p:txBody>
       </p:sp>
@@ -1441,7 +1348,7 @@
     <p:bg>
       <p:bgPr>
         <a:solidFill>
-          <a:srgbClr val="FFFFFF"/>
+          <a:srgbClr val="14100C"/>
         </a:solidFill>
       </p:bgPr>
     </p:bg>
@@ -1461,23 +1368,92 @@
       </p:grpSpPr>
       <p:sp>
         <p:nvSpPr>
-          <p:cNvPr id="2" name="Text 0"/>
-          <p:cNvSpPr/>
-          <p:nvPr/>
-        </p:nvSpPr>
-        <p:spPr>
-          <a:xfrm>
-            <a:off x="640080" y="457200"/>
-            <a:ext cx="10972800" cy="640080"/>
-          </a:xfrm>
-          <a:prstGeom prst="rect">
-            <a:avLst/>
-          </a:prstGeom>
-          <a:noFill/>
-          <a:ln/>
-        </p:spPr>
-        <p:txBody>
-          <a:bodyPr wrap="square" rtlCol="0" anchor="ctr"/>
+          <p:cNvPr id="2" name="Shape 0"/>
+          <p:cNvSpPr/>
+          <p:nvPr/>
+        </p:nvSpPr>
+        <p:spPr>
+          <a:xfrm>
+            <a:off x="777240" y="685800"/>
+            <a:ext cx="10637215" cy="0"/>
+          </a:xfrm>
+          <a:prstGeom prst="line">
+            <a:avLst/>
+          </a:prstGeom>
+          <a:noFill/>
+          <a:ln w="44450">
+            <a:solidFill>
+              <a:srgbClr val="E8622C"/>
+            </a:solidFill>
+            <a:prstDash val="solid"/>
+          </a:ln>
+        </p:spPr>
+      </p:sp>
+      <p:sp>
+        <p:nvSpPr>
+          <p:cNvPr id="3" name="Shape 1"/>
+          <p:cNvSpPr/>
+          <p:nvPr/>
+        </p:nvSpPr>
+        <p:spPr>
+          <a:xfrm>
+            <a:off x="777240" y="786384"/>
+            <a:ext cx="10637215" cy="0"/>
+          </a:xfrm>
+          <a:prstGeom prst="line">
+            <a:avLst/>
+          </a:prstGeom>
+          <a:noFill/>
+          <a:ln w="12700">
+            <a:solidFill>
+              <a:srgbClr val="E8622C"/>
+            </a:solidFill>
+            <a:prstDash val="solid"/>
+          </a:ln>
+        </p:spPr>
+      </p:sp>
+      <p:sp>
+        <p:nvSpPr>
+          <p:cNvPr id="4" name="Shape 2"/>
+          <p:cNvSpPr/>
+          <p:nvPr/>
+        </p:nvSpPr>
+        <p:spPr>
+          <a:xfrm>
+            <a:off x="777240" y="6144768"/>
+            <a:ext cx="10637215" cy="0"/>
+          </a:xfrm>
+          <a:prstGeom prst="line">
+            <a:avLst/>
+          </a:prstGeom>
+          <a:noFill/>
+          <a:ln w="44450">
+            <a:solidFill>
+              <a:srgbClr val="E8622C"/>
+            </a:solidFill>
+            <a:prstDash val="solid"/>
+          </a:ln>
+        </p:spPr>
+      </p:sp>
+      <p:sp>
+        <p:nvSpPr>
+          <p:cNvPr id="5" name="Text 3"/>
+          <p:cNvSpPr/>
+          <p:nvPr/>
+        </p:nvSpPr>
+        <p:spPr>
+          <a:xfrm>
+            <a:off x="777240" y="1097280"/>
+            <a:ext cx="914400" cy="640080"/>
+          </a:xfrm>
+          <a:prstGeom prst="rect">
+            <a:avLst/>
+          </a:prstGeom>
+          <a:noFill/>
+          <a:ln/>
+        </p:spPr>
+        <p:txBody>
+          <a:bodyPr wrap="square" lIns="0" tIns="0" rIns="0" bIns="0" rtlCol="0" anchor="ctr"/>
           <a:lstStyle/>
           <a:p>
             <a:pPr indent="0" marL="0">
@@ -1486,40 +1462,116 @@
             <a:r>
               <a:rPr lang="en-US" sz="3000" b="1" dirty="0">
                 <a:solidFill>
-                  <a:srgbClr val="1B2418"/>
+                  <a:srgbClr val="E8622C"/>
                 </a:solidFill>
                 <a:latin typeface="Bookman Old Style" pitchFamily="34" charset="0"/>
                 <a:ea typeface="Bookman Old Style" pitchFamily="34" charset="-122"/>
                 <a:cs typeface="Bookman Old Style" pitchFamily="34" charset="-120"/>
               </a:rPr>
+              <a:t>01</a:t>
+            </a:r>
+            <a:endParaRPr lang="en-US" sz="3000" dirty="0"/>
+          </a:p>
+        </p:txBody>
+      </p:sp>
+      <p:sp>
+        <p:nvSpPr>
+          <p:cNvPr id="6" name="Text 4"/>
+          <p:cNvSpPr/>
+          <p:nvPr/>
+        </p:nvSpPr>
+        <p:spPr>
+          <a:xfrm>
+            <a:off x="1645920" y="1271016"/>
+            <a:ext cx="9768535" cy="274320"/>
+          </a:xfrm>
+          <a:prstGeom prst="rect">
+            <a:avLst/>
+          </a:prstGeom>
+          <a:noFill/>
+          <a:ln/>
+        </p:spPr>
+        <p:txBody>
+          <a:bodyPr wrap="square" lIns="0" tIns="0" rIns="0" bIns="0" rtlCol="0" anchor="ctr"/>
+          <a:lstStyle/>
+          <a:p>
+            <a:pPr indent="0" marL="0">
+              <a:buNone/>
+            </a:pPr>
+            <a:r>
+              <a:rPr lang="en-US" sz="1100" b="1" spc="200" kern="0" dirty="0">
+                <a:solidFill>
+                  <a:srgbClr val="8B98A6"/>
+                </a:solidFill>
+                <a:latin typeface="Calibri" pitchFamily="34" charset="0"/>
+                <a:ea typeface="Calibri" pitchFamily="34" charset="-122"/>
+                <a:cs typeface="Calibri" pitchFamily="34" charset="-120"/>
+              </a:rPr>
+              <a:t>ARCHITECTURE</a:t>
+            </a:r>
+            <a:endParaRPr lang="en-US" sz="1100" dirty="0"/>
+          </a:p>
+        </p:txBody>
+      </p:sp>
+      <p:sp>
+        <p:nvSpPr>
+          <p:cNvPr id="7" name="Text 5"/>
+          <p:cNvSpPr/>
+          <p:nvPr/>
+        </p:nvSpPr>
+        <p:spPr>
+          <a:xfrm>
+            <a:off x="777240" y="1746504"/>
+            <a:ext cx="10637215" cy="640080"/>
+          </a:xfrm>
+          <a:prstGeom prst="rect">
+            <a:avLst/>
+          </a:prstGeom>
+          <a:noFill/>
+          <a:ln/>
+        </p:spPr>
+        <p:txBody>
+          <a:bodyPr wrap="square" lIns="0" tIns="0" rIns="0" bIns="0" rtlCol="0" anchor="ctr"/>
+          <a:lstStyle/>
+          <a:p>
+            <a:pPr indent="0" marL="0">
+              <a:buNone/>
+            </a:pPr>
+            <a:r>
+              <a:rPr lang="en-US" sz="2300" b="1" dirty="0">
+                <a:solidFill>
+                  <a:srgbClr val="EEF2F6"/>
+                </a:solidFill>
+                <a:latin typeface="Bookman Old Style" pitchFamily="34" charset="0"/>
+                <a:ea typeface="Bookman Old Style" pitchFamily="34" charset="-122"/>
+                <a:cs typeface="Bookman Old Style" pitchFamily="34" charset="-120"/>
+              </a:rPr>
               <a:t>What I Built — Forest Edge to Cloud</a:t>
             </a:r>
-            <a:endParaRPr lang="en-US" sz="3000" dirty="0"/>
-          </a:p>
-        </p:txBody>
-      </p:sp>
-      <p:sp>
-        <p:nvSpPr>
-          <p:cNvPr id="3" name="Shape 1"/>
-          <p:cNvSpPr/>
-          <p:nvPr/>
-        </p:nvSpPr>
-        <p:spPr>
-          <a:xfrm>
-            <a:off x="3992728" y="1234440"/>
-            <a:ext cx="4206240" cy="658368"/>
+            <a:endParaRPr lang="en-US" sz="2300" dirty="0"/>
+          </a:p>
+        </p:txBody>
+      </p:sp>
+      <p:sp>
+        <p:nvSpPr>
+          <p:cNvPr id="8" name="Shape 6"/>
+          <p:cNvSpPr/>
+          <p:nvPr/>
+        </p:nvSpPr>
+        <p:spPr>
+          <a:xfrm>
+            <a:off x="777240" y="3337560"/>
+            <a:ext cx="1391869" cy="1965960"/>
           </a:xfrm>
           <a:prstGeom prst="roundRect">
-            <a:avLst>
-              <a:gd name="adj" fmla="val 11111"/>
-            </a:avLst>
+            <a:avLst/>
           </a:prstGeom>
           <a:solidFill>
-            <a:srgbClr val="EEF3EA"/>
+            <a:srgbClr val="E8622C"/>
           </a:solidFill>
-          <a:ln w="17780">
+          <a:ln w="12700">
             <a:solidFill>
-              <a:srgbClr val="6A9A52"/>
+              <a:srgbClr val="E8622C"/>
             </a:solidFill>
             <a:prstDash val="solid"/>
           </a:ln>
@@ -1527,34 +1579,14 @@
       </p:sp>
       <p:sp>
         <p:nvSpPr>
-          <p:cNvPr id="4" name="Shape 2"/>
-          <p:cNvSpPr/>
-          <p:nvPr/>
-        </p:nvSpPr>
-        <p:spPr>
-          <a:xfrm>
-            <a:off x="4193896" y="1481328"/>
-            <a:ext cx="164592" cy="164592"/>
-          </a:xfrm>
-          <a:prstGeom prst="ellipse">
-            <a:avLst/>
-          </a:prstGeom>
-          <a:solidFill>
-            <a:srgbClr val="6A9A52"/>
-          </a:solidFill>
-          <a:ln/>
-        </p:spPr>
-      </p:sp>
-      <p:sp>
-        <p:nvSpPr>
-          <p:cNvPr id="5" name="Text 3"/>
-          <p:cNvSpPr/>
-          <p:nvPr/>
-        </p:nvSpPr>
-        <p:spPr>
-          <a:xfrm>
-            <a:off x="4495648" y="1234440"/>
-            <a:ext cx="2194560" cy="658368"/>
+          <p:cNvPr id="9" name="Text 7"/>
+          <p:cNvSpPr/>
+          <p:nvPr/>
+        </p:nvSpPr>
+        <p:spPr>
+          <a:xfrm>
+            <a:off x="923544" y="3520440"/>
+            <a:ext cx="1099261" cy="320040"/>
           </a:xfrm>
           <a:prstGeom prst="rect">
             <a:avLst/>
@@ -1570,30 +1602,156 @@
               <a:buNone/>
             </a:pPr>
             <a:r>
-              <a:rPr lang="en-US" sz="1350" b="1" dirty="0">
-                <a:solidFill>
-                  <a:srgbClr val="1B2418"/>
+              <a:rPr lang="en-US" sz="1100" dirty="0">
+                <a:solidFill>
+                  <a:srgbClr val="FFFFFF"/>
+                </a:solidFill>
+                <a:latin typeface="Consolas" pitchFamily="34" charset="0"/>
+                <a:ea typeface="Consolas" pitchFamily="34" charset="-122"/>
+                <a:cs typeface="Consolas" pitchFamily="34" charset="-120"/>
+              </a:rPr>
+              <a:t>01</a:t>
+            </a:r>
+            <a:endParaRPr lang="en-US" sz="1100" dirty="0"/>
+          </a:p>
+        </p:txBody>
+      </p:sp>
+      <p:sp>
+        <p:nvSpPr>
+          <p:cNvPr id="10" name="Text 8"/>
+          <p:cNvSpPr/>
+          <p:nvPr/>
+        </p:nvSpPr>
+        <p:spPr>
+          <a:xfrm>
+            <a:off x="923544" y="3959352"/>
+            <a:ext cx="1099261" cy="868680"/>
+          </a:xfrm>
+          <a:prstGeom prst="rect">
+            <a:avLst/>
+          </a:prstGeom>
+          <a:noFill/>
+          <a:ln/>
+        </p:spPr>
+        <p:txBody>
+          <a:bodyPr wrap="square" lIns="0" tIns="0" rIns="0" bIns="0" rtlCol="0" anchor="t"/>
+          <a:lstStyle/>
+          <a:p>
+            <a:pPr indent="0" marL="0">
+              <a:lnSpc>
+                <a:spcPct val="96000"/>
+              </a:lnSpc>
+              <a:buNone/>
+            </a:pPr>
+            <a:r>
+              <a:rPr lang="en-US" sz="1300" b="1" dirty="0">
+                <a:solidFill>
+                  <a:srgbClr val="FFFFFF"/>
+                </a:solidFill>
+                <a:latin typeface="Bookman Old Style" pitchFamily="34" charset="0"/>
+                <a:ea typeface="Bookman Old Style" pitchFamily="34" charset="-122"/>
+                <a:cs typeface="Bookman Old Style" pitchFamily="34" charset="-120"/>
+              </a:rPr>
+              <a:t>Field sensors</a:t>
+            </a:r>
+            <a:endParaRPr lang="en-US" sz="1300" dirty="0"/>
+          </a:p>
+        </p:txBody>
+      </p:sp>
+      <p:sp>
+        <p:nvSpPr>
+          <p:cNvPr id="11" name="Text 9"/>
+          <p:cNvSpPr/>
+          <p:nvPr/>
+        </p:nvSpPr>
+        <p:spPr>
+          <a:xfrm>
+            <a:off x="923544" y="4818888"/>
+            <a:ext cx="1099261" cy="365760"/>
+          </a:xfrm>
+          <a:prstGeom prst="rect">
+            <a:avLst/>
+          </a:prstGeom>
+          <a:noFill/>
+          <a:ln/>
+        </p:spPr>
+        <p:txBody>
+          <a:bodyPr wrap="square" lIns="0" tIns="0" rIns="0" bIns="0" rtlCol="0" anchor="ctr"/>
+          <a:lstStyle/>
+          <a:p>
+            <a:pPr indent="0" marL="0">
+              <a:buNone/>
+            </a:pPr>
+            <a:r>
+              <a:rPr lang="en-US" sz="900" dirty="0">
+                <a:solidFill>
+                  <a:srgbClr val="FFFFFF"/>
                 </a:solidFill>
                 <a:latin typeface="Calibri" pitchFamily="34" charset="0"/>
                 <a:ea typeface="Calibri" pitchFamily="34" charset="-122"/>
                 <a:cs typeface="Calibri" pitchFamily="34" charset="-120"/>
               </a:rPr>
-              <a:t>Field sensors</a:t>
-            </a:r>
-            <a:endParaRPr lang="en-US" sz="1350" dirty="0"/>
-          </a:p>
-        </p:txBody>
-      </p:sp>
-      <p:sp>
-        <p:nvSpPr>
-          <p:cNvPr id="6" name="Text 4"/>
-          <p:cNvSpPr/>
-          <p:nvPr/>
-        </p:nvSpPr>
-        <p:spPr>
-          <a:xfrm>
-            <a:off x="6644488" y="1234440"/>
-            <a:ext cx="1463040" cy="658368"/>
+              <a:t>10 · 2 stations · 5 metrics</a:t>
+            </a:r>
+            <a:endParaRPr lang="en-US" sz="900" dirty="0"/>
+          </a:p>
+        </p:txBody>
+      </p:sp>
+      <p:sp>
+        <p:nvSpPr>
+          <p:cNvPr id="12" name="Shape 10"/>
+          <p:cNvSpPr/>
+          <p:nvPr/>
+        </p:nvSpPr>
+        <p:spPr>
+          <a:xfrm>
+            <a:off x="2242261" y="4210812"/>
+            <a:ext cx="310896" cy="219456"/>
+          </a:xfrm>
+          <a:prstGeom prst="rightArrow">
+            <a:avLst/>
+          </a:prstGeom>
+          <a:solidFill>
+            <a:srgbClr val="8B98A6"/>
+          </a:solidFill>
+          <a:ln/>
+        </p:spPr>
+      </p:sp>
+      <p:sp>
+        <p:nvSpPr>
+          <p:cNvPr id="13" name="Shape 11"/>
+          <p:cNvSpPr/>
+          <p:nvPr/>
+        </p:nvSpPr>
+        <p:spPr>
+          <a:xfrm>
+            <a:off x="2626309" y="3337560"/>
+            <a:ext cx="1391869" cy="1965960"/>
+          </a:xfrm>
+          <a:prstGeom prst="roundRect">
+            <a:avLst/>
+          </a:prstGeom>
+          <a:solidFill>
+            <a:srgbClr val="E8622C"/>
+          </a:solidFill>
+          <a:ln w="12700">
+            <a:solidFill>
+              <a:srgbClr val="E8622C"/>
+            </a:solidFill>
+            <a:prstDash val="solid"/>
+          </a:ln>
+        </p:spPr>
+      </p:sp>
+      <p:sp>
+        <p:nvSpPr>
+          <p:cNvPr id="14" name="Text 12"/>
+          <p:cNvSpPr/>
+          <p:nvPr/>
+        </p:nvSpPr>
+        <p:spPr>
+          <a:xfrm>
+            <a:off x="2772613" y="3520440"/>
+            <a:ext cx="1099261" cy="320040"/>
           </a:xfrm>
           <a:prstGeom prst="rect">
             <a:avLst/>
@@ -1605,70 +1763,145 @@
           <a:bodyPr wrap="square" lIns="0" tIns="0" rIns="0" bIns="0" rtlCol="0" anchor="ctr"/>
           <a:lstStyle/>
           <a:p>
-            <a:pPr algn="r" indent="0" marL="0">
-              <a:buNone/>
-            </a:pPr>
-            <a:r>
-              <a:rPr lang="en-US" sz="950" dirty="0">
-                <a:solidFill>
-                  <a:srgbClr val="5F6E55"/>
+            <a:pPr indent="0" marL="0">
+              <a:buNone/>
+            </a:pPr>
+            <a:r>
+              <a:rPr lang="en-US" sz="1100" dirty="0">
+                <a:solidFill>
+                  <a:srgbClr val="FFFFFF"/>
+                </a:solidFill>
+                <a:latin typeface="Consolas" pitchFamily="34" charset="0"/>
+                <a:ea typeface="Consolas" pitchFamily="34" charset="-122"/>
+                <a:cs typeface="Consolas" pitchFamily="34" charset="-120"/>
+              </a:rPr>
+              <a:t>02</a:t>
+            </a:r>
+            <a:endParaRPr lang="en-US" sz="1100" dirty="0"/>
+          </a:p>
+        </p:txBody>
+      </p:sp>
+      <p:sp>
+        <p:nvSpPr>
+          <p:cNvPr id="15" name="Text 13"/>
+          <p:cNvSpPr/>
+          <p:nvPr/>
+        </p:nvSpPr>
+        <p:spPr>
+          <a:xfrm>
+            <a:off x="2772613" y="3959352"/>
+            <a:ext cx="1099261" cy="868680"/>
+          </a:xfrm>
+          <a:prstGeom prst="rect">
+            <a:avLst/>
+          </a:prstGeom>
+          <a:noFill/>
+          <a:ln/>
+        </p:spPr>
+        <p:txBody>
+          <a:bodyPr wrap="square" lIns="0" tIns="0" rIns="0" bIns="0" rtlCol="0" anchor="t"/>
+          <a:lstStyle/>
+          <a:p>
+            <a:pPr indent="0" marL="0">
+              <a:lnSpc>
+                <a:spcPct val="96000"/>
+              </a:lnSpc>
+              <a:buNone/>
+            </a:pPr>
+            <a:r>
+              <a:rPr lang="en-US" sz="1300" b="1" dirty="0">
+                <a:solidFill>
+                  <a:srgbClr val="FFFFFF"/>
+                </a:solidFill>
+                <a:latin typeface="Bookman Old Style" pitchFamily="34" charset="0"/>
+                <a:ea typeface="Bookman Old Style" pitchFamily="34" charset="-122"/>
+                <a:cs typeface="Bookman Old Style" pitchFamily="34" charset="-120"/>
+              </a:rPr>
+              <a:t>Fog node</a:t>
+            </a:r>
+            <a:endParaRPr lang="en-US" sz="1300" dirty="0"/>
+          </a:p>
+        </p:txBody>
+      </p:sp>
+      <p:sp>
+        <p:nvSpPr>
+          <p:cNvPr id="16" name="Text 14"/>
+          <p:cNvSpPr/>
+          <p:nvPr/>
+        </p:nvSpPr>
+        <p:spPr>
+          <a:xfrm>
+            <a:off x="2772613" y="4818888"/>
+            <a:ext cx="1099261" cy="365760"/>
+          </a:xfrm>
+          <a:prstGeom prst="rect">
+            <a:avLst/>
+          </a:prstGeom>
+          <a:noFill/>
+          <a:ln/>
+        </p:spPr>
+        <p:txBody>
+          <a:bodyPr wrap="square" lIns="0" tIns="0" rIns="0" bIns="0" rtlCol="0" anchor="ctr"/>
+          <a:lstStyle/>
+          <a:p>
+            <a:pPr indent="0" marL="0">
+              <a:buNone/>
+            </a:pPr>
+            <a:r>
+              <a:rPr lang="en-US" sz="900" dirty="0">
+                <a:solidFill>
+                  <a:srgbClr val="FFFFFF"/>
                 </a:solidFill>
                 <a:latin typeface="Calibri" pitchFamily="34" charset="0"/>
                 <a:ea typeface="Calibri" pitchFamily="34" charset="-122"/>
                 <a:cs typeface="Calibri" pitchFamily="34" charset="-120"/>
               </a:rPr>
-              <a:t>10 · 2 stations · 5 metrics</a:t>
-            </a:r>
-            <a:endParaRPr lang="en-US" sz="950" dirty="0"/>
-          </a:p>
-        </p:txBody>
-      </p:sp>
-      <p:sp>
-        <p:nvSpPr>
-          <p:cNvPr id="7" name="Shape 5"/>
-          <p:cNvSpPr/>
-          <p:nvPr/>
-        </p:nvSpPr>
-        <p:spPr>
-          <a:xfrm>
-            <a:off x="6095848" y="1892808"/>
-            <a:ext cx="0" cy="219456"/>
-          </a:xfrm>
-          <a:prstGeom prst="line">
-            <a:avLst/>
-          </a:prstGeom>
-          <a:noFill/>
-          <a:ln w="25400">
+              <a:t>windows · fire alerts</a:t>
+            </a:r>
+            <a:endParaRPr lang="en-US" sz="900" dirty="0"/>
+          </a:p>
+        </p:txBody>
+      </p:sp>
+      <p:sp>
+        <p:nvSpPr>
+          <p:cNvPr id="17" name="Shape 15"/>
+          <p:cNvSpPr/>
+          <p:nvPr/>
+        </p:nvSpPr>
+        <p:spPr>
+          <a:xfrm>
+            <a:off x="4091330" y="4210812"/>
+            <a:ext cx="310896" cy="219456"/>
+          </a:xfrm>
+          <a:prstGeom prst="rightArrow">
+            <a:avLst/>
+          </a:prstGeom>
+          <a:solidFill>
+            <a:srgbClr val="8B98A6"/>
+          </a:solidFill>
+          <a:ln/>
+        </p:spPr>
+      </p:sp>
+      <p:sp>
+        <p:nvSpPr>
+          <p:cNvPr id="18" name="Shape 16"/>
+          <p:cNvSpPr/>
+          <p:nvPr/>
+        </p:nvSpPr>
+        <p:spPr>
+          <a:xfrm>
+            <a:off x="4475378" y="3337560"/>
+            <a:ext cx="1391869" cy="1965960"/>
+          </a:xfrm>
+          <a:prstGeom prst="roundRect">
+            <a:avLst/>
+          </a:prstGeom>
+          <a:solidFill>
+            <a:srgbClr val="241D14"/>
+          </a:solidFill>
+          <a:ln w="12700">
             <a:solidFill>
-              <a:srgbClr val="6A9A52"/>
-            </a:solidFill>
-            <a:prstDash val="solid"/>
-            <a:tailEnd type="triangle"/>
-          </a:ln>
-        </p:spPr>
-      </p:sp>
-      <p:sp>
-        <p:nvSpPr>
-          <p:cNvPr id="8" name="Shape 6"/>
-          <p:cNvSpPr/>
-          <p:nvPr/>
-        </p:nvSpPr>
-        <p:spPr>
-          <a:xfrm>
-            <a:off x="3992728" y="2112264"/>
-            <a:ext cx="4206240" cy="658368"/>
-          </a:xfrm>
-          <a:prstGeom prst="roundRect">
-            <a:avLst>
-              <a:gd name="adj" fmla="val 11111"/>
-            </a:avLst>
-          </a:prstGeom>
-          <a:solidFill>
-            <a:srgbClr val="EEF3EA"/>
-          </a:solidFill>
-          <a:ln w="17780">
-            <a:solidFill>
-              <a:srgbClr val="6A9A52"/>
+              <a:srgbClr val="383128"/>
             </a:solidFill>
             <a:prstDash val="solid"/>
           </a:ln>
@@ -1676,34 +1909,14 @@
       </p:sp>
       <p:sp>
         <p:nvSpPr>
-          <p:cNvPr id="9" name="Shape 7"/>
-          <p:cNvSpPr/>
-          <p:nvPr/>
-        </p:nvSpPr>
-        <p:spPr>
-          <a:xfrm>
-            <a:off x="4193896" y="2359152"/>
-            <a:ext cx="164592" cy="164592"/>
-          </a:xfrm>
-          <a:prstGeom prst="ellipse">
-            <a:avLst/>
-          </a:prstGeom>
-          <a:solidFill>
-            <a:srgbClr val="6A9A52"/>
-          </a:solidFill>
-          <a:ln/>
-        </p:spPr>
-      </p:sp>
-      <p:sp>
-        <p:nvSpPr>
-          <p:cNvPr id="10" name="Text 8"/>
-          <p:cNvSpPr/>
-          <p:nvPr/>
-        </p:nvSpPr>
-        <p:spPr>
-          <a:xfrm>
-            <a:off x="4495648" y="2112264"/>
-            <a:ext cx="2194560" cy="658368"/>
+          <p:cNvPr id="19" name="Text 17"/>
+          <p:cNvSpPr/>
+          <p:nvPr/>
+        </p:nvSpPr>
+        <p:spPr>
+          <a:xfrm>
+            <a:off x="4621682" y="3520440"/>
+            <a:ext cx="1099261" cy="320040"/>
           </a:xfrm>
           <a:prstGeom prst="rect">
             <a:avLst/>
@@ -1719,30 +1932,156 @@
               <a:buNone/>
             </a:pPr>
             <a:r>
-              <a:rPr lang="en-US" sz="1350" b="1" dirty="0">
-                <a:solidFill>
-                  <a:srgbClr val="1B2418"/>
+              <a:rPr lang="en-US" sz="1100" dirty="0">
+                <a:solidFill>
+                  <a:srgbClr val="E8622C"/>
+                </a:solidFill>
+                <a:latin typeface="Consolas" pitchFamily="34" charset="0"/>
+                <a:ea typeface="Consolas" pitchFamily="34" charset="-122"/>
+                <a:cs typeface="Consolas" pitchFamily="34" charset="-120"/>
+              </a:rPr>
+              <a:t>03</a:t>
+            </a:r>
+            <a:endParaRPr lang="en-US" sz="1100" dirty="0"/>
+          </a:p>
+        </p:txBody>
+      </p:sp>
+      <p:sp>
+        <p:nvSpPr>
+          <p:cNvPr id="20" name="Text 18"/>
+          <p:cNvSpPr/>
+          <p:nvPr/>
+        </p:nvSpPr>
+        <p:spPr>
+          <a:xfrm>
+            <a:off x="4621682" y="3959352"/>
+            <a:ext cx="1099261" cy="868680"/>
+          </a:xfrm>
+          <a:prstGeom prst="rect">
+            <a:avLst/>
+          </a:prstGeom>
+          <a:noFill/>
+          <a:ln/>
+        </p:spPr>
+        <p:txBody>
+          <a:bodyPr wrap="square" lIns="0" tIns="0" rIns="0" bIns="0" rtlCol="0" anchor="t"/>
+          <a:lstStyle/>
+          <a:p>
+            <a:pPr indent="0" marL="0">
+              <a:lnSpc>
+                <a:spcPct val="96000"/>
+              </a:lnSpc>
+              <a:buNone/>
+            </a:pPr>
+            <a:r>
+              <a:rPr lang="en-US" sz="1300" b="1" dirty="0">
+                <a:solidFill>
+                  <a:srgbClr val="EEF2F6"/>
+                </a:solidFill>
+                <a:latin typeface="Bookman Old Style" pitchFamily="34" charset="0"/>
+                <a:ea typeface="Bookman Old Style" pitchFamily="34" charset="-122"/>
+                <a:cs typeface="Bookman Old Style" pitchFamily="34" charset="-120"/>
+              </a:rPr>
+              <a:t>Amazon SQS</a:t>
+            </a:r>
+            <a:endParaRPr lang="en-US" sz="1300" dirty="0"/>
+          </a:p>
+        </p:txBody>
+      </p:sp>
+      <p:sp>
+        <p:nvSpPr>
+          <p:cNvPr id="21" name="Text 19"/>
+          <p:cNvSpPr/>
+          <p:nvPr/>
+        </p:nvSpPr>
+        <p:spPr>
+          <a:xfrm>
+            <a:off x="4621682" y="4818888"/>
+            <a:ext cx="1099261" cy="365760"/>
+          </a:xfrm>
+          <a:prstGeom prst="rect">
+            <a:avLst/>
+          </a:prstGeom>
+          <a:noFill/>
+          <a:ln/>
+        </p:spPr>
+        <p:txBody>
+          <a:bodyPr wrap="square" lIns="0" tIns="0" rIns="0" bIns="0" rtlCol="0" anchor="ctr"/>
+          <a:lstStyle/>
+          <a:p>
+            <a:pPr indent="0" marL="0">
+              <a:buNone/>
+            </a:pPr>
+            <a:r>
+              <a:rPr lang="en-US" sz="900" dirty="0">
+                <a:solidFill>
+                  <a:srgbClr val="8B98A6"/>
                 </a:solidFill>
                 <a:latin typeface="Calibri" pitchFamily="34" charset="0"/>
                 <a:ea typeface="Calibri" pitchFamily="34" charset="-122"/>
                 <a:cs typeface="Calibri" pitchFamily="34" charset="-120"/>
               </a:rPr>
-              <a:t>Fog node</a:t>
-            </a:r>
-            <a:endParaRPr lang="en-US" sz="1350" dirty="0"/>
-          </a:p>
-        </p:txBody>
-      </p:sp>
-      <p:sp>
-        <p:nvSpPr>
-          <p:cNvPr id="11" name="Text 9"/>
-          <p:cNvSpPr/>
-          <p:nvPr/>
-        </p:nvSpPr>
-        <p:spPr>
-          <a:xfrm>
-            <a:off x="6644488" y="2112264"/>
-            <a:ext cx="1463040" cy="658368"/>
+              <a:t>batched sends</a:t>
+            </a:r>
+            <a:endParaRPr lang="en-US" sz="900" dirty="0"/>
+          </a:p>
+        </p:txBody>
+      </p:sp>
+      <p:sp>
+        <p:nvSpPr>
+          <p:cNvPr id="22" name="Shape 20"/>
+          <p:cNvSpPr/>
+          <p:nvPr/>
+        </p:nvSpPr>
+        <p:spPr>
+          <a:xfrm>
+            <a:off x="5940400" y="4210812"/>
+            <a:ext cx="310896" cy="219456"/>
+          </a:xfrm>
+          <a:prstGeom prst="rightArrow">
+            <a:avLst/>
+          </a:prstGeom>
+          <a:solidFill>
+            <a:srgbClr val="8B98A6"/>
+          </a:solidFill>
+          <a:ln/>
+        </p:spPr>
+      </p:sp>
+      <p:sp>
+        <p:nvSpPr>
+          <p:cNvPr id="23" name="Shape 21"/>
+          <p:cNvSpPr/>
+          <p:nvPr/>
+        </p:nvSpPr>
+        <p:spPr>
+          <a:xfrm>
+            <a:off x="6324448" y="3337560"/>
+            <a:ext cx="1391869" cy="1965960"/>
+          </a:xfrm>
+          <a:prstGeom prst="roundRect">
+            <a:avLst/>
+          </a:prstGeom>
+          <a:solidFill>
+            <a:srgbClr val="241D14"/>
+          </a:solidFill>
+          <a:ln w="12700">
+            <a:solidFill>
+              <a:srgbClr val="383128"/>
+            </a:solidFill>
+            <a:prstDash val="solid"/>
+          </a:ln>
+        </p:spPr>
+      </p:sp>
+      <p:sp>
+        <p:nvSpPr>
+          <p:cNvPr id="24" name="Text 22"/>
+          <p:cNvSpPr/>
+          <p:nvPr/>
+        </p:nvSpPr>
+        <p:spPr>
+          <a:xfrm>
+            <a:off x="6470752" y="3520440"/>
+            <a:ext cx="1099261" cy="320040"/>
           </a:xfrm>
           <a:prstGeom prst="rect">
             <a:avLst/>
@@ -1754,70 +2093,145 @@
           <a:bodyPr wrap="square" lIns="0" tIns="0" rIns="0" bIns="0" rtlCol="0" anchor="ctr"/>
           <a:lstStyle/>
           <a:p>
-            <a:pPr algn="r" indent="0" marL="0">
-              <a:buNone/>
-            </a:pPr>
-            <a:r>
-              <a:rPr lang="en-US" sz="950" dirty="0">
-                <a:solidFill>
-                  <a:srgbClr val="5F6E55"/>
+            <a:pPr indent="0" marL="0">
+              <a:buNone/>
+            </a:pPr>
+            <a:r>
+              <a:rPr lang="en-US" sz="1100" dirty="0">
+                <a:solidFill>
+                  <a:srgbClr val="E8622C"/>
+                </a:solidFill>
+                <a:latin typeface="Consolas" pitchFamily="34" charset="0"/>
+                <a:ea typeface="Consolas" pitchFamily="34" charset="-122"/>
+                <a:cs typeface="Consolas" pitchFamily="34" charset="-120"/>
+              </a:rPr>
+              <a:t>04</a:t>
+            </a:r>
+            <a:endParaRPr lang="en-US" sz="1100" dirty="0"/>
+          </a:p>
+        </p:txBody>
+      </p:sp>
+      <p:sp>
+        <p:nvSpPr>
+          <p:cNvPr id="25" name="Text 23"/>
+          <p:cNvSpPr/>
+          <p:nvPr/>
+        </p:nvSpPr>
+        <p:spPr>
+          <a:xfrm>
+            <a:off x="6470752" y="3959352"/>
+            <a:ext cx="1099261" cy="868680"/>
+          </a:xfrm>
+          <a:prstGeom prst="rect">
+            <a:avLst/>
+          </a:prstGeom>
+          <a:noFill/>
+          <a:ln/>
+        </p:spPr>
+        <p:txBody>
+          <a:bodyPr wrap="square" lIns="0" tIns="0" rIns="0" bIns="0" rtlCol="0" anchor="t"/>
+          <a:lstStyle/>
+          <a:p>
+            <a:pPr indent="0" marL="0">
+              <a:lnSpc>
+                <a:spcPct val="96000"/>
+              </a:lnSpc>
+              <a:buNone/>
+            </a:pPr>
+            <a:r>
+              <a:rPr lang="en-US" sz="1300" b="1" dirty="0">
+                <a:solidFill>
+                  <a:srgbClr val="EEF2F6"/>
+                </a:solidFill>
+                <a:latin typeface="Bookman Old Style" pitchFamily="34" charset="0"/>
+                <a:ea typeface="Bookman Old Style" pitchFamily="34" charset="-122"/>
+                <a:cs typeface="Bookman Old Style" pitchFamily="34" charset="-120"/>
+              </a:rPr>
+              <a:t>AWS Lambda</a:t>
+            </a:r>
+            <a:endParaRPr lang="en-US" sz="1300" dirty="0"/>
+          </a:p>
+        </p:txBody>
+      </p:sp>
+      <p:sp>
+        <p:nvSpPr>
+          <p:cNvPr id="26" name="Text 24"/>
+          <p:cNvSpPr/>
+          <p:nvPr/>
+        </p:nvSpPr>
+        <p:spPr>
+          <a:xfrm>
+            <a:off x="6470752" y="4818888"/>
+            <a:ext cx="1099261" cy="365760"/>
+          </a:xfrm>
+          <a:prstGeom prst="rect">
+            <a:avLst/>
+          </a:prstGeom>
+          <a:noFill/>
+          <a:ln/>
+        </p:spPr>
+        <p:txBody>
+          <a:bodyPr wrap="square" lIns="0" tIns="0" rIns="0" bIns="0" rtlCol="0" anchor="ctr"/>
+          <a:lstStyle/>
+          <a:p>
+            <a:pPr indent="0" marL="0">
+              <a:buNone/>
+            </a:pPr>
+            <a:r>
+              <a:rPr lang="en-US" sz="900" dirty="0">
+                <a:solidFill>
+                  <a:srgbClr val="8B98A6"/>
                 </a:solidFill>
                 <a:latin typeface="Calibri" pitchFamily="34" charset="0"/>
                 <a:ea typeface="Calibri" pitchFamily="34" charset="-122"/>
                 <a:cs typeface="Calibri" pitchFamily="34" charset="-120"/>
               </a:rPr>
-              <a:t>windows · fire alerts</a:t>
-            </a:r>
-            <a:endParaRPr lang="en-US" sz="950" dirty="0"/>
-          </a:p>
-        </p:txBody>
-      </p:sp>
-      <p:sp>
-        <p:nvSpPr>
-          <p:cNvPr id="12" name="Shape 10"/>
-          <p:cNvSpPr/>
-          <p:nvPr/>
-        </p:nvSpPr>
-        <p:spPr>
-          <a:xfrm>
-            <a:off x="6095848" y="2770632"/>
-            <a:ext cx="0" cy="219456"/>
-          </a:xfrm>
-          <a:prstGeom prst="line">
-            <a:avLst/>
-          </a:prstGeom>
-          <a:noFill/>
-          <a:ln w="25400">
+              <a:t>nodejs20 ingest</a:t>
+            </a:r>
+            <a:endParaRPr lang="en-US" sz="900" dirty="0"/>
+          </a:p>
+        </p:txBody>
+      </p:sp>
+      <p:sp>
+        <p:nvSpPr>
+          <p:cNvPr id="27" name="Shape 25"/>
+          <p:cNvSpPr/>
+          <p:nvPr/>
+        </p:nvSpPr>
+        <p:spPr>
+          <a:xfrm>
+            <a:off x="7789469" y="4210812"/>
+            <a:ext cx="310896" cy="219456"/>
+          </a:xfrm>
+          <a:prstGeom prst="rightArrow">
+            <a:avLst/>
+          </a:prstGeom>
+          <a:solidFill>
+            <a:srgbClr val="8B98A6"/>
+          </a:solidFill>
+          <a:ln/>
+        </p:spPr>
+      </p:sp>
+      <p:sp>
+        <p:nvSpPr>
+          <p:cNvPr id="28" name="Shape 26"/>
+          <p:cNvSpPr/>
+          <p:nvPr/>
+        </p:nvSpPr>
+        <p:spPr>
+          <a:xfrm>
+            <a:off x="8173517" y="3337560"/>
+            <a:ext cx="1391869" cy="1965960"/>
+          </a:xfrm>
+          <a:prstGeom prst="roundRect">
+            <a:avLst/>
+          </a:prstGeom>
+          <a:solidFill>
+            <a:srgbClr val="241D14"/>
+          </a:solidFill>
+          <a:ln w="12700">
             <a:solidFill>
-              <a:srgbClr val="6A9A52"/>
-            </a:solidFill>
-            <a:prstDash val="solid"/>
-            <a:tailEnd type="triangle"/>
-          </a:ln>
-        </p:spPr>
-      </p:sp>
-      <p:sp>
-        <p:nvSpPr>
-          <p:cNvPr id="13" name="Shape 11"/>
-          <p:cNvSpPr/>
-          <p:nvPr/>
-        </p:nvSpPr>
-        <p:spPr>
-          <a:xfrm>
-            <a:off x="3992728" y="2990088"/>
-            <a:ext cx="4206240" cy="658368"/>
-          </a:xfrm>
-          <a:prstGeom prst="roundRect">
-            <a:avLst>
-              <a:gd name="adj" fmla="val 11111"/>
-            </a:avLst>
-          </a:prstGeom>
-          <a:solidFill>
-            <a:srgbClr val="EEF3EA"/>
-          </a:solidFill>
-          <a:ln w="17780">
-            <a:solidFill>
-              <a:srgbClr val="2C5F2D"/>
+              <a:srgbClr val="383128"/>
             </a:solidFill>
             <a:prstDash val="solid"/>
           </a:ln>
@@ -1825,34 +2239,14 @@
       </p:sp>
       <p:sp>
         <p:nvSpPr>
-          <p:cNvPr id="14" name="Shape 12"/>
-          <p:cNvSpPr/>
-          <p:nvPr/>
-        </p:nvSpPr>
-        <p:spPr>
-          <a:xfrm>
-            <a:off x="4193896" y="3236976"/>
-            <a:ext cx="164592" cy="164592"/>
-          </a:xfrm>
-          <a:prstGeom prst="ellipse">
-            <a:avLst/>
-          </a:prstGeom>
-          <a:solidFill>
-            <a:srgbClr val="2C5F2D"/>
-          </a:solidFill>
-          <a:ln/>
-        </p:spPr>
-      </p:sp>
-      <p:sp>
-        <p:nvSpPr>
-          <p:cNvPr id="15" name="Text 13"/>
-          <p:cNvSpPr/>
-          <p:nvPr/>
-        </p:nvSpPr>
-        <p:spPr>
-          <a:xfrm>
-            <a:off x="4495648" y="2990088"/>
-            <a:ext cx="2194560" cy="658368"/>
+          <p:cNvPr id="29" name="Text 27"/>
+          <p:cNvSpPr/>
+          <p:nvPr/>
+        </p:nvSpPr>
+        <p:spPr>
+          <a:xfrm>
+            <a:off x="8319821" y="3520440"/>
+            <a:ext cx="1099261" cy="320040"/>
           </a:xfrm>
           <a:prstGeom prst="rect">
             <a:avLst/>
@@ -1868,30 +2262,156 @@
               <a:buNone/>
             </a:pPr>
             <a:r>
-              <a:rPr lang="en-US" sz="1350" b="1" dirty="0">
-                <a:solidFill>
-                  <a:srgbClr val="1B2418"/>
+              <a:rPr lang="en-US" sz="1100" dirty="0">
+                <a:solidFill>
+                  <a:srgbClr val="E8622C"/>
+                </a:solidFill>
+                <a:latin typeface="Consolas" pitchFamily="34" charset="0"/>
+                <a:ea typeface="Consolas" pitchFamily="34" charset="-122"/>
+                <a:cs typeface="Consolas" pitchFamily="34" charset="-120"/>
+              </a:rPr>
+              <a:t>05</a:t>
+            </a:r>
+            <a:endParaRPr lang="en-US" sz="1100" dirty="0"/>
+          </a:p>
+        </p:txBody>
+      </p:sp>
+      <p:sp>
+        <p:nvSpPr>
+          <p:cNvPr id="30" name="Text 28"/>
+          <p:cNvSpPr/>
+          <p:nvPr/>
+        </p:nvSpPr>
+        <p:spPr>
+          <a:xfrm>
+            <a:off x="8319821" y="3959352"/>
+            <a:ext cx="1099261" cy="868680"/>
+          </a:xfrm>
+          <a:prstGeom prst="rect">
+            <a:avLst/>
+          </a:prstGeom>
+          <a:noFill/>
+          <a:ln/>
+        </p:spPr>
+        <p:txBody>
+          <a:bodyPr wrap="square" lIns="0" tIns="0" rIns="0" bIns="0" rtlCol="0" anchor="t"/>
+          <a:lstStyle/>
+          <a:p>
+            <a:pPr indent="0" marL="0">
+              <a:lnSpc>
+                <a:spcPct val="96000"/>
+              </a:lnSpc>
+              <a:buNone/>
+            </a:pPr>
+            <a:r>
+              <a:rPr lang="en-US" sz="1300" b="1" dirty="0">
+                <a:solidFill>
+                  <a:srgbClr val="EEF2F6"/>
+                </a:solidFill>
+                <a:latin typeface="Bookman Old Style" pitchFamily="34" charset="0"/>
+                <a:ea typeface="Bookman Old Style" pitchFamily="34" charset="-122"/>
+                <a:cs typeface="Bookman Old Style" pitchFamily="34" charset="-120"/>
+              </a:rPr>
+              <a:t>DynamoDB</a:t>
+            </a:r>
+            <a:endParaRPr lang="en-US" sz="1300" dirty="0"/>
+          </a:p>
+        </p:txBody>
+      </p:sp>
+      <p:sp>
+        <p:nvSpPr>
+          <p:cNvPr id="31" name="Text 29"/>
+          <p:cNvSpPr/>
+          <p:nvPr/>
+        </p:nvSpPr>
+        <p:spPr>
+          <a:xfrm>
+            <a:off x="8319821" y="4818888"/>
+            <a:ext cx="1099261" cy="365760"/>
+          </a:xfrm>
+          <a:prstGeom prst="rect">
+            <a:avLst/>
+          </a:prstGeom>
+          <a:noFill/>
+          <a:ln/>
+        </p:spPr>
+        <p:txBody>
+          <a:bodyPr wrap="square" lIns="0" tIns="0" rIns="0" bIns="0" rtlCol="0" anchor="ctr"/>
+          <a:lstStyle/>
+          <a:p>
+            <a:pPr indent="0" marL="0">
+              <a:buNone/>
+            </a:pPr>
+            <a:r>
+              <a:rPr lang="en-US" sz="900" dirty="0">
+                <a:solidFill>
+                  <a:srgbClr val="8B98A6"/>
                 </a:solidFill>
                 <a:latin typeface="Calibri" pitchFamily="34" charset="0"/>
                 <a:ea typeface="Calibri" pitchFamily="34" charset="-122"/>
                 <a:cs typeface="Calibri" pitchFamily="34" charset="-120"/>
               </a:rPr>
-              <a:t>Amazon SQS</a:t>
-            </a:r>
-            <a:endParaRPr lang="en-US" sz="1350" dirty="0"/>
-          </a:p>
-        </p:txBody>
-      </p:sp>
-      <p:sp>
-        <p:nvSpPr>
-          <p:cNvPr id="16" name="Text 14"/>
-          <p:cNvSpPr/>
-          <p:nvPr/>
-        </p:nvSpPr>
-        <p:spPr>
-          <a:xfrm>
-            <a:off x="6644488" y="2990088"/>
-            <a:ext cx="1463040" cy="658368"/>
+              <a:t>window history</a:t>
+            </a:r>
+            <a:endParaRPr lang="en-US" sz="900" dirty="0"/>
+          </a:p>
+        </p:txBody>
+      </p:sp>
+      <p:sp>
+        <p:nvSpPr>
+          <p:cNvPr id="32" name="Shape 30"/>
+          <p:cNvSpPr/>
+          <p:nvPr/>
+        </p:nvSpPr>
+        <p:spPr>
+          <a:xfrm>
+            <a:off x="9638538" y="4210812"/>
+            <a:ext cx="310896" cy="219456"/>
+          </a:xfrm>
+          <a:prstGeom prst="rightArrow">
+            <a:avLst/>
+          </a:prstGeom>
+          <a:solidFill>
+            <a:srgbClr val="8B98A6"/>
+          </a:solidFill>
+          <a:ln/>
+        </p:spPr>
+      </p:sp>
+      <p:sp>
+        <p:nvSpPr>
+          <p:cNvPr id="33" name="Shape 31"/>
+          <p:cNvSpPr/>
+          <p:nvPr/>
+        </p:nvSpPr>
+        <p:spPr>
+          <a:xfrm>
+            <a:off x="10022586" y="3337560"/>
+            <a:ext cx="1391869" cy="1965960"/>
+          </a:xfrm>
+          <a:prstGeom prst="roundRect">
+            <a:avLst/>
+          </a:prstGeom>
+          <a:solidFill>
+            <a:srgbClr val="241D14"/>
+          </a:solidFill>
+          <a:ln w="12700">
+            <a:solidFill>
+              <a:srgbClr val="383128"/>
+            </a:solidFill>
+            <a:prstDash val="solid"/>
+          </a:ln>
+        </p:spPr>
+      </p:sp>
+      <p:sp>
+        <p:nvSpPr>
+          <p:cNvPr id="34" name="Text 32"/>
+          <p:cNvSpPr/>
+          <p:nvPr/>
+        </p:nvSpPr>
+        <p:spPr>
+          <a:xfrm>
+            <a:off x="10168890" y="3520440"/>
+            <a:ext cx="1099261" cy="320040"/>
           </a:xfrm>
           <a:prstGeom prst="rect">
             <a:avLst/>
@@ -1903,585 +2423,102 @@
           <a:bodyPr wrap="square" lIns="0" tIns="0" rIns="0" bIns="0" rtlCol="0" anchor="ctr"/>
           <a:lstStyle/>
           <a:p>
-            <a:pPr algn="r" indent="0" marL="0">
-              <a:buNone/>
-            </a:pPr>
-            <a:r>
-              <a:rPr lang="en-US" sz="950" dirty="0">
-                <a:solidFill>
-                  <a:srgbClr val="5F6E55"/>
+            <a:pPr indent="0" marL="0">
+              <a:buNone/>
+            </a:pPr>
+            <a:r>
+              <a:rPr lang="en-US" sz="1100" dirty="0">
+                <a:solidFill>
+                  <a:srgbClr val="E8622C"/>
+                </a:solidFill>
+                <a:latin typeface="Consolas" pitchFamily="34" charset="0"/>
+                <a:ea typeface="Consolas" pitchFamily="34" charset="-122"/>
+                <a:cs typeface="Consolas" pitchFamily="34" charset="-120"/>
+              </a:rPr>
+              <a:t>06</a:t>
+            </a:r>
+            <a:endParaRPr lang="en-US" sz="1100" dirty="0"/>
+          </a:p>
+        </p:txBody>
+      </p:sp>
+      <p:sp>
+        <p:nvSpPr>
+          <p:cNvPr id="35" name="Text 33"/>
+          <p:cNvSpPr/>
+          <p:nvPr/>
+        </p:nvSpPr>
+        <p:spPr>
+          <a:xfrm>
+            <a:off x="10168890" y="3959352"/>
+            <a:ext cx="1099261" cy="868680"/>
+          </a:xfrm>
+          <a:prstGeom prst="rect">
+            <a:avLst/>
+          </a:prstGeom>
+          <a:noFill/>
+          <a:ln/>
+        </p:spPr>
+        <p:txBody>
+          <a:bodyPr wrap="square" lIns="0" tIns="0" rIns="0" bIns="0" rtlCol="0" anchor="t"/>
+          <a:lstStyle/>
+          <a:p>
+            <a:pPr indent="0" marL="0">
+              <a:lnSpc>
+                <a:spcPct val="96000"/>
+              </a:lnSpc>
+              <a:buNone/>
+            </a:pPr>
+            <a:r>
+              <a:rPr lang="en-US" sz="1300" b="1" dirty="0">
+                <a:solidFill>
+                  <a:srgbClr val="EEF2F6"/>
+                </a:solidFill>
+                <a:latin typeface="Bookman Old Style" pitchFamily="34" charset="0"/>
+                <a:ea typeface="Bookman Old Style" pitchFamily="34" charset="-122"/>
+                <a:cs typeface="Bookman Old Style" pitchFamily="34" charset="-120"/>
+              </a:rPr>
+              <a:t>API GW + S3</a:t>
+            </a:r>
+            <a:endParaRPr lang="en-US" sz="1300" dirty="0"/>
+          </a:p>
+        </p:txBody>
+      </p:sp>
+      <p:sp>
+        <p:nvSpPr>
+          <p:cNvPr id="36" name="Text 34"/>
+          <p:cNvSpPr/>
+          <p:nvPr/>
+        </p:nvSpPr>
+        <p:spPr>
+          <a:xfrm>
+            <a:off x="10168890" y="4818888"/>
+            <a:ext cx="1099261" cy="365760"/>
+          </a:xfrm>
+          <a:prstGeom prst="rect">
+            <a:avLst/>
+          </a:prstGeom>
+          <a:noFill/>
+          <a:ln/>
+        </p:spPr>
+        <p:txBody>
+          <a:bodyPr wrap="square" lIns="0" tIns="0" rIns="0" bIns="0" rtlCol="0" anchor="ctr"/>
+          <a:lstStyle/>
+          <a:p>
+            <a:pPr indent="0" marL="0">
+              <a:buNone/>
+            </a:pPr>
+            <a:r>
+              <a:rPr lang="en-US" sz="900" dirty="0">
+                <a:solidFill>
+                  <a:srgbClr val="8B98A6"/>
                 </a:solidFill>
                 <a:latin typeface="Calibri" pitchFamily="34" charset="0"/>
                 <a:ea typeface="Calibri" pitchFamily="34" charset="-122"/>
                 <a:cs typeface="Calibri" pitchFamily="34" charset="-120"/>
               </a:rPr>
-              <a:t>batched sends</a:t>
-            </a:r>
-            <a:endParaRPr lang="en-US" sz="950" dirty="0"/>
-          </a:p>
-        </p:txBody>
-      </p:sp>
-      <p:sp>
-        <p:nvSpPr>
-          <p:cNvPr id="17" name="Shape 15"/>
-          <p:cNvSpPr/>
-          <p:nvPr/>
-        </p:nvSpPr>
-        <p:spPr>
-          <a:xfrm>
-            <a:off x="6095848" y="3648456"/>
-            <a:ext cx="0" cy="219456"/>
-          </a:xfrm>
-          <a:prstGeom prst="line">
-            <a:avLst/>
-          </a:prstGeom>
-          <a:noFill/>
-          <a:ln w="25400">
-            <a:solidFill>
-              <a:srgbClr val="6A9A52"/>
-            </a:solidFill>
-            <a:prstDash val="solid"/>
-            <a:tailEnd type="triangle"/>
-          </a:ln>
-        </p:spPr>
-      </p:sp>
-      <p:sp>
-        <p:nvSpPr>
-          <p:cNvPr id="18" name="Shape 16"/>
-          <p:cNvSpPr/>
-          <p:nvPr/>
-        </p:nvSpPr>
-        <p:spPr>
-          <a:xfrm>
-            <a:off x="3992728" y="3867912"/>
-            <a:ext cx="4206240" cy="658368"/>
-          </a:xfrm>
-          <a:prstGeom prst="roundRect">
-            <a:avLst>
-              <a:gd name="adj" fmla="val 11111"/>
-            </a:avLst>
-          </a:prstGeom>
-          <a:solidFill>
-            <a:srgbClr val="EEF3EA"/>
-          </a:solidFill>
-          <a:ln w="17780">
-            <a:solidFill>
-              <a:srgbClr val="2C5F2D"/>
-            </a:solidFill>
-            <a:prstDash val="solid"/>
-          </a:ln>
-        </p:spPr>
-      </p:sp>
-      <p:sp>
-        <p:nvSpPr>
-          <p:cNvPr id="19" name="Shape 17"/>
-          <p:cNvSpPr/>
-          <p:nvPr/>
-        </p:nvSpPr>
-        <p:spPr>
-          <a:xfrm>
-            <a:off x="4193896" y="4114800"/>
-            <a:ext cx="164592" cy="164592"/>
-          </a:xfrm>
-          <a:prstGeom prst="ellipse">
-            <a:avLst/>
-          </a:prstGeom>
-          <a:solidFill>
-            <a:srgbClr val="2C5F2D"/>
-          </a:solidFill>
-          <a:ln/>
-        </p:spPr>
-      </p:sp>
-      <p:sp>
-        <p:nvSpPr>
-          <p:cNvPr id="20" name="Text 18"/>
-          <p:cNvSpPr/>
-          <p:nvPr/>
-        </p:nvSpPr>
-        <p:spPr>
-          <a:xfrm>
-            <a:off x="4495648" y="3867912"/>
-            <a:ext cx="2194560" cy="658368"/>
-          </a:xfrm>
-          <a:prstGeom prst="rect">
-            <a:avLst/>
-          </a:prstGeom>
-          <a:noFill/>
-          <a:ln/>
-        </p:spPr>
-        <p:txBody>
-          <a:bodyPr wrap="square" lIns="0" tIns="0" rIns="0" bIns="0" rtlCol="0" anchor="ctr"/>
-          <a:lstStyle/>
-          <a:p>
-            <a:pPr indent="0" marL="0">
-              <a:buNone/>
-            </a:pPr>
-            <a:r>
-              <a:rPr lang="en-US" sz="1350" b="1" dirty="0">
-                <a:solidFill>
-                  <a:srgbClr val="1B2418"/>
-                </a:solidFill>
-                <a:latin typeface="Calibri" pitchFamily="34" charset="0"/>
-                <a:ea typeface="Calibri" pitchFamily="34" charset="-122"/>
-                <a:cs typeface="Calibri" pitchFamily="34" charset="-120"/>
-              </a:rPr>
-              <a:t>AWS Lambda</a:t>
-            </a:r>
-            <a:endParaRPr lang="en-US" sz="1350" dirty="0"/>
-          </a:p>
-        </p:txBody>
-      </p:sp>
-      <p:sp>
-        <p:nvSpPr>
-          <p:cNvPr id="21" name="Text 19"/>
-          <p:cNvSpPr/>
-          <p:nvPr/>
-        </p:nvSpPr>
-        <p:spPr>
-          <a:xfrm>
-            <a:off x="6644488" y="3867912"/>
-            <a:ext cx="1463040" cy="658368"/>
-          </a:xfrm>
-          <a:prstGeom prst="rect">
-            <a:avLst/>
-          </a:prstGeom>
-          <a:noFill/>
-          <a:ln/>
-        </p:spPr>
-        <p:txBody>
-          <a:bodyPr wrap="square" lIns="0" tIns="0" rIns="0" bIns="0" rtlCol="0" anchor="ctr"/>
-          <a:lstStyle/>
-          <a:p>
-            <a:pPr algn="r" indent="0" marL="0">
-              <a:buNone/>
-            </a:pPr>
-            <a:r>
-              <a:rPr lang="en-US" sz="950" dirty="0">
-                <a:solidFill>
-                  <a:srgbClr val="5F6E55"/>
-                </a:solidFill>
-                <a:latin typeface="Calibri" pitchFamily="34" charset="0"/>
-                <a:ea typeface="Calibri" pitchFamily="34" charset="-122"/>
-                <a:cs typeface="Calibri" pitchFamily="34" charset="-120"/>
-              </a:rPr>
-              <a:t>nodejs20 ingest</a:t>
-            </a:r>
-            <a:endParaRPr lang="en-US" sz="950" dirty="0"/>
-          </a:p>
-        </p:txBody>
-      </p:sp>
-      <p:sp>
-        <p:nvSpPr>
-          <p:cNvPr id="22" name="Shape 20"/>
-          <p:cNvSpPr/>
-          <p:nvPr/>
-        </p:nvSpPr>
-        <p:spPr>
-          <a:xfrm>
-            <a:off x="6095848" y="4526280"/>
-            <a:ext cx="0" cy="219456"/>
-          </a:xfrm>
-          <a:prstGeom prst="line">
-            <a:avLst/>
-          </a:prstGeom>
-          <a:noFill/>
-          <a:ln w="25400">
-            <a:solidFill>
-              <a:srgbClr val="6A9A52"/>
-            </a:solidFill>
-            <a:prstDash val="solid"/>
-            <a:tailEnd type="triangle"/>
-          </a:ln>
-        </p:spPr>
-      </p:sp>
-      <p:sp>
-        <p:nvSpPr>
-          <p:cNvPr id="23" name="Shape 21"/>
-          <p:cNvSpPr/>
-          <p:nvPr/>
-        </p:nvSpPr>
-        <p:spPr>
-          <a:xfrm>
-            <a:off x="3992728" y="4745736"/>
-            <a:ext cx="4206240" cy="658368"/>
-          </a:xfrm>
-          <a:prstGeom prst="roundRect">
-            <a:avLst>
-              <a:gd name="adj" fmla="val 11111"/>
-            </a:avLst>
-          </a:prstGeom>
-          <a:solidFill>
-            <a:srgbClr val="EEF3EA"/>
-          </a:solidFill>
-          <a:ln w="17780">
-            <a:solidFill>
-              <a:srgbClr val="2C5F2D"/>
-            </a:solidFill>
-            <a:prstDash val="solid"/>
-          </a:ln>
-        </p:spPr>
-      </p:sp>
-      <p:sp>
-        <p:nvSpPr>
-          <p:cNvPr id="24" name="Shape 22"/>
-          <p:cNvSpPr/>
-          <p:nvPr/>
-        </p:nvSpPr>
-        <p:spPr>
-          <a:xfrm>
-            <a:off x="4193896" y="4992624"/>
-            <a:ext cx="164592" cy="164592"/>
-          </a:xfrm>
-          <a:prstGeom prst="ellipse">
-            <a:avLst/>
-          </a:prstGeom>
-          <a:solidFill>
-            <a:srgbClr val="2C5F2D"/>
-          </a:solidFill>
-          <a:ln/>
-        </p:spPr>
-      </p:sp>
-      <p:sp>
-        <p:nvSpPr>
-          <p:cNvPr id="25" name="Text 23"/>
-          <p:cNvSpPr/>
-          <p:nvPr/>
-        </p:nvSpPr>
-        <p:spPr>
-          <a:xfrm>
-            <a:off x="4495648" y="4745736"/>
-            <a:ext cx="2194560" cy="658368"/>
-          </a:xfrm>
-          <a:prstGeom prst="rect">
-            <a:avLst/>
-          </a:prstGeom>
-          <a:noFill/>
-          <a:ln/>
-        </p:spPr>
-        <p:txBody>
-          <a:bodyPr wrap="square" lIns="0" tIns="0" rIns="0" bIns="0" rtlCol="0" anchor="ctr"/>
-          <a:lstStyle/>
-          <a:p>
-            <a:pPr indent="0" marL="0">
-              <a:buNone/>
-            </a:pPr>
-            <a:r>
-              <a:rPr lang="en-US" sz="1350" b="1" dirty="0">
-                <a:solidFill>
-                  <a:srgbClr val="1B2418"/>
-                </a:solidFill>
-                <a:latin typeface="Calibri" pitchFamily="34" charset="0"/>
-                <a:ea typeface="Calibri" pitchFamily="34" charset="-122"/>
-                <a:cs typeface="Calibri" pitchFamily="34" charset="-120"/>
-              </a:rPr>
-              <a:t>DynamoDB</a:t>
-            </a:r>
-            <a:endParaRPr lang="en-US" sz="1350" dirty="0"/>
-          </a:p>
-        </p:txBody>
-      </p:sp>
-      <p:sp>
-        <p:nvSpPr>
-          <p:cNvPr id="26" name="Text 24"/>
-          <p:cNvSpPr/>
-          <p:nvPr/>
-        </p:nvSpPr>
-        <p:spPr>
-          <a:xfrm>
-            <a:off x="6644488" y="4745736"/>
-            <a:ext cx="1463040" cy="658368"/>
-          </a:xfrm>
-          <a:prstGeom prst="rect">
-            <a:avLst/>
-          </a:prstGeom>
-          <a:noFill/>
-          <a:ln/>
-        </p:spPr>
-        <p:txBody>
-          <a:bodyPr wrap="square" lIns="0" tIns="0" rIns="0" bIns="0" rtlCol="0" anchor="ctr"/>
-          <a:lstStyle/>
-          <a:p>
-            <a:pPr algn="r" indent="0" marL="0">
-              <a:buNone/>
-            </a:pPr>
-            <a:r>
-              <a:rPr lang="en-US" sz="950" dirty="0">
-                <a:solidFill>
-                  <a:srgbClr val="5F6E55"/>
-                </a:solidFill>
-                <a:latin typeface="Calibri" pitchFamily="34" charset="0"/>
-                <a:ea typeface="Calibri" pitchFamily="34" charset="-122"/>
-                <a:cs typeface="Calibri" pitchFamily="34" charset="-120"/>
-              </a:rPr>
-              <a:t>window history</a:t>
-            </a:r>
-            <a:endParaRPr lang="en-US" sz="950" dirty="0"/>
-          </a:p>
-        </p:txBody>
-      </p:sp>
-      <p:sp>
-        <p:nvSpPr>
-          <p:cNvPr id="27" name="Shape 25"/>
-          <p:cNvSpPr/>
-          <p:nvPr/>
-        </p:nvSpPr>
-        <p:spPr>
-          <a:xfrm>
-            <a:off x="6095848" y="5404104"/>
-            <a:ext cx="0" cy="219456"/>
-          </a:xfrm>
-          <a:prstGeom prst="line">
-            <a:avLst/>
-          </a:prstGeom>
-          <a:noFill/>
-          <a:ln w="25400">
-            <a:solidFill>
-              <a:srgbClr val="6A9A52"/>
-            </a:solidFill>
-            <a:prstDash val="solid"/>
-            <a:tailEnd type="triangle"/>
-          </a:ln>
-        </p:spPr>
-      </p:sp>
-      <p:sp>
-        <p:nvSpPr>
-          <p:cNvPr id="28" name="Shape 26"/>
-          <p:cNvSpPr/>
-          <p:nvPr/>
-        </p:nvSpPr>
-        <p:spPr>
-          <a:xfrm>
-            <a:off x="3992728" y="5623560"/>
-            <a:ext cx="4206240" cy="658368"/>
-          </a:xfrm>
-          <a:prstGeom prst="roundRect">
-            <a:avLst>
-              <a:gd name="adj" fmla="val 11111"/>
-            </a:avLst>
-          </a:prstGeom>
-          <a:solidFill>
-            <a:srgbClr val="EEF3EA"/>
-          </a:solidFill>
-          <a:ln w="17780">
-            <a:solidFill>
-              <a:srgbClr val="3F7C3F"/>
-            </a:solidFill>
-            <a:prstDash val="solid"/>
-          </a:ln>
-        </p:spPr>
-      </p:sp>
-      <p:sp>
-        <p:nvSpPr>
-          <p:cNvPr id="29" name="Shape 27"/>
-          <p:cNvSpPr/>
-          <p:nvPr/>
-        </p:nvSpPr>
-        <p:spPr>
-          <a:xfrm>
-            <a:off x="4193896" y="5870448"/>
-            <a:ext cx="164592" cy="164592"/>
-          </a:xfrm>
-          <a:prstGeom prst="ellipse">
-            <a:avLst/>
-          </a:prstGeom>
-          <a:solidFill>
-            <a:srgbClr val="3F7C3F"/>
-          </a:solidFill>
-          <a:ln/>
-        </p:spPr>
-      </p:sp>
-      <p:sp>
-        <p:nvSpPr>
-          <p:cNvPr id="30" name="Text 28"/>
-          <p:cNvSpPr/>
-          <p:nvPr/>
-        </p:nvSpPr>
-        <p:spPr>
-          <a:xfrm>
-            <a:off x="4495648" y="5623560"/>
-            <a:ext cx="2194560" cy="658368"/>
-          </a:xfrm>
-          <a:prstGeom prst="rect">
-            <a:avLst/>
-          </a:prstGeom>
-          <a:noFill/>
-          <a:ln/>
-        </p:spPr>
-        <p:txBody>
-          <a:bodyPr wrap="square" lIns="0" tIns="0" rIns="0" bIns="0" rtlCol="0" anchor="ctr"/>
-          <a:lstStyle/>
-          <a:p>
-            <a:pPr indent="0" marL="0">
-              <a:buNone/>
-            </a:pPr>
-            <a:r>
-              <a:rPr lang="en-US" sz="1350" b="1" dirty="0">
-                <a:solidFill>
-                  <a:srgbClr val="1B2418"/>
-                </a:solidFill>
-                <a:latin typeface="Calibri" pitchFamily="34" charset="0"/>
-                <a:ea typeface="Calibri" pitchFamily="34" charset="-122"/>
-                <a:cs typeface="Calibri" pitchFamily="34" charset="-120"/>
-              </a:rPr>
-              <a:t>API GW + S3</a:t>
-            </a:r>
-            <a:endParaRPr lang="en-US" sz="1350" dirty="0"/>
-          </a:p>
-        </p:txBody>
-      </p:sp>
-      <p:sp>
-        <p:nvSpPr>
-          <p:cNvPr id="31" name="Text 29"/>
-          <p:cNvSpPr/>
-          <p:nvPr/>
-        </p:nvSpPr>
-        <p:spPr>
-          <a:xfrm>
-            <a:off x="6644488" y="5623560"/>
-            <a:ext cx="1463040" cy="658368"/>
-          </a:xfrm>
-          <a:prstGeom prst="rect">
-            <a:avLst/>
-          </a:prstGeom>
-          <a:noFill/>
-          <a:ln/>
-        </p:spPr>
-        <p:txBody>
-          <a:bodyPr wrap="square" lIns="0" tIns="0" rIns="0" bIns="0" rtlCol="0" anchor="ctr"/>
-          <a:lstStyle/>
-          <a:p>
-            <a:pPr algn="r" indent="0" marL="0">
-              <a:buNone/>
-            </a:pPr>
-            <a:r>
-              <a:rPr lang="en-US" sz="950" dirty="0">
-                <a:solidFill>
-                  <a:srgbClr val="5F6E55"/>
-                </a:solidFill>
-                <a:latin typeface="Calibri" pitchFamily="34" charset="0"/>
-                <a:ea typeface="Calibri" pitchFamily="34" charset="-122"/>
-                <a:cs typeface="Calibri" pitchFamily="34" charset="-120"/>
-              </a:rPr>
               <a:t>0–4 risk dial</a:t>
             </a:r>
-            <a:endParaRPr lang="en-US" sz="950" dirty="0"/>
-          </a:p>
-        </p:txBody>
-      </p:sp>
-      <p:sp>
-        <p:nvSpPr>
-          <p:cNvPr id="32" name="Text 30"/>
-          <p:cNvSpPr/>
-          <p:nvPr/>
-        </p:nvSpPr>
-        <p:spPr>
-          <a:xfrm>
-            <a:off x="2438248" y="1234440"/>
-            <a:ext cx="1371600" cy="365760"/>
-          </a:xfrm>
-          <a:prstGeom prst="rect">
-            <a:avLst/>
-          </a:prstGeom>
-          <a:noFill/>
-          <a:ln/>
-        </p:spPr>
-        <p:txBody>
-          <a:bodyPr wrap="square" rtlCol="0" anchor="ctr"/>
-          <a:lstStyle/>
-          <a:p>
-            <a:pPr algn="r" indent="0" marL="0">
-              <a:buNone/>
-            </a:pPr>
-            <a:r>
-              <a:rPr lang="en-US" sz="1100" b="1" spc="200" kern="0" dirty="0">
-                <a:solidFill>
-                  <a:srgbClr val="6A9A52"/>
-                </a:solidFill>
-                <a:latin typeface="Calibri" pitchFamily="34" charset="0"/>
-                <a:ea typeface="Calibri" pitchFamily="34" charset="-122"/>
-                <a:cs typeface="Calibri" pitchFamily="34" charset="-120"/>
-              </a:rPr>
-              <a:t>EDGE</a:t>
-            </a:r>
-            <a:endParaRPr lang="en-US" sz="1100" dirty="0"/>
-          </a:p>
-        </p:txBody>
-      </p:sp>
-      <p:sp>
-        <p:nvSpPr>
-          <p:cNvPr id="33" name="Text 31"/>
-          <p:cNvSpPr/>
-          <p:nvPr/>
-        </p:nvSpPr>
-        <p:spPr>
-          <a:xfrm>
-            <a:off x="2438248" y="2990088"/>
-            <a:ext cx="1371600" cy="365760"/>
-          </a:xfrm>
-          <a:prstGeom prst="rect">
-            <a:avLst/>
-          </a:prstGeom>
-          <a:noFill/>
-          <a:ln/>
-        </p:spPr>
-        <p:txBody>
-          <a:bodyPr wrap="square" rtlCol="0" anchor="ctr"/>
-          <a:lstStyle/>
-          <a:p>
-            <a:pPr algn="r" indent="0" marL="0">
-              <a:buNone/>
-            </a:pPr>
-            <a:r>
-              <a:rPr lang="en-US" sz="1100" b="1" spc="200" kern="0" dirty="0">
-                <a:solidFill>
-                  <a:srgbClr val="2C5F2D"/>
-                </a:solidFill>
-                <a:latin typeface="Calibri" pitchFamily="34" charset="0"/>
-                <a:ea typeface="Calibri" pitchFamily="34" charset="-122"/>
-                <a:cs typeface="Calibri" pitchFamily="34" charset="-120"/>
-              </a:rPr>
-              <a:t>CLOUD</a:t>
-            </a:r>
-            <a:endParaRPr lang="en-US" sz="1100" dirty="0"/>
-          </a:p>
-        </p:txBody>
-      </p:sp>
-      <p:sp>
-        <p:nvSpPr>
-          <p:cNvPr id="34" name="Text 32"/>
-          <p:cNvSpPr/>
-          <p:nvPr/>
-        </p:nvSpPr>
-        <p:spPr>
-          <a:xfrm>
-            <a:off x="8656168" y="2743200"/>
-            <a:ext cx="3291840" cy="2194560"/>
-          </a:xfrm>
-          <a:prstGeom prst="rect">
-            <a:avLst/>
-          </a:prstGeom>
-          <a:noFill/>
-          <a:ln/>
-        </p:spPr>
-        <p:txBody>
-          <a:bodyPr wrap="square" rtlCol="0" anchor="ctr"/>
-          <a:lstStyle/>
-          <a:p>
-            <a:pPr indent="0" marL="0">
-              <a:buNone/>
-            </a:pPr>
-            <a:r>
-              <a:rPr lang="en-US" sz="1500" i="1" dirty="0">
-                <a:solidFill>
-                  <a:srgbClr val="2C5F2D"/>
-                </a:solidFill>
-                <a:latin typeface="Calibri" pitchFamily="34" charset="0"/>
-                <a:ea typeface="Calibri" pitchFamily="34" charset="-122"/>
-                <a:cs typeface="Calibri" pitchFamily="34" charset="-120"/>
-              </a:rPr>
-              <a:t>Windowing, aggregation and fire alerts run beside the sensors, so warnings never wait on the cloud; a 0-to-4 fire-risk dial is derived per station on read.</a:t>
-            </a:r>
-            <a:endParaRPr lang="en-US" sz="1500" dirty="0"/>
+            <a:endParaRPr lang="en-US" sz="900" dirty="0"/>
           </a:p>
         </p:txBody>
       </p:sp>
@@ -2499,7 +2536,7 @@
     <p:bg>
       <p:bgPr>
         <a:solidFill>
-          <a:srgbClr val="FFFFFF"/>
+          <a:srgbClr val="14100C"/>
         </a:solidFill>
       </p:bgPr>
     </p:bg>
@@ -2519,23 +2556,92 @@
       </p:grpSpPr>
       <p:sp>
         <p:nvSpPr>
-          <p:cNvPr id="2" name="Text 0"/>
-          <p:cNvSpPr/>
-          <p:nvPr/>
-        </p:nvSpPr>
-        <p:spPr>
-          <a:xfrm>
-            <a:off x="640080" y="457200"/>
-            <a:ext cx="7315200" cy="640080"/>
-          </a:xfrm>
-          <a:prstGeom prst="rect">
-            <a:avLst/>
-          </a:prstGeom>
-          <a:noFill/>
-          <a:ln/>
-        </p:spPr>
-        <p:txBody>
-          <a:bodyPr wrap="square" rtlCol="0" anchor="ctr"/>
+          <p:cNvPr id="2" name="Shape 0"/>
+          <p:cNvSpPr/>
+          <p:nvPr/>
+        </p:nvSpPr>
+        <p:spPr>
+          <a:xfrm>
+            <a:off x="777240" y="685800"/>
+            <a:ext cx="10637215" cy="0"/>
+          </a:xfrm>
+          <a:prstGeom prst="line">
+            <a:avLst/>
+          </a:prstGeom>
+          <a:noFill/>
+          <a:ln w="44450">
+            <a:solidFill>
+              <a:srgbClr val="E8622C"/>
+            </a:solidFill>
+            <a:prstDash val="solid"/>
+          </a:ln>
+        </p:spPr>
+      </p:sp>
+      <p:sp>
+        <p:nvSpPr>
+          <p:cNvPr id="3" name="Shape 1"/>
+          <p:cNvSpPr/>
+          <p:nvPr/>
+        </p:nvSpPr>
+        <p:spPr>
+          <a:xfrm>
+            <a:off x="777240" y="786384"/>
+            <a:ext cx="10637215" cy="0"/>
+          </a:xfrm>
+          <a:prstGeom prst="line">
+            <a:avLst/>
+          </a:prstGeom>
+          <a:noFill/>
+          <a:ln w="12700">
+            <a:solidFill>
+              <a:srgbClr val="E8622C"/>
+            </a:solidFill>
+            <a:prstDash val="solid"/>
+          </a:ln>
+        </p:spPr>
+      </p:sp>
+      <p:sp>
+        <p:nvSpPr>
+          <p:cNvPr id="4" name="Shape 2"/>
+          <p:cNvSpPr/>
+          <p:nvPr/>
+        </p:nvSpPr>
+        <p:spPr>
+          <a:xfrm>
+            <a:off x="777240" y="6144768"/>
+            <a:ext cx="10637215" cy="0"/>
+          </a:xfrm>
+          <a:prstGeom prst="line">
+            <a:avLst/>
+          </a:prstGeom>
+          <a:noFill/>
+          <a:ln w="44450">
+            <a:solidFill>
+              <a:srgbClr val="E8622C"/>
+            </a:solidFill>
+            <a:prstDash val="solid"/>
+          </a:ln>
+        </p:spPr>
+      </p:sp>
+      <p:sp>
+        <p:nvSpPr>
+          <p:cNvPr id="5" name="Text 3"/>
+          <p:cNvSpPr/>
+          <p:nvPr/>
+        </p:nvSpPr>
+        <p:spPr>
+          <a:xfrm>
+            <a:off x="777240" y="1097280"/>
+            <a:ext cx="914400" cy="640080"/>
+          </a:xfrm>
+          <a:prstGeom prst="rect">
+            <a:avLst/>
+          </a:prstGeom>
+          <a:noFill/>
+          <a:ln/>
+        </p:spPr>
+        <p:txBody>
+          <a:bodyPr wrap="square" lIns="0" tIns="0" rIns="0" bIns="0" rtlCol="0" anchor="ctr"/>
           <a:lstStyle/>
           <a:p>
             <a:pPr indent="0" marL="0">
@@ -2544,13 +2650,13 @@
             <a:r>
               <a:rPr lang="en-US" sz="3000" b="1" dirty="0">
                 <a:solidFill>
-                  <a:srgbClr val="1B2418"/>
+                  <a:srgbClr val="E8622C"/>
                 </a:solidFill>
                 <a:latin typeface="Bookman Old Style" pitchFamily="34" charset="0"/>
                 <a:ea typeface="Bookman Old Style" pitchFamily="34" charset="-122"/>
                 <a:cs typeface="Bookman Old Style" pitchFamily="34" charset="-120"/>
               </a:rPr>
-              <a:t>Live Demo</a:t>
+              <a:t>02</a:t>
             </a:r>
             <a:endParaRPr lang="en-US" sz="3000" dirty="0"/>
           </a:p>
@@ -2558,14 +2664,92 @@
       </p:sp>
       <p:sp>
         <p:nvSpPr>
-          <p:cNvPr id="3" name="Text 1"/>
-          <p:cNvSpPr/>
-          <p:nvPr/>
-        </p:nvSpPr>
-        <p:spPr>
-          <a:xfrm>
-            <a:off x="658368" y="1143000"/>
-            <a:ext cx="10972800" cy="365760"/>
+          <p:cNvPr id="6" name="Text 4"/>
+          <p:cNvSpPr/>
+          <p:nvPr/>
+        </p:nvSpPr>
+        <p:spPr>
+          <a:xfrm>
+            <a:off x="1645920" y="1271016"/>
+            <a:ext cx="9768535" cy="274320"/>
+          </a:xfrm>
+          <a:prstGeom prst="rect">
+            <a:avLst/>
+          </a:prstGeom>
+          <a:noFill/>
+          <a:ln/>
+        </p:spPr>
+        <p:txBody>
+          <a:bodyPr wrap="square" lIns="0" tIns="0" rIns="0" bIns="0" rtlCol="0" anchor="ctr"/>
+          <a:lstStyle/>
+          <a:p>
+            <a:pPr indent="0" marL="0">
+              <a:buNone/>
+            </a:pPr>
+            <a:r>
+              <a:rPr lang="en-US" sz="1100" b="1" spc="200" kern="0" dirty="0">
+                <a:solidFill>
+                  <a:srgbClr val="8B98A6"/>
+                </a:solidFill>
+                <a:latin typeface="Calibri" pitchFamily="34" charset="0"/>
+                <a:ea typeface="Calibri" pitchFamily="34" charset="-122"/>
+                <a:cs typeface="Calibri" pitchFamily="34" charset="-120"/>
+              </a:rPr>
+              <a:t>LIVE DEMO</a:t>
+            </a:r>
+            <a:endParaRPr lang="en-US" sz="1100" dirty="0"/>
+          </a:p>
+        </p:txBody>
+      </p:sp>
+      <p:sp>
+        <p:nvSpPr>
+          <p:cNvPr id="7" name="Text 5"/>
+          <p:cNvSpPr/>
+          <p:nvPr/>
+        </p:nvSpPr>
+        <p:spPr>
+          <a:xfrm>
+            <a:off x="777240" y="1746504"/>
+            <a:ext cx="10637215" cy="640080"/>
+          </a:xfrm>
+          <a:prstGeom prst="rect">
+            <a:avLst/>
+          </a:prstGeom>
+          <a:noFill/>
+          <a:ln/>
+        </p:spPr>
+        <p:txBody>
+          <a:bodyPr wrap="square" lIns="0" tIns="0" rIns="0" bIns="0" rtlCol="0" anchor="ctr"/>
+          <a:lstStyle/>
+          <a:p>
+            <a:pPr indent="0" marL="0">
+              <a:buNone/>
+            </a:pPr>
+            <a:r>
+              <a:rPr lang="en-US" sz="2300" b="1" dirty="0">
+                <a:solidFill>
+                  <a:srgbClr val="EEF2F6"/>
+                </a:solidFill>
+                <a:latin typeface="Bookman Old Style" pitchFamily="34" charset="0"/>
+                <a:ea typeface="Bookman Old Style" pitchFamily="34" charset="-122"/>
+                <a:cs typeface="Bookman Old Style" pitchFamily="34" charset="-120"/>
+              </a:rPr>
+              <a:t>See it running on AWS</a:t>
+            </a:r>
+            <a:endParaRPr lang="en-US" sz="2300" dirty="0"/>
+          </a:p>
+        </p:txBody>
+      </p:sp>
+      <p:sp>
+        <p:nvSpPr>
+          <p:cNvPr id="8" name="Text 6"/>
+          <p:cNvSpPr/>
+          <p:nvPr/>
+        </p:nvSpPr>
+        <p:spPr>
+          <a:xfrm>
+            <a:off x="777240" y="2267712"/>
+            <a:ext cx="10637215" cy="274320"/>
           </a:xfrm>
           <a:prstGeom prst="rect">
             <a:avLst/>
@@ -2581,9 +2765,9 @@
               <a:buNone/>
             </a:pPr>
             <a:r>
-              <a:rPr lang="en-US" sz="1400" dirty="0">
-                <a:solidFill>
-                  <a:srgbClr val="3F7C3F"/>
+              <a:rPr lang="en-US" sz="1100" dirty="0">
+                <a:solidFill>
+                  <a:srgbClr val="E8622C"/>
                 </a:solidFill>
                 <a:latin typeface="Consolas" pitchFamily="34" charset="0"/>
                 <a:ea typeface="Consolas" pitchFamily="34" charset="-122"/>
@@ -2591,32 +2775,30 @@
               </a:rPr>
               <a:t>wfm-frontend-923613097540.s3.us-east-1.amazonaws.com</a:t>
             </a:r>
-            <a:endParaRPr lang="en-US" sz="1400" dirty="0"/>
-          </a:p>
-        </p:txBody>
-      </p:sp>
-      <p:sp>
-        <p:nvSpPr>
-          <p:cNvPr id="4" name="Shape 2"/>
-          <p:cNvSpPr/>
-          <p:nvPr/>
-        </p:nvSpPr>
-        <p:spPr>
-          <a:xfrm>
-            <a:off x="640080" y="1828800"/>
-            <a:ext cx="10881360" cy="1371600"/>
+            <a:endParaRPr lang="en-US" sz="1100" dirty="0"/>
+          </a:p>
+        </p:txBody>
+      </p:sp>
+      <p:sp>
+        <p:nvSpPr>
+          <p:cNvPr id="9" name="Shape 7"/>
+          <p:cNvSpPr/>
+          <p:nvPr/>
+        </p:nvSpPr>
+        <p:spPr>
+          <a:xfrm>
+            <a:off x="777240" y="2880360"/>
+            <a:ext cx="3301898" cy="2926080"/>
           </a:xfrm>
           <a:prstGeom prst="roundRect">
-            <a:avLst>
-              <a:gd name="adj" fmla="val 6667"/>
-            </a:avLst>
+            <a:avLst/>
           </a:prstGeom>
           <a:solidFill>
-            <a:srgbClr val="EEF3EA"/>
+            <a:srgbClr val="241D14"/>
           </a:solidFill>
-          <a:ln w="15240">
+          <a:ln w="12700">
             <a:solidFill>
-              <a:srgbClr val="3F7C3F"/>
+              <a:srgbClr val="383128"/>
             </a:solidFill>
             <a:prstDash val="solid"/>
           </a:ln>
@@ -2624,34 +2806,14 @@
       </p:sp>
       <p:sp>
         <p:nvSpPr>
-          <p:cNvPr id="5" name="Shape 3"/>
-          <p:cNvSpPr/>
-          <p:nvPr/>
-        </p:nvSpPr>
-        <p:spPr>
-          <a:xfrm>
-            <a:off x="960120" y="2203704"/>
-            <a:ext cx="621792" cy="621792"/>
-          </a:xfrm>
-          <a:prstGeom prst="ellipse">
-            <a:avLst/>
-          </a:prstGeom>
-          <a:solidFill>
-            <a:srgbClr val="2C5F2D"/>
-          </a:solidFill>
-          <a:ln/>
-        </p:spPr>
-      </p:sp>
-      <p:sp>
-        <p:nvSpPr>
-          <p:cNvPr id="6" name="Text 4"/>
-          <p:cNvSpPr/>
-          <p:nvPr/>
-        </p:nvSpPr>
-        <p:spPr>
-          <a:xfrm>
-            <a:off x="960120" y="2203704"/>
-            <a:ext cx="621792" cy="621792"/>
+          <p:cNvPr id="10" name="Text 8"/>
+          <p:cNvSpPr/>
+          <p:nvPr/>
+        </p:nvSpPr>
+        <p:spPr>
+          <a:xfrm>
+            <a:off x="1051560" y="3118104"/>
+            <a:ext cx="1828800" cy="777240"/>
           </a:xfrm>
           <a:prstGeom prst="rect">
             <a:avLst/>
@@ -2663,34 +2825,76 @@
           <a:bodyPr wrap="square" lIns="0" tIns="0" rIns="0" bIns="0" rtlCol="0" anchor="ctr"/>
           <a:lstStyle/>
           <a:p>
-            <a:pPr algn="ctr" indent="0" marL="0">
-              <a:buNone/>
-            </a:pPr>
-            <a:r>
-              <a:rPr lang="en-US" sz="2200" b="1" dirty="0">
-                <a:solidFill>
-                  <a:srgbClr val="FFFFFF"/>
+            <a:pPr indent="0" marL="0">
+              <a:buNone/>
+            </a:pPr>
+            <a:r>
+              <a:rPr lang="en-US" sz="3800" b="1" dirty="0">
+                <a:solidFill>
+                  <a:srgbClr val="E8622C"/>
                 </a:solidFill>
                 <a:latin typeface="Bookman Old Style" pitchFamily="34" charset="0"/>
                 <a:ea typeface="Bookman Old Style" pitchFamily="34" charset="-122"/>
                 <a:cs typeface="Bookman Old Style" pitchFamily="34" charset="-120"/>
               </a:rPr>
-              <a:t>1</a:t>
-            </a:r>
-            <a:endParaRPr lang="en-US" sz="2200" dirty="0"/>
-          </a:p>
-        </p:txBody>
-      </p:sp>
-      <p:sp>
-        <p:nvSpPr>
-          <p:cNvPr id="7" name="Text 5"/>
-          <p:cNvSpPr/>
-          <p:nvPr/>
-        </p:nvSpPr>
-        <p:spPr>
-          <a:xfrm>
-            <a:off x="1828800" y="2029968"/>
-            <a:ext cx="9418320" cy="411480"/>
+              <a:t>01</a:t>
+            </a:r>
+            <a:endParaRPr lang="en-US" sz="3800" dirty="0"/>
+          </a:p>
+        </p:txBody>
+      </p:sp>
+      <p:sp>
+        <p:nvSpPr>
+          <p:cNvPr id="11" name="Text 9"/>
+          <p:cNvSpPr/>
+          <p:nvPr/>
+        </p:nvSpPr>
+        <p:spPr>
+          <a:xfrm>
+            <a:off x="1069848" y="3931920"/>
+            <a:ext cx="2753258" cy="868680"/>
+          </a:xfrm>
+          <a:prstGeom prst="rect">
+            <a:avLst/>
+          </a:prstGeom>
+          <a:noFill/>
+          <a:ln/>
+        </p:spPr>
+        <p:txBody>
+          <a:bodyPr wrap="square" lIns="0" tIns="0" rIns="0" bIns="0" rtlCol="0" anchor="t"/>
+          <a:lstStyle/>
+          <a:p>
+            <a:pPr indent="0" marL="0">
+              <a:lnSpc>
+                <a:spcPct val="100000"/>
+              </a:lnSpc>
+              <a:buNone/>
+            </a:pPr>
+            <a:r>
+              <a:rPr lang="en-US" sz="1550" b="1" dirty="0">
+                <a:solidFill>
+                  <a:srgbClr val="EEF2F6"/>
+                </a:solidFill>
+                <a:latin typeface="Bookman Old Style" pitchFamily="34" charset="0"/>
+                <a:ea typeface="Bookman Old Style" pitchFamily="34" charset="-122"/>
+                <a:cs typeface="Bookman Old Style" pitchFamily="34" charset="-120"/>
+              </a:rPr>
+              <a:t>A 0-to-4 fire-risk dial per station</a:t>
+            </a:r>
+            <a:endParaRPr lang="en-US" sz="1550" dirty="0"/>
+          </a:p>
+        </p:txBody>
+      </p:sp>
+      <p:sp>
+        <p:nvSpPr>
+          <p:cNvPr id="12" name="Text 10"/>
+          <p:cNvSpPr/>
+          <p:nvPr/>
+        </p:nvSpPr>
+        <p:spPr>
+          <a:xfrm>
+            <a:off x="1069848" y="4800600"/>
+            <a:ext cx="2753258" cy="822960"/>
           </a:xfrm>
           <a:prstGeom prst="rect">
             <a:avLst/>
@@ -2703,33 +2907,61 @@
           <a:lstStyle/>
           <a:p>
             <a:pPr indent="0" marL="0">
-              <a:buNone/>
-            </a:pPr>
-            <a:r>
-              <a:rPr lang="en-US" sz="1700" b="1" dirty="0">
-                <a:solidFill>
-                  <a:srgbClr val="1B2418"/>
+              <a:lnSpc>
+                <a:spcPct val="120000"/>
+              </a:lnSpc>
+              <a:buNone/>
+            </a:pPr>
+            <a:r>
+              <a:rPr lang="en-US" sz="1200" dirty="0">
+                <a:solidFill>
+                  <a:srgbClr val="8B98A6"/>
                 </a:solidFill>
                 <a:latin typeface="Calibri" pitchFamily="34" charset="0"/>
                 <a:ea typeface="Calibri" pitchFamily="34" charset="-122"/>
                 <a:cs typeface="Calibri" pitchFamily="34" charset="-120"/>
               </a:rPr>
-              <a:t>A 0-to-4 fire-risk dial per station</a:t>
-            </a:r>
-            <a:endParaRPr lang="en-US" sz="1700" dirty="0"/>
-          </a:p>
-        </p:txBody>
-      </p:sp>
-      <p:sp>
-        <p:nvSpPr>
-          <p:cNvPr id="8" name="Text 6"/>
-          <p:cNvSpPr/>
-          <p:nvPr/>
-        </p:nvSpPr>
-        <p:spPr>
-          <a:xfrm>
-            <a:off x="1828800" y="2450592"/>
-            <a:ext cx="9418320" cy="594360"/>
+              <a:t>The dashboard grades each ranger station on read from earlier, lower thresholds — an escalation gradient ahead of any hard alarm.</a:t>
+            </a:r>
+            <a:endParaRPr lang="en-US" sz="1200" dirty="0"/>
+          </a:p>
+        </p:txBody>
+      </p:sp>
+      <p:sp>
+        <p:nvSpPr>
+          <p:cNvPr id="13" name="Shape 11"/>
+          <p:cNvSpPr/>
+          <p:nvPr/>
+        </p:nvSpPr>
+        <p:spPr>
+          <a:xfrm>
+            <a:off x="4444898" y="2880360"/>
+            <a:ext cx="3301898" cy="2926080"/>
+          </a:xfrm>
+          <a:prstGeom prst="roundRect">
+            <a:avLst/>
+          </a:prstGeom>
+          <a:solidFill>
+            <a:srgbClr val="241D14"/>
+          </a:solidFill>
+          <a:ln w="12700">
+            <a:solidFill>
+              <a:srgbClr val="383128"/>
+            </a:solidFill>
+            <a:prstDash val="solid"/>
+          </a:ln>
+        </p:spPr>
+      </p:sp>
+      <p:sp>
+        <p:nvSpPr>
+          <p:cNvPr id="14" name="Text 12"/>
+          <p:cNvSpPr/>
+          <p:nvPr/>
+        </p:nvSpPr>
+        <p:spPr>
+          <a:xfrm>
+            <a:off x="4719218" y="3118104"/>
+            <a:ext cx="1828800" cy="777240"/>
           </a:xfrm>
           <a:prstGeom prst="rect">
             <a:avLst/>
@@ -2742,48 +2974,127 @@
           <a:lstStyle/>
           <a:p>
             <a:pPr indent="0" marL="0">
+              <a:buNone/>
+            </a:pPr>
+            <a:r>
+              <a:rPr lang="en-US" sz="3800" b="1" dirty="0">
+                <a:solidFill>
+                  <a:srgbClr val="E8622C"/>
+                </a:solidFill>
+                <a:latin typeface="Bookman Old Style" pitchFamily="34" charset="0"/>
+                <a:ea typeface="Bookman Old Style" pitchFamily="34" charset="-122"/>
+                <a:cs typeface="Bookman Old Style" pitchFamily="34" charset="-120"/>
+              </a:rPr>
+              <a:t>02</a:t>
+            </a:r>
+            <a:endParaRPr lang="en-US" sz="3800" dirty="0"/>
+          </a:p>
+        </p:txBody>
+      </p:sp>
+      <p:sp>
+        <p:nvSpPr>
+          <p:cNvPr id="15" name="Text 13"/>
+          <p:cNvSpPr/>
+          <p:nvPr/>
+        </p:nvSpPr>
+        <p:spPr>
+          <a:xfrm>
+            <a:off x="4737506" y="3931920"/>
+            <a:ext cx="2753258" cy="868680"/>
+          </a:xfrm>
+          <a:prstGeom prst="rect">
+            <a:avLst/>
+          </a:prstGeom>
+          <a:noFill/>
+          <a:ln/>
+        </p:spPr>
+        <p:txBody>
+          <a:bodyPr wrap="square" lIns="0" tIns="0" rIns="0" bIns="0" rtlCol="0" anchor="t"/>
+          <a:lstStyle/>
+          <a:p>
+            <a:pPr indent="0" marL="0">
               <a:lnSpc>
-                <a:spcPct val="105000"/>
+                <a:spcPct val="100000"/>
               </a:lnSpc>
               <a:buNone/>
             </a:pPr>
             <a:r>
-              <a:rPr lang="en-US" sz="1300" dirty="0">
-                <a:solidFill>
-                  <a:srgbClr val="5F6E55"/>
+              <a:rPr lang="en-US" sz="1550" b="1" dirty="0">
+                <a:solidFill>
+                  <a:srgbClr val="EEF2F6"/>
+                </a:solidFill>
+                <a:latin typeface="Bookman Old Style" pitchFamily="34" charset="0"/>
+                <a:ea typeface="Bookman Old Style" pitchFamily="34" charset="-122"/>
+                <a:cs typeface="Bookman Old Style" pitchFamily="34" charset="-120"/>
+              </a:rPr>
+              <a:t>A smoke-density trend per station</a:t>
+            </a:r>
+            <a:endParaRPr lang="en-US" sz="1550" dirty="0"/>
+          </a:p>
+        </p:txBody>
+      </p:sp>
+      <p:sp>
+        <p:nvSpPr>
+          <p:cNvPr id="16" name="Text 14"/>
+          <p:cNvSpPr/>
+          <p:nvPr/>
+        </p:nvSpPr>
+        <p:spPr>
+          <a:xfrm>
+            <a:off x="4737506" y="4800600"/>
+            <a:ext cx="2753258" cy="822960"/>
+          </a:xfrm>
+          <a:prstGeom prst="rect">
+            <a:avLst/>
+          </a:prstGeom>
+          <a:noFill/>
+          <a:ln/>
+        </p:spPr>
+        <p:txBody>
+          <a:bodyPr wrap="square" lIns="0" tIns="0" rIns="0" bIns="0" rtlCol="0" anchor="ctr"/>
+          <a:lstStyle/>
+          <a:p>
+            <a:pPr indent="0" marL="0">
+              <a:lnSpc>
+                <a:spcPct val="120000"/>
+              </a:lnSpc>
+              <a:buNone/>
+            </a:pPr>
+            <a:r>
+              <a:rPr lang="en-US" sz="1200" dirty="0">
+                <a:solidFill>
+                  <a:srgbClr val="8B98A6"/>
                 </a:solidFill>
                 <a:latin typeface="Calibri" pitchFamily="34" charset="0"/>
                 <a:ea typeface="Calibri" pitchFamily="34" charset="-122"/>
                 <a:cs typeface="Calibri" pitchFamily="34" charset="-120"/>
               </a:rPr>
-              <a:t>The dashboard grades each ranger station on read from earlier, lower thresholds — an escalation gradient ahead of any hard alarm.</a:t>
-            </a:r>
-            <a:endParaRPr lang="en-US" sz="1300" dirty="0"/>
-          </a:p>
-        </p:txBody>
-      </p:sp>
-      <p:sp>
-        <p:nvSpPr>
-          <p:cNvPr id="9" name="Shape 7"/>
-          <p:cNvSpPr/>
-          <p:nvPr/>
-        </p:nvSpPr>
-        <p:spPr>
-          <a:xfrm>
-            <a:off x="640080" y="3401568"/>
-            <a:ext cx="5303520" cy="2606040"/>
+              <a:t>Both stations' smoke charts run live, so a rising smoke plume is visible on the trend before it trips a hard alert.</a:t>
+            </a:r>
+            <a:endParaRPr lang="en-US" sz="1200" dirty="0"/>
+          </a:p>
+        </p:txBody>
+      </p:sp>
+      <p:sp>
+        <p:nvSpPr>
+          <p:cNvPr id="17" name="Shape 15"/>
+          <p:cNvSpPr/>
+          <p:nvPr/>
+        </p:nvSpPr>
+        <p:spPr>
+          <a:xfrm>
+            <a:off x="8112557" y="2880360"/>
+            <a:ext cx="3301898" cy="2926080"/>
           </a:xfrm>
           <a:prstGeom prst="roundRect">
-            <a:avLst>
-              <a:gd name="adj" fmla="val 3509"/>
-            </a:avLst>
+            <a:avLst/>
           </a:prstGeom>
           <a:solidFill>
-            <a:srgbClr val="EEF3EA"/>
+            <a:srgbClr val="241D14"/>
           </a:solidFill>
-          <a:ln w="15240">
+          <a:ln w="12700">
             <a:solidFill>
-              <a:srgbClr val="3F7C3F"/>
+              <a:srgbClr val="383128"/>
             </a:solidFill>
             <a:prstDash val="solid"/>
           </a:ln>
@@ -2791,34 +3102,14 @@
       </p:sp>
       <p:sp>
         <p:nvSpPr>
-          <p:cNvPr id="10" name="Shape 8"/>
-          <p:cNvSpPr/>
-          <p:nvPr/>
-        </p:nvSpPr>
-        <p:spPr>
-          <a:xfrm>
-            <a:off x="914400" y="3675888"/>
-            <a:ext cx="603504" cy="603504"/>
-          </a:xfrm>
-          <a:prstGeom prst="ellipse">
-            <a:avLst/>
-          </a:prstGeom>
-          <a:solidFill>
-            <a:srgbClr val="2C5F2D"/>
-          </a:solidFill>
-          <a:ln/>
-        </p:spPr>
-      </p:sp>
-      <p:sp>
-        <p:nvSpPr>
-          <p:cNvPr id="11" name="Text 9"/>
-          <p:cNvSpPr/>
-          <p:nvPr/>
-        </p:nvSpPr>
-        <p:spPr>
-          <a:xfrm>
-            <a:off x="914400" y="3675888"/>
-            <a:ext cx="603504" cy="603504"/>
+          <p:cNvPr id="18" name="Text 16"/>
+          <p:cNvSpPr/>
+          <p:nvPr/>
+        </p:nvSpPr>
+        <p:spPr>
+          <a:xfrm>
+            <a:off x="8386877" y="3118104"/>
+            <a:ext cx="1828800" cy="777240"/>
           </a:xfrm>
           <a:prstGeom prst="rect">
             <a:avLst/>
@@ -2830,34 +3121,76 @@
           <a:bodyPr wrap="square" lIns="0" tIns="0" rIns="0" bIns="0" rtlCol="0" anchor="ctr"/>
           <a:lstStyle/>
           <a:p>
-            <a:pPr algn="ctr" indent="0" marL="0">
-              <a:buNone/>
-            </a:pPr>
-            <a:r>
-              <a:rPr lang="en-US" sz="2200" b="1" dirty="0">
-                <a:solidFill>
-                  <a:srgbClr val="FFFFFF"/>
+            <a:pPr indent="0" marL="0">
+              <a:buNone/>
+            </a:pPr>
+            <a:r>
+              <a:rPr lang="en-US" sz="3800" b="1" dirty="0">
+                <a:solidFill>
+                  <a:srgbClr val="E8622C"/>
                 </a:solidFill>
                 <a:latin typeface="Bookman Old Style" pitchFamily="34" charset="0"/>
                 <a:ea typeface="Bookman Old Style" pitchFamily="34" charset="-122"/>
                 <a:cs typeface="Bookman Old Style" pitchFamily="34" charset="-120"/>
               </a:rPr>
-              <a:t>2</a:t>
-            </a:r>
-            <a:endParaRPr lang="en-US" sz="2200" dirty="0"/>
-          </a:p>
-        </p:txBody>
-      </p:sp>
-      <p:sp>
-        <p:nvSpPr>
-          <p:cNvPr id="12" name="Text 10"/>
-          <p:cNvSpPr/>
-          <p:nvPr/>
-        </p:nvSpPr>
-        <p:spPr>
-          <a:xfrm>
-            <a:off x="914400" y="4425696"/>
-            <a:ext cx="4754880" cy="777240"/>
+              <a:t>03</a:t>
+            </a:r>
+            <a:endParaRPr lang="en-US" sz="3800" dirty="0"/>
+          </a:p>
+        </p:txBody>
+      </p:sp>
+      <p:sp>
+        <p:nvSpPr>
+          <p:cNvPr id="19" name="Text 17"/>
+          <p:cNvSpPr/>
+          <p:nvPr/>
+        </p:nvSpPr>
+        <p:spPr>
+          <a:xfrm>
+            <a:off x="8405165" y="3931920"/>
+            <a:ext cx="2753258" cy="868680"/>
+          </a:xfrm>
+          <a:prstGeom prst="rect">
+            <a:avLst/>
+          </a:prstGeom>
+          <a:noFill/>
+          <a:ln/>
+        </p:spPr>
+        <p:txBody>
+          <a:bodyPr wrap="square" lIns="0" tIns="0" rIns="0" bIns="0" rtlCol="0" anchor="t"/>
+          <a:lstStyle/>
+          <a:p>
+            <a:pPr indent="0" marL="0">
+              <a:lnSpc>
+                <a:spcPct val="100000"/>
+              </a:lnSpc>
+              <a:buNone/>
+            </a:pPr>
+            <a:r>
+              <a:rPr lang="en-US" sz="1550" b="1" dirty="0">
+                <a:solidFill>
+                  <a:srgbClr val="EEF2F6"/>
+                </a:solidFill>
+                <a:latin typeface="Bookman Old Style" pitchFamily="34" charset="0"/>
+                <a:ea typeface="Bookman Old Style" pitchFamily="34" charset="-122"/>
+                <a:cs typeface="Bookman Old Style" pitchFamily="34" charset="-120"/>
+              </a:rPr>
+              <a:t>A fire-detection alert on a smoke spike</a:t>
+            </a:r>
+            <a:endParaRPr lang="en-US" sz="1550" dirty="0"/>
+          </a:p>
+        </p:txBody>
+      </p:sp>
+      <p:sp>
+        <p:nvSpPr>
+          <p:cNvPr id="20" name="Text 18"/>
+          <p:cNvSpPr/>
+          <p:nvPr/>
+        </p:nvSpPr>
+        <p:spPr>
+          <a:xfrm>
+            <a:off x="8405165" y="4800600"/>
+            <a:ext cx="2753258" cy="822960"/>
           </a:xfrm>
           <a:prstGeom prst="rect">
             <a:avLst/>
@@ -2870,229 +3203,23 @@
           <a:lstStyle/>
           <a:p>
             <a:pPr indent="0" marL="0">
-              <a:buNone/>
-            </a:pPr>
-            <a:r>
-              <a:rPr lang="en-US" sz="1600" b="1" dirty="0">
-                <a:solidFill>
-                  <a:srgbClr val="1B2418"/>
+              <a:lnSpc>
+                <a:spcPct val="120000"/>
+              </a:lnSpc>
+              <a:buNone/>
+            </a:pPr>
+            <a:r>
+              <a:rPr lang="en-US" sz="1200" dirty="0">
+                <a:solidFill>
+                  <a:srgbClr val="8B98A6"/>
                 </a:solidFill>
                 <a:latin typeface="Calibri" pitchFamily="34" charset="0"/>
                 <a:ea typeface="Calibri" pitchFamily="34" charset="-122"/>
                 <a:cs typeface="Calibri" pitchFamily="34" charset="-120"/>
               </a:rPr>
-              <a:t>A smoke-density trend per station</a:t>
-            </a:r>
-            <a:endParaRPr lang="en-US" sz="1600" dirty="0"/>
-          </a:p>
-        </p:txBody>
-      </p:sp>
-      <p:sp>
-        <p:nvSpPr>
-          <p:cNvPr id="13" name="Text 11"/>
-          <p:cNvSpPr/>
-          <p:nvPr/>
-        </p:nvSpPr>
-        <p:spPr>
-          <a:xfrm>
-            <a:off x="914400" y="5184648"/>
-            <a:ext cx="4754880" cy="640080"/>
-          </a:xfrm>
-          <a:prstGeom prst="rect">
-            <a:avLst/>
-          </a:prstGeom>
-          <a:noFill/>
-          <a:ln/>
-        </p:spPr>
-        <p:txBody>
-          <a:bodyPr wrap="square" lIns="0" tIns="0" rIns="0" bIns="0" rtlCol="0" anchor="ctr"/>
-          <a:lstStyle/>
-          <a:p>
-            <a:pPr indent="0" marL="0">
-              <a:lnSpc>
-                <a:spcPct val="106000"/>
-              </a:lnSpc>
-              <a:buNone/>
-            </a:pPr>
-            <a:r>
-              <a:rPr lang="en-US" sz="1250" dirty="0">
-                <a:solidFill>
-                  <a:srgbClr val="5F6E55"/>
-                </a:solidFill>
-                <a:latin typeface="Calibri" pitchFamily="34" charset="0"/>
-                <a:ea typeface="Calibri" pitchFamily="34" charset="-122"/>
-                <a:cs typeface="Calibri" pitchFamily="34" charset="-120"/>
-              </a:rPr>
-              <a:t>Both stations' smoke charts run live, so a rising smoke plume is visible on the trend before it trips a hard alert.</a:t>
-            </a:r>
-            <a:endParaRPr lang="en-US" sz="1250" dirty="0"/>
-          </a:p>
-        </p:txBody>
-      </p:sp>
-      <p:sp>
-        <p:nvSpPr>
-          <p:cNvPr id="14" name="Shape 12"/>
-          <p:cNvSpPr/>
-          <p:nvPr/>
-        </p:nvSpPr>
-        <p:spPr>
-          <a:xfrm>
-            <a:off x="6217920" y="3401568"/>
-            <a:ext cx="5303520" cy="2606040"/>
-          </a:xfrm>
-          <a:prstGeom prst="roundRect">
-            <a:avLst>
-              <a:gd name="adj" fmla="val 3509"/>
-            </a:avLst>
-          </a:prstGeom>
-          <a:solidFill>
-            <a:srgbClr val="EEF3EA"/>
-          </a:solidFill>
-          <a:ln w="15240">
-            <a:solidFill>
-              <a:srgbClr val="3F7C3F"/>
-            </a:solidFill>
-            <a:prstDash val="solid"/>
-          </a:ln>
-        </p:spPr>
-      </p:sp>
-      <p:sp>
-        <p:nvSpPr>
-          <p:cNvPr id="15" name="Shape 13"/>
-          <p:cNvSpPr/>
-          <p:nvPr/>
-        </p:nvSpPr>
-        <p:spPr>
-          <a:xfrm>
-            <a:off x="6492240" y="3675888"/>
-            <a:ext cx="603504" cy="603504"/>
-          </a:xfrm>
-          <a:prstGeom prst="ellipse">
-            <a:avLst/>
-          </a:prstGeom>
-          <a:solidFill>
-            <a:srgbClr val="2C5F2D"/>
-          </a:solidFill>
-          <a:ln/>
-        </p:spPr>
-      </p:sp>
-      <p:sp>
-        <p:nvSpPr>
-          <p:cNvPr id="16" name="Text 14"/>
-          <p:cNvSpPr/>
-          <p:nvPr/>
-        </p:nvSpPr>
-        <p:spPr>
-          <a:xfrm>
-            <a:off x="6492240" y="3675888"/>
-            <a:ext cx="603504" cy="603504"/>
-          </a:xfrm>
-          <a:prstGeom prst="rect">
-            <a:avLst/>
-          </a:prstGeom>
-          <a:noFill/>
-          <a:ln/>
-        </p:spPr>
-        <p:txBody>
-          <a:bodyPr wrap="square" lIns="0" tIns="0" rIns="0" bIns="0" rtlCol="0" anchor="ctr"/>
-          <a:lstStyle/>
-          <a:p>
-            <a:pPr algn="ctr" indent="0" marL="0">
-              <a:buNone/>
-            </a:pPr>
-            <a:r>
-              <a:rPr lang="en-US" sz="2200" b="1" dirty="0">
-                <a:solidFill>
-                  <a:srgbClr val="FFFFFF"/>
-                </a:solidFill>
-                <a:latin typeface="Bookman Old Style" pitchFamily="34" charset="0"/>
-                <a:ea typeface="Bookman Old Style" pitchFamily="34" charset="-122"/>
-                <a:cs typeface="Bookman Old Style" pitchFamily="34" charset="-120"/>
-              </a:rPr>
-              <a:t>3</a:t>
-            </a:r>
-            <a:endParaRPr lang="en-US" sz="2200" dirty="0"/>
-          </a:p>
-        </p:txBody>
-      </p:sp>
-      <p:sp>
-        <p:nvSpPr>
-          <p:cNvPr id="17" name="Text 15"/>
-          <p:cNvSpPr/>
-          <p:nvPr/>
-        </p:nvSpPr>
-        <p:spPr>
-          <a:xfrm>
-            <a:off x="6492240" y="4425696"/>
-            <a:ext cx="4754880" cy="777240"/>
-          </a:xfrm>
-          <a:prstGeom prst="rect">
-            <a:avLst/>
-          </a:prstGeom>
-          <a:noFill/>
-          <a:ln/>
-        </p:spPr>
-        <p:txBody>
-          <a:bodyPr wrap="square" lIns="0" tIns="0" rIns="0" bIns="0" rtlCol="0" anchor="ctr"/>
-          <a:lstStyle/>
-          <a:p>
-            <a:pPr indent="0" marL="0">
-              <a:buNone/>
-            </a:pPr>
-            <a:r>
-              <a:rPr lang="en-US" sz="1600" b="1" dirty="0">
-                <a:solidFill>
-                  <a:srgbClr val="1B2418"/>
-                </a:solidFill>
-                <a:latin typeface="Calibri" pitchFamily="34" charset="0"/>
-                <a:ea typeface="Calibri" pitchFamily="34" charset="-122"/>
-                <a:cs typeface="Calibri" pitchFamily="34" charset="-120"/>
-              </a:rPr>
-              <a:t>A fire-detection alert on a smoke spike</a:t>
-            </a:r>
-            <a:endParaRPr lang="en-US" sz="1600" dirty="0"/>
-          </a:p>
-        </p:txBody>
-      </p:sp>
-      <p:sp>
-        <p:nvSpPr>
-          <p:cNvPr id="18" name="Text 16"/>
-          <p:cNvSpPr/>
-          <p:nvPr/>
-        </p:nvSpPr>
-        <p:spPr>
-          <a:xfrm>
-            <a:off x="6492240" y="5184648"/>
-            <a:ext cx="4754880" cy="640080"/>
-          </a:xfrm>
-          <a:prstGeom prst="rect">
-            <a:avLst/>
-          </a:prstGeom>
-          <a:noFill/>
-          <a:ln/>
-        </p:spPr>
-        <p:txBody>
-          <a:bodyPr wrap="square" lIns="0" tIns="0" rIns="0" bIns="0" rtlCol="0" anchor="ctr"/>
-          <a:lstStyle/>
-          <a:p>
-            <a:pPr indent="0" marL="0">
-              <a:lnSpc>
-                <a:spcPct val="106000"/>
-              </a:lnSpc>
-              <a:buNone/>
-            </a:pPr>
-            <a:r>
-              <a:rPr lang="en-US" sz="1250" dirty="0">
-                <a:solidFill>
-                  <a:srgbClr val="5F6E55"/>
-                </a:solidFill>
-                <a:latin typeface="Calibri" pitchFamily="34" charset="0"/>
-                <a:ea typeface="Calibri" pitchFamily="34" charset="-122"/>
-                <a:cs typeface="Calibri" pitchFamily="34" charset="-120"/>
-              </a:rPr>
               <a:t>Drive smoke density up on one station and the fire-detection alert fires within a window, dial climbing toward 4.</a:t>
             </a:r>
-            <a:endParaRPr lang="en-US" sz="1250" dirty="0"/>
+            <a:endParaRPr lang="en-US" sz="1200" dirty="0"/>
           </a:p>
         </p:txBody>
       </p:sp>
@@ -3110,7 +3237,7 @@
     <p:bg>
       <p:bgPr>
         <a:solidFill>
-          <a:srgbClr val="FFFFFF"/>
+          <a:srgbClr val="14100C"/>
         </a:solidFill>
       </p:bgPr>
     </p:bg>
@@ -3130,65 +3257,210 @@
       </p:grpSpPr>
       <p:sp>
         <p:nvSpPr>
-          <p:cNvPr id="2" name="Text 0"/>
-          <p:cNvSpPr/>
-          <p:nvPr/>
-        </p:nvSpPr>
-        <p:spPr>
-          <a:xfrm>
-            <a:off x="640080" y="502920"/>
-            <a:ext cx="10972800" cy="822960"/>
-          </a:xfrm>
-          <a:prstGeom prst="rect">
-            <a:avLst/>
-          </a:prstGeom>
-          <a:noFill/>
-          <a:ln/>
-        </p:spPr>
-        <p:txBody>
-          <a:bodyPr wrap="square" rtlCol="0" anchor="t"/>
-          <a:lstStyle/>
-          <a:p>
-            <a:pPr indent="0" marL="0">
-              <a:buNone/>
-            </a:pPr>
-            <a:r>
-              <a:rPr lang="en-US" sz="2800" b="1" dirty="0">
-                <a:solidFill>
-                  <a:srgbClr val="1B2418"/>
+          <p:cNvPr id="2" name="Shape 0"/>
+          <p:cNvSpPr/>
+          <p:nvPr/>
+        </p:nvSpPr>
+        <p:spPr>
+          <a:xfrm>
+            <a:off x="777240" y="685800"/>
+            <a:ext cx="10637215" cy="0"/>
+          </a:xfrm>
+          <a:prstGeom prst="line">
+            <a:avLst/>
+          </a:prstGeom>
+          <a:noFill/>
+          <a:ln w="44450">
+            <a:solidFill>
+              <a:srgbClr val="E8622C"/>
+            </a:solidFill>
+            <a:prstDash val="solid"/>
+          </a:ln>
+        </p:spPr>
+      </p:sp>
+      <p:sp>
+        <p:nvSpPr>
+          <p:cNvPr id="3" name="Shape 1"/>
+          <p:cNvSpPr/>
+          <p:nvPr/>
+        </p:nvSpPr>
+        <p:spPr>
+          <a:xfrm>
+            <a:off x="777240" y="786384"/>
+            <a:ext cx="10637215" cy="0"/>
+          </a:xfrm>
+          <a:prstGeom prst="line">
+            <a:avLst/>
+          </a:prstGeom>
+          <a:noFill/>
+          <a:ln w="12700">
+            <a:solidFill>
+              <a:srgbClr val="E8622C"/>
+            </a:solidFill>
+            <a:prstDash val="solid"/>
+          </a:ln>
+        </p:spPr>
+      </p:sp>
+      <p:sp>
+        <p:nvSpPr>
+          <p:cNvPr id="4" name="Shape 2"/>
+          <p:cNvSpPr/>
+          <p:nvPr/>
+        </p:nvSpPr>
+        <p:spPr>
+          <a:xfrm>
+            <a:off x="777240" y="6144768"/>
+            <a:ext cx="10637215" cy="0"/>
+          </a:xfrm>
+          <a:prstGeom prst="line">
+            <a:avLst/>
+          </a:prstGeom>
+          <a:noFill/>
+          <a:ln w="44450">
+            <a:solidFill>
+              <a:srgbClr val="E8622C"/>
+            </a:solidFill>
+            <a:prstDash val="solid"/>
+          </a:ln>
+        </p:spPr>
+      </p:sp>
+      <p:sp>
+        <p:nvSpPr>
+          <p:cNvPr id="5" name="Text 3"/>
+          <p:cNvSpPr/>
+          <p:nvPr/>
+        </p:nvSpPr>
+        <p:spPr>
+          <a:xfrm>
+            <a:off x="777240" y="1097280"/>
+            <a:ext cx="914400" cy="640080"/>
+          </a:xfrm>
+          <a:prstGeom prst="rect">
+            <a:avLst/>
+          </a:prstGeom>
+          <a:noFill/>
+          <a:ln/>
+        </p:spPr>
+        <p:txBody>
+          <a:bodyPr wrap="square" lIns="0" tIns="0" rIns="0" bIns="0" rtlCol="0" anchor="ctr"/>
+          <a:lstStyle/>
+          <a:p>
+            <a:pPr indent="0" marL="0">
+              <a:buNone/>
+            </a:pPr>
+            <a:r>
+              <a:rPr lang="en-US" sz="3000" b="1" dirty="0">
+                <a:solidFill>
+                  <a:srgbClr val="E8622C"/>
                 </a:solidFill>
                 <a:latin typeface="Bookman Old Style" pitchFamily="34" charset="0"/>
                 <a:ea typeface="Bookman Old Style" pitchFamily="34" charset="-122"/>
                 <a:cs typeface="Bookman Old Style" pitchFamily="34" charset="-120"/>
               </a:rPr>
-              <a:t>Hardest Part — an invisible credential bug</a:t>
-            </a:r>
-            <a:endParaRPr lang="en-US" sz="2800" dirty="0"/>
-          </a:p>
-        </p:txBody>
-      </p:sp>
-      <p:sp>
-        <p:nvSpPr>
-          <p:cNvPr id="3" name="Shape 1"/>
-          <p:cNvSpPr/>
-          <p:nvPr/>
-        </p:nvSpPr>
-        <p:spPr>
-          <a:xfrm>
-            <a:off x="731520" y="1920240"/>
-            <a:ext cx="10698480" cy="1965960"/>
+              <a:t>03</a:t>
+            </a:r>
+            <a:endParaRPr lang="en-US" sz="3000" dirty="0"/>
+          </a:p>
+        </p:txBody>
+      </p:sp>
+      <p:sp>
+        <p:nvSpPr>
+          <p:cNvPr id="6" name="Text 4"/>
+          <p:cNvSpPr/>
+          <p:nvPr/>
+        </p:nvSpPr>
+        <p:spPr>
+          <a:xfrm>
+            <a:off x="1645920" y="1271016"/>
+            <a:ext cx="9768535" cy="274320"/>
+          </a:xfrm>
+          <a:prstGeom prst="rect">
+            <a:avLst/>
+          </a:prstGeom>
+          <a:noFill/>
+          <a:ln/>
+        </p:spPr>
+        <p:txBody>
+          <a:bodyPr wrap="square" lIns="0" tIns="0" rIns="0" bIns="0" rtlCol="0" anchor="ctr"/>
+          <a:lstStyle/>
+          <a:p>
+            <a:pPr indent="0" marL="0">
+              <a:buNone/>
+            </a:pPr>
+            <a:r>
+              <a:rPr lang="en-US" sz="1100" b="1" spc="200" kern="0" dirty="0">
+                <a:solidFill>
+                  <a:srgbClr val="8B98A6"/>
+                </a:solidFill>
+                <a:latin typeface="Calibri" pitchFamily="34" charset="0"/>
+                <a:ea typeface="Calibri" pitchFamily="34" charset="-122"/>
+                <a:cs typeface="Calibri" pitchFamily="34" charset="-120"/>
+              </a:rPr>
+              <a:t>CHALLENGE</a:t>
+            </a:r>
+            <a:endParaRPr lang="en-US" sz="1100" dirty="0"/>
+          </a:p>
+        </p:txBody>
+      </p:sp>
+      <p:sp>
+        <p:nvSpPr>
+          <p:cNvPr id="7" name="Text 5"/>
+          <p:cNvSpPr/>
+          <p:nvPr/>
+        </p:nvSpPr>
+        <p:spPr>
+          <a:xfrm>
+            <a:off x="777240" y="1746504"/>
+            <a:ext cx="10637215" cy="640080"/>
+          </a:xfrm>
+          <a:prstGeom prst="rect">
+            <a:avLst/>
+          </a:prstGeom>
+          <a:noFill/>
+          <a:ln/>
+        </p:spPr>
+        <p:txBody>
+          <a:bodyPr wrap="square" lIns="0" tIns="0" rIns="0" bIns="0" rtlCol="0" anchor="ctr"/>
+          <a:lstStyle/>
+          <a:p>
+            <a:pPr indent="0" marL="0">
+              <a:buNone/>
+            </a:pPr>
+            <a:r>
+              <a:rPr lang="en-US" sz="2300" b="1" dirty="0">
+                <a:solidFill>
+                  <a:srgbClr val="EEF2F6"/>
+                </a:solidFill>
+                <a:latin typeface="Bookman Old Style" pitchFamily="34" charset="0"/>
+                <a:ea typeface="Bookman Old Style" pitchFamily="34" charset="-122"/>
+                <a:cs typeface="Bookman Old Style" pitchFamily="34" charset="-120"/>
+              </a:rPr>
+              <a:t>a grade before the alarm</a:t>
+            </a:r>
+            <a:endParaRPr lang="en-US" sz="2300" dirty="0"/>
+          </a:p>
+        </p:txBody>
+      </p:sp>
+      <p:sp>
+        <p:nvSpPr>
+          <p:cNvPr id="8" name="Shape 6"/>
+          <p:cNvSpPr/>
+          <p:nvPr/>
+        </p:nvSpPr>
+        <p:spPr>
+          <a:xfrm>
+            <a:off x="777240" y="2788920"/>
+            <a:ext cx="5090008" cy="3017520"/>
           </a:xfrm>
           <a:prstGeom prst="roundRect">
-            <a:avLst>
-              <a:gd name="adj" fmla="val 4651"/>
-            </a:avLst>
+            <a:avLst/>
           </a:prstGeom>
           <a:solidFill>
-            <a:srgbClr val="EEF3EA"/>
+            <a:srgbClr val="241D14"/>
           </a:solidFill>
-          <a:ln w="19050">
+          <a:ln w="12700">
             <a:solidFill>
-              <a:srgbClr val="E4772E"/>
+              <a:srgbClr val="383128"/>
             </a:solidFill>
             <a:prstDash val="solid"/>
           </a:ln>
@@ -3196,14 +3468,14 @@
       </p:sp>
       <p:sp>
         <p:nvSpPr>
-          <p:cNvPr id="4" name="Text 2"/>
-          <p:cNvSpPr/>
-          <p:nvPr/>
-        </p:nvSpPr>
-        <p:spPr>
-          <a:xfrm>
-            <a:off x="1005840" y="2103120"/>
-            <a:ext cx="3657600" cy="457200"/>
+          <p:cNvPr id="9" name="Text 7"/>
+          <p:cNvSpPr/>
+          <p:nvPr/>
+        </p:nvSpPr>
+        <p:spPr>
+          <a:xfrm>
+            <a:off x="1097280" y="3063240"/>
+            <a:ext cx="4449928" cy="320040"/>
           </a:xfrm>
           <a:prstGeom prst="rect">
             <a:avLst/>
@@ -3219,84 +3491,38 @@
               <a:buNone/>
             </a:pPr>
             <a:r>
-              <a:rPr lang="en-US" sz="1900" b="1" dirty="0">
-                <a:solidFill>
-                  <a:srgbClr val="E4772E"/>
-                </a:solidFill>
-                <a:latin typeface="Bookman Old Style" pitchFamily="34" charset="0"/>
-                <a:ea typeface="Bookman Old Style" pitchFamily="34" charset="-122"/>
-                <a:cs typeface="Bookman Old Style" pitchFamily="34" charset="-120"/>
-              </a:rPr>
-              <a:t>Problem</a:t>
-            </a:r>
-            <a:endParaRPr lang="en-US" sz="1900" dirty="0"/>
-          </a:p>
-        </p:txBody>
-      </p:sp>
-      <p:sp>
-        <p:nvSpPr>
-          <p:cNvPr id="5" name="Text 3"/>
-          <p:cNvSpPr/>
-          <p:nvPr/>
-        </p:nvSpPr>
-        <p:spPr>
-          <a:xfrm>
-            <a:off x="1005840" y="2578608"/>
-            <a:ext cx="9966960" cy="1188720"/>
-          </a:xfrm>
-          <a:prstGeom prst="rect">
-            <a:avLst/>
-          </a:prstGeom>
-          <a:noFill/>
-          <a:ln/>
-        </p:spPr>
-        <p:txBody>
-          <a:bodyPr wrap="square" lIns="0" tIns="0" rIns="0" bIns="0" rtlCol="0" anchor="ctr"/>
-          <a:lstStyle/>
-          <a:p>
-            <a:pPr indent="0" marL="0">
-              <a:lnSpc>
-                <a:spcPct val="105000"/>
-              </a:lnSpc>
-              <a:buNone/>
-            </a:pPr>
-            <a:r>
-              <a:rPr lang="en-US" sz="1300" dirty="0">
-                <a:solidFill>
-                  <a:srgbClr val="1B2418"/>
+              <a:rPr lang="en-US" sz="1200" b="1" spc="200" kern="0" dirty="0">
+                <a:solidFill>
+                  <a:srgbClr val="D1584E"/>
                 </a:solidFill>
                 <a:latin typeface="Calibri" pitchFamily="34" charset="0"/>
                 <a:ea typeface="Calibri" pitchFamily="34" charset="-122"/>
                 <a:cs typeface="Calibri" pitchFamily="34" charset="-120"/>
               </a:rPr>
-              <a:t>Locally the pipeline signs its queue and database calls with the emulator's dummy credentials, and it decided when to use them by checking whether an AWS access-key variable was present. But real AWS injects that exact variable into every function it runs — so in production every call would be signed with incomplete credentials and rejected. All 95 tests stayed green; nothing could fail until the first real deployment.</a:t>
-            </a:r>
-            <a:endParaRPr lang="en-US" sz="1300" dirty="0"/>
-          </a:p>
-        </p:txBody>
-      </p:sp>
-      <p:sp>
-        <p:nvSpPr>
-          <p:cNvPr id="6" name="Shape 4"/>
-          <p:cNvSpPr/>
-          <p:nvPr/>
-        </p:nvSpPr>
-        <p:spPr>
-          <a:xfrm>
-            <a:off x="731520" y="4041648"/>
-            <a:ext cx="10698480" cy="1965960"/>
-          </a:xfrm>
-          <a:prstGeom prst="roundRect">
-            <a:avLst>
-              <a:gd name="adj" fmla="val 4651"/>
-            </a:avLst>
-          </a:prstGeom>
-          <a:solidFill>
-            <a:srgbClr val="EEF3EA"/>
-          </a:solidFill>
+              <a:t>PROBLEM</a:t>
+            </a:r>
+            <a:endParaRPr lang="en-US" sz="1200" dirty="0"/>
+          </a:p>
+        </p:txBody>
+      </p:sp>
+      <p:sp>
+        <p:nvSpPr>
+          <p:cNvPr id="10" name="Shape 8"/>
+          <p:cNvSpPr/>
+          <p:nvPr/>
+        </p:nvSpPr>
+        <p:spPr>
+          <a:xfrm>
+            <a:off x="1097280" y="3447288"/>
+            <a:ext cx="4449928" cy="0"/>
+          </a:xfrm>
+          <a:prstGeom prst="line">
+            <a:avLst/>
+          </a:prstGeom>
+          <a:noFill/>
           <a:ln w="19050">
             <a:solidFill>
-              <a:srgbClr val="3F7C3F"/>
+              <a:srgbClr val="D1584E"/>
             </a:solidFill>
             <a:prstDash val="solid"/>
           </a:ln>
@@ -3304,82 +3530,172 @@
       </p:sp>
       <p:sp>
         <p:nvSpPr>
-          <p:cNvPr id="7" name="Text 5"/>
-          <p:cNvSpPr/>
-          <p:nvPr/>
-        </p:nvSpPr>
-        <p:spPr>
-          <a:xfrm>
-            <a:off x="1005840" y="4224528"/>
-            <a:ext cx="3657600" cy="457200"/>
-          </a:xfrm>
-          <a:prstGeom prst="rect">
-            <a:avLst/>
-          </a:prstGeom>
-          <a:noFill/>
-          <a:ln/>
-        </p:spPr>
-        <p:txBody>
-          <a:bodyPr wrap="square" lIns="0" tIns="0" rIns="0" bIns="0" rtlCol="0" anchor="ctr"/>
-          <a:lstStyle/>
-          <a:p>
-            <a:pPr indent="0" marL="0">
-              <a:buNone/>
-            </a:pPr>
-            <a:r>
-              <a:rPr lang="en-US" sz="1900" b="1" dirty="0">
-                <a:solidFill>
-                  <a:srgbClr val="3F7C3F"/>
-                </a:solidFill>
-                <a:latin typeface="Bookman Old Style" pitchFamily="34" charset="0"/>
-                <a:ea typeface="Bookman Old Style" pitchFamily="34" charset="-122"/>
-                <a:cs typeface="Bookman Old Style" pitchFamily="34" charset="-120"/>
-              </a:rPr>
-              <a:t>Solution</a:t>
-            </a:r>
-            <a:endParaRPr lang="en-US" sz="1900" dirty="0"/>
-          </a:p>
-        </p:txBody>
-      </p:sp>
-      <p:sp>
-        <p:nvSpPr>
-          <p:cNvPr id="8" name="Text 6"/>
-          <p:cNvSpPr/>
-          <p:nvPr/>
-        </p:nvSpPr>
-        <p:spPr>
-          <a:xfrm>
-            <a:off x="1005840" y="4700016"/>
-            <a:ext cx="9966960" cy="1188720"/>
-          </a:xfrm>
-          <a:prstGeom prst="rect">
-            <a:avLst/>
-          </a:prstGeom>
-          <a:noFill/>
-          <a:ln/>
-        </p:spPr>
-        <p:txBody>
-          <a:bodyPr wrap="square" lIns="0" tIns="0" rIns="0" bIns="0" rtlCol="0" anchor="ctr"/>
+          <p:cNvPr id="11" name="Text 9"/>
+          <p:cNvSpPr/>
+          <p:nvPr/>
+        </p:nvSpPr>
+        <p:spPr>
+          <a:xfrm>
+            <a:off x="1097280" y="3611880"/>
+            <a:ext cx="4449928" cy="2011680"/>
+          </a:xfrm>
+          <a:prstGeom prst="rect">
+            <a:avLst/>
+          </a:prstGeom>
+          <a:noFill/>
+          <a:ln/>
+        </p:spPr>
+        <p:txBody>
+          <a:bodyPr wrap="square" lIns="0" tIns="0" rIns="0" bIns="0" rtlCol="0" anchor="t"/>
           <a:lstStyle/>
           <a:p>
             <a:pPr indent="0" marL="0">
               <a:lnSpc>
-                <a:spcPct val="105000"/>
+                <a:spcPct val="128000"/>
               </a:lnSpc>
               <a:buNone/>
             </a:pPr>
             <a:r>
-              <a:rPr lang="en-US" sz="1300" dirty="0">
-                <a:solidFill>
-                  <a:srgbClr val="1B2418"/>
+              <a:rPr lang="en-US" sz="1350" dirty="0">
+                <a:solidFill>
+                  <a:srgbClr val="EEF2F6"/>
                 </a:solidFill>
                 <a:latin typeface="Calibri" pitchFamily="34" charset="0"/>
                 <a:ea typeface="Calibri" pitchFamily="34" charset="-122"/>
                 <a:cs typeface="Calibri" pitchFamily="34" charset="-120"/>
               </a:rPr>
-              <a:t>Gate on a signal that only exists locally: the emulator's endpoint address. On real AWS it is absent, so the platform's own credentials take over automatically. New tests now pin that behaviour down in both profiles.</a:t>
-            </a:r>
-            <a:endParaRPr lang="en-US" sz="1300" dirty="0"/>
+              <a:t>A hard hazard alarm tells a ranger something is already dangerous, but by the time smoke density crosses the alarm line a fire may be established. What the station really needs is an escalation gradient — how close to danger each station is drifting, right now — without weakening the hard alarms that trigger a response.</a:t>
+            </a:r>
+            <a:endParaRPr lang="en-US" sz="1350" dirty="0"/>
+          </a:p>
+        </p:txBody>
+      </p:sp>
+      <p:sp>
+        <p:nvSpPr>
+          <p:cNvPr id="12" name="Shape 10"/>
+          <p:cNvSpPr/>
+          <p:nvPr/>
+        </p:nvSpPr>
+        <p:spPr>
+          <a:xfrm>
+            <a:off x="6324448" y="2788920"/>
+            <a:ext cx="5090008" cy="3017520"/>
+          </a:xfrm>
+          <a:prstGeom prst="roundRect">
+            <a:avLst/>
+          </a:prstGeom>
+          <a:solidFill>
+            <a:srgbClr val="241D14"/>
+          </a:solidFill>
+          <a:ln w="12700">
+            <a:solidFill>
+              <a:srgbClr val="383128"/>
+            </a:solidFill>
+            <a:prstDash val="solid"/>
+          </a:ln>
+        </p:spPr>
+      </p:sp>
+      <p:sp>
+        <p:nvSpPr>
+          <p:cNvPr id="13" name="Text 11"/>
+          <p:cNvSpPr/>
+          <p:nvPr/>
+        </p:nvSpPr>
+        <p:spPr>
+          <a:xfrm>
+            <a:off x="6644488" y="3063240"/>
+            <a:ext cx="4449928" cy="320040"/>
+          </a:xfrm>
+          <a:prstGeom prst="rect">
+            <a:avLst/>
+          </a:prstGeom>
+          <a:noFill/>
+          <a:ln/>
+        </p:spPr>
+        <p:txBody>
+          <a:bodyPr wrap="square" lIns="0" tIns="0" rIns="0" bIns="0" rtlCol="0" anchor="ctr"/>
+          <a:lstStyle/>
+          <a:p>
+            <a:pPr indent="0" marL="0">
+              <a:buNone/>
+            </a:pPr>
+            <a:r>
+              <a:rPr lang="en-US" sz="1200" b="1" spc="200" kern="0" dirty="0">
+                <a:solidFill>
+                  <a:srgbClr val="3FAE82"/>
+                </a:solidFill>
+                <a:latin typeface="Calibri" pitchFamily="34" charset="0"/>
+                <a:ea typeface="Calibri" pitchFamily="34" charset="-122"/>
+                <a:cs typeface="Calibri" pitchFamily="34" charset="-120"/>
+              </a:rPr>
+              <a:t>SOLUTION</a:t>
+            </a:r>
+            <a:endParaRPr lang="en-US" sz="1200" dirty="0"/>
+          </a:p>
+        </p:txBody>
+      </p:sp>
+      <p:sp>
+        <p:nvSpPr>
+          <p:cNvPr id="14" name="Shape 12"/>
+          <p:cNvSpPr/>
+          <p:nvPr/>
+        </p:nvSpPr>
+        <p:spPr>
+          <a:xfrm>
+            <a:off x="6644488" y="3447288"/>
+            <a:ext cx="4449928" cy="0"/>
+          </a:xfrm>
+          <a:prstGeom prst="line">
+            <a:avLst/>
+          </a:prstGeom>
+          <a:noFill/>
+          <a:ln w="19050">
+            <a:solidFill>
+              <a:srgbClr val="3FAE82"/>
+            </a:solidFill>
+            <a:prstDash val="solid"/>
+          </a:ln>
+        </p:spPr>
+      </p:sp>
+      <p:sp>
+        <p:nvSpPr>
+          <p:cNvPr id="15" name="Text 13"/>
+          <p:cNvSpPr/>
+          <p:nvPr/>
+        </p:nvSpPr>
+        <p:spPr>
+          <a:xfrm>
+            <a:off x="6644488" y="3611880"/>
+            <a:ext cx="4449928" cy="2011680"/>
+          </a:xfrm>
+          <a:prstGeom prst="rect">
+            <a:avLst/>
+          </a:prstGeom>
+          <a:noFill/>
+          <a:ln/>
+        </p:spPr>
+        <p:txBody>
+          <a:bodyPr wrap="square" lIns="0" tIns="0" rIns="0" bIns="0" rtlCol="0" anchor="t"/>
+          <a:lstStyle/>
+          <a:p>
+            <a:pPr indent="0" marL="0">
+              <a:lnSpc>
+                <a:spcPct val="128000"/>
+              </a:lnSpc>
+              <a:buNone/>
+            </a:pPr>
+            <a:r>
+              <a:rPr lang="en-US" sz="1350" dirty="0">
+                <a:solidFill>
+                  <a:srgbClr val="EEF2F6"/>
+                </a:solidFill>
+                <a:latin typeface="Calibri" pitchFamily="34" charset="0"/>
+                <a:ea typeface="Calibri" pitchFamily="34" charset="-122"/>
+                <a:cs typeface="Calibri" pitchFamily="34" charset="-120"/>
+              </a:rPr>
+              <a:t>The fog still raises hard alarms at the edge, but the dashboard derives a graded zero-to-four fire-risk index live on every read, from earlier and lower thresholds than the alarms use. The result is a continuous escalation signal that climbs ahead of any hard alarm, computed on read and never stored, so the two tiers stay independent.</a:t>
+            </a:r>
+            <a:endParaRPr lang="en-US" sz="1350" dirty="0"/>
           </a:p>
         </p:txBody>
       </p:sp>
